--- a/presentation/thesis-presentation.pptx
+++ b/presentation/thesis-presentation.pptx
@@ -6,29 +6,30 @@
     <p:sldMasterId id="2147483650" r:id="rId3"/>
     <p:sldMasterId id="2147483652" r:id="rId4"/>
     <p:sldMasterId id="2147483654" r:id="rId5"/>
+    <p:sldMasterId id="2147483656" r:id="rId6"/>
   </p:sldMasterIdLst>
   <p:notesMasterIdLst>
-    <p:notesMasterId r:id="rId6"/>
+    <p:notesMasterId r:id="rId7"/>
   </p:notesMasterIdLst>
   <p:sldIdLst>
-    <p:sldId id="256" r:id="rId7"/>
-    <p:sldId id="257" r:id="rId8"/>
-    <p:sldId id="258" r:id="rId9"/>
-    <p:sldId id="259" r:id="rId10"/>
-    <p:sldId id="260" r:id="rId11"/>
-    <p:sldId id="261" r:id="rId12"/>
-    <p:sldId id="262" r:id="rId13"/>
-    <p:sldId id="263" r:id="rId14"/>
-    <p:sldId id="264" r:id="rId15"/>
-    <p:sldId id="265" r:id="rId16"/>
-    <p:sldId id="266" r:id="rId17"/>
-    <p:sldId id="267" r:id="rId18"/>
-    <p:sldId id="268" r:id="rId19"/>
-    <p:sldId id="269" r:id="rId20"/>
-    <p:sldId id="270" r:id="rId21"/>
-    <p:sldId id="271" r:id="rId22"/>
-    <p:sldId id="272" r:id="rId23"/>
-    <p:sldId id="273" r:id="rId24"/>
+    <p:sldId id="256" r:id="rId8"/>
+    <p:sldId id="257" r:id="rId9"/>
+    <p:sldId id="258" r:id="rId10"/>
+    <p:sldId id="259" r:id="rId11"/>
+    <p:sldId id="260" r:id="rId12"/>
+    <p:sldId id="261" r:id="rId13"/>
+    <p:sldId id="262" r:id="rId14"/>
+    <p:sldId id="263" r:id="rId15"/>
+    <p:sldId id="264" r:id="rId16"/>
+    <p:sldId id="265" r:id="rId17"/>
+    <p:sldId id="266" r:id="rId18"/>
+    <p:sldId id="267" r:id="rId19"/>
+    <p:sldId id="268" r:id="rId20"/>
+    <p:sldId id="269" r:id="rId21"/>
+    <p:sldId id="270" r:id="rId22"/>
+    <p:sldId id="271" r:id="rId23"/>
+    <p:sldId id="272" r:id="rId24"/>
+    <p:sldId id="273" r:id="rId25"/>
   </p:sldIdLst>
   <p:sldSz cx="9144000" cy="6858000"/>
   <p:notesSz cx="6858000" cy="9947275"/>
@@ -54,7 +55,7 @@
       </p:grpSpPr>
       <p:sp>
         <p:nvSpPr>
-          <p:cNvPr id="26" name="PlaceHolder 1"/>
+          <p:cNvPr id="29" name="PlaceHolder 1"/>
           <p:cNvSpPr>
             <a:spLocks noGrp="1"/>
           </p:cNvSpPr>
@@ -103,7 +104,7 @@
       </p:sp>
       <p:sp>
         <p:nvSpPr>
-          <p:cNvPr id="27" name="PlaceHolder 2"/>
+          <p:cNvPr id="30" name="PlaceHolder 2"/>
           <p:cNvSpPr>
             <a:spLocks noGrp="1"/>
           </p:cNvSpPr>
@@ -154,7 +155,7 @@
       </p:sp>
       <p:sp>
         <p:nvSpPr>
-          <p:cNvPr id="28" name="PlaceHolder 3"/>
+          <p:cNvPr id="31" name="PlaceHolder 3"/>
           <p:cNvSpPr>
             <a:spLocks noGrp="1"/>
           </p:cNvSpPr>
@@ -191,7 +192,7 @@
                 <a:uFillTx/>
                 <a:latin typeface="Times New Roman"/>
               </a:rPr>
-              <a:t> </a:t>
+              <a:t>&lt;header&gt;</a:t>
             </a:r>
             <a:endParaRPr b="0" lang="en-US" sz="1400" strike="noStrike" u="none">
               <a:solidFill>
@@ -205,12 +206,12 @@
       </p:sp>
       <p:sp>
         <p:nvSpPr>
-          <p:cNvPr id="29" name="PlaceHolder 4"/>
+          <p:cNvPr id="32" name="PlaceHolder 4"/>
           <p:cNvSpPr>
             <a:spLocks noGrp="1"/>
           </p:cNvSpPr>
           <p:nvPr>
-            <p:ph type="dt" idx="3"/>
+            <p:ph type="dt" idx="4"/>
           </p:nvPr>
         </p:nvSpPr>
         <p:spPr>
@@ -254,7 +255,7 @@
                 <a:uFillTx/>
                 <a:latin typeface="Times New Roman"/>
               </a:rPr>
-              <a:t> </a:t>
+              <a:t>&lt;date/time&gt;</a:t>
             </a:r>
             <a:endParaRPr b="0" lang="en-US" sz="1400" strike="noStrike" u="none">
               <a:solidFill>
@@ -268,12 +269,12 @@
       </p:sp>
       <p:sp>
         <p:nvSpPr>
-          <p:cNvPr id="30" name="PlaceHolder 5"/>
+          <p:cNvPr id="33" name="PlaceHolder 5"/>
           <p:cNvSpPr>
             <a:spLocks noGrp="1"/>
           </p:cNvSpPr>
           <p:nvPr>
-            <p:ph type="ftr" idx="4"/>
+            <p:ph type="ftr" idx="5"/>
           </p:nvPr>
         </p:nvSpPr>
         <p:spPr>
@@ -317,7 +318,7 @@
                 <a:uFillTx/>
                 <a:latin typeface="Times New Roman"/>
               </a:rPr>
-              <a:t> </a:t>
+              <a:t>&lt;footer&gt;</a:t>
             </a:r>
             <a:endParaRPr b="0" lang="en-US" sz="1400" strike="noStrike" u="none">
               <a:solidFill>
@@ -331,12 +332,12 @@
       </p:sp>
       <p:sp>
         <p:nvSpPr>
-          <p:cNvPr id="31" name="PlaceHolder 6"/>
+          <p:cNvPr id="34" name="PlaceHolder 6"/>
           <p:cNvSpPr>
             <a:spLocks noGrp="1"/>
           </p:cNvSpPr>
           <p:nvPr>
-            <p:ph type="sldNum" idx="5"/>
+            <p:ph type="sldNum" idx="6"/>
           </p:nvPr>
         </p:nvSpPr>
         <p:spPr>
@@ -372,7 +373,7 @@
             <a:pPr indent="0" algn="r">
               <a:buNone/>
             </a:pPr>
-            <a:fld id="{A56D74DB-4CF5-41E9-9F75-A37B0D7A5817}" type="slidenum">
+            <a:fld id="{B236F2D6-1FC5-46D8-8010-05817F30D54C}" type="slidenum">
               <a:rPr b="0" lang="en-US" sz="1400" strike="noStrike" u="none">
                 <a:solidFill>
                   <a:srgbClr val="000000"/>
@@ -380,7 +381,7 @@
                 <a:uFillTx/>
                 <a:latin typeface="Times New Roman"/>
               </a:rPr>
-              <a:t>1</a:t>
+              <a:t>&lt;number&gt;</a:t>
             </a:fld>
             <a:endParaRPr b="0" lang="en-US" sz="1400" strike="noStrike" u="none">
               <a:solidFill>
@@ -417,7 +418,7 @@
       </p:grpSpPr>
       <p:sp>
         <p:nvSpPr>
-          <p:cNvPr id="93" name="PlaceHolder 1"/>
+          <p:cNvPr id="98" name="PlaceHolder 1"/>
           <p:cNvSpPr>
             <a:spLocks noGrp="1"/>
           </p:cNvSpPr>
@@ -440,7 +441,7 @@
       </p:sp>
       <p:sp>
         <p:nvSpPr>
-          <p:cNvPr id="94" name="PlaceHolder 2"/>
+          <p:cNvPr id="99" name="PlaceHolder 2"/>
           <p:cNvSpPr>
             <a:spLocks noGrp="1"/>
           </p:cNvSpPr>
@@ -481,12 +482,12 @@
       </p:sp>
       <p:sp>
         <p:nvSpPr>
-          <p:cNvPr id="95" name="PlaceHolder 3"/>
+          <p:cNvPr id="100" name="PlaceHolder 3"/>
           <p:cNvSpPr>
             <a:spLocks noGrp="1"/>
           </p:cNvSpPr>
           <p:nvPr>
-            <p:ph type="sldNum" idx="6"/>
+            <p:ph type="sldNum" idx="7"/>
           </p:nvPr>
         </p:nvSpPr>
         <p:spPr>
@@ -535,7 +536,7 @@
                 <a:tab algn="l" pos="0"/>
               </a:tabLst>
             </a:pPr>
-            <a:fld id="{E4B6EEB9-4A99-49C7-AFDD-6042F6C198C3}" type="slidenum">
+            <a:fld id="{3B80F344-5A30-480D-8D9B-A7F4FB0FF5B5}" type="slidenum">
               <a:rPr b="0" lang="en-GB" sz="1200" strike="noStrike" u="none">
                 <a:solidFill>
                   <a:schemeClr val="dk1"/>
@@ -696,7 +697,7 @@
         <p:txBody>
           <a:bodyPr/>
           <a:p>
-            <a:fld id="{90FA5711-EA3F-41BC-99F7-3B7E8F0BE9E1}" type="slidenum">
+            <a:fld id="{4947B35E-BB21-4C2B-8E02-66CB30E7DEA3}" type="slidenum">
               <a:t>&lt;#&gt;</a:t>
             </a:fld>
           </a:p>
@@ -730,130 +731,6 @@
 </file>
 
 <file path=ppt/slideLayouts/slideLayout4.xml><?xml version="1.0" encoding="utf-8"?>
-<p:sldLayout xmlns:a="http://schemas.openxmlformats.org/drawingml/2006/main" xmlns:p="http://schemas.openxmlformats.org/presentationml/2006/main" xmlns:r="http://schemas.openxmlformats.org/officeDocument/2006/relationships" xmlns:p14="http://schemas.microsoft.com/office/powerpoint/2010/main" xmlns:p15="http://schemas.microsoft.com/office/powerpoint/2012/main" xmlns:mc="http://schemas.openxmlformats.org/markup-compatibility/2006" type="title" preserve="1">
-  <p:cSld name="Title &amp; Content 20pt_">
-    <p:spTree>
-      <p:nvGrpSpPr>
-        <p:cNvPr id="1" name=""/>
-        <p:cNvGrpSpPr/>
-        <p:nvPr/>
-      </p:nvGrpSpPr>
-      <p:grpSpPr>
-        <a:xfrm>
-          <a:off x="0" y="0"/>
-          <a:ext cx="0" cy="0"/>
-          <a:chOff x="0" y="0"/>
-          <a:chExt cx="0" cy="0"/>
-        </a:xfrm>
-      </p:grpSpPr>
-      <p:sp>
-        <p:nvSpPr>
-          <p:cNvPr id="24" name="PlaceHolder 1"/>
-          <p:cNvSpPr>
-            <a:spLocks noGrp="1"/>
-          </p:cNvSpPr>
-          <p:nvPr>
-            <p:ph type="title"/>
-          </p:nvPr>
-        </p:nvSpPr>
-        <p:spPr>
-          <a:xfrm>
-            <a:off x="457200" y="273600"/>
-            <a:ext cx="8229240" cy="1144800"/>
-          </a:xfrm>
-          <a:prstGeom prst="rect">
-            <a:avLst/>
-          </a:prstGeom>
-          <a:noFill/>
-          <a:ln w="0">
-            <a:noFill/>
-          </a:ln>
-        </p:spPr>
-        <p:txBody>
-          <a:bodyPr lIns="0" rIns="0" tIns="0" bIns="0" anchor="ctr">
-            <a:noAutofit/>
-          </a:bodyPr>
-          <a:p>
-            <a:pPr indent="0" algn="ctr">
-              <a:buNone/>
-            </a:pPr>
-            <a:endParaRPr b="0" lang="en-US" sz="4400" strike="noStrike" u="none">
-              <a:solidFill>
-                <a:srgbClr val="000000"/>
-              </a:solidFill>
-              <a:uFillTx/>
-              <a:latin typeface="Arial"/>
-            </a:endParaRPr>
-          </a:p>
-        </p:txBody>
-      </p:sp>
-      <p:sp>
-        <p:nvSpPr>
-          <p:cNvPr id="25" name="PlaceHolder 2"/>
-          <p:cNvSpPr>
-            <a:spLocks noGrp="1"/>
-          </p:cNvSpPr>
-          <p:nvPr>
-            <p:ph type="subTitle"/>
-          </p:nvPr>
-        </p:nvSpPr>
-        <p:spPr>
-          <a:xfrm>
-            <a:off x="457200" y="1604520"/>
-            <a:ext cx="8229240" cy="3977280"/>
-          </a:xfrm>
-          <a:prstGeom prst="rect">
-            <a:avLst/>
-          </a:prstGeom>
-          <a:noFill/>
-          <a:ln w="0">
-            <a:noFill/>
-          </a:ln>
-        </p:spPr>
-        <p:txBody>
-          <a:bodyPr lIns="0" rIns="0" tIns="0" bIns="0" anchor="ctr">
-            <a:noAutofit/>
-          </a:bodyPr>
-          <a:p>
-            <a:pPr indent="0" algn="ctr">
-              <a:buNone/>
-            </a:pPr>
-            <a:endParaRPr b="0" lang="en-US" sz="3200" strike="noStrike" u="none">
-              <a:solidFill>
-                <a:srgbClr val="000000"/>
-              </a:solidFill>
-              <a:uFillTx/>
-              <a:latin typeface="Arial"/>
-            </a:endParaRPr>
-          </a:p>
-        </p:txBody>
-      </p:sp>
-      <p:sp>
-        <p:nvSpPr>
-          <p:cNvPr id="4" name="PlaceHolder 3"/>
-          <p:cNvSpPr>
-            <a:spLocks noGrp="1"/>
-          </p:cNvSpPr>
-          <p:nvPr>
-            <p:ph type="sldNum" idx="2"/>
-          </p:nvPr>
-        </p:nvSpPr>
-        <p:spPr/>
-        <p:txBody>
-          <a:bodyPr/>
-          <a:p>
-            <a:fld id="{8D7E613C-53F8-4D76-A23C-486EFA9C2BEF}" type="slidenum">
-              <a:t>&lt;#&gt;</a:t>
-            </a:fld>
-          </a:p>
-        </p:txBody>
-      </p:sp>
-    </p:spTree>
-  </p:cSld>
-</p:sldLayout>
-</file>
-
-<file path=ppt/slideLayouts/slideLayout5.xml><?xml version="1.0" encoding="utf-8"?>
 <p:sldLayout xmlns:a="http://schemas.openxmlformats.org/drawingml/2006/main" xmlns:p="http://schemas.openxmlformats.org/presentationml/2006/main" xmlns:r="http://schemas.openxmlformats.org/officeDocument/2006/relationships" xmlns:p14="http://schemas.microsoft.com/office/powerpoint/2010/main" xmlns:p15="http://schemas.microsoft.com/office/powerpoint/2012/main" xmlns:mc="http://schemas.openxmlformats.org/markup-compatibility/2006" type="blank" preserve="1">
   <p:cSld name="Title &amp; Content 20pt_">
     <p:spTree>
@@ -884,7 +761,49 @@
         <p:txBody>
           <a:bodyPr/>
           <a:p>
-            <a:fld id="{FF5F27C5-0FE8-47A2-9DFE-0C5CC606F99A}" type="slidenum">
+            <a:fld id="{BB9CB812-3BD2-404C-8179-2796CF1770FB}" type="slidenum">
+              <a:t>&lt;#&gt;</a:t>
+            </a:fld>
+          </a:p>
+        </p:txBody>
+      </p:sp>
+    </p:spTree>
+  </p:cSld>
+</p:sldLayout>
+</file>
+
+<file path=ppt/slideLayouts/slideLayout5.xml><?xml version="1.0" encoding="utf-8"?>
+<p:sldLayout xmlns:a="http://schemas.openxmlformats.org/drawingml/2006/main" xmlns:p="http://schemas.openxmlformats.org/presentationml/2006/main" xmlns:r="http://schemas.openxmlformats.org/officeDocument/2006/relationships" xmlns:p14="http://schemas.microsoft.com/office/powerpoint/2010/main" xmlns:p15="http://schemas.microsoft.com/office/powerpoint/2012/main" xmlns:mc="http://schemas.openxmlformats.org/markup-compatibility/2006" type="blank" preserve="1">
+  <p:cSld name="Title &amp; Content 20pt__">
+    <p:spTree>
+      <p:nvGrpSpPr>
+        <p:cNvPr id="1" name=""/>
+        <p:cNvGrpSpPr/>
+        <p:nvPr/>
+      </p:nvGrpSpPr>
+      <p:grpSpPr>
+        <a:xfrm>
+          <a:off x="0" y="0"/>
+          <a:ext cx="0" cy="0"/>
+          <a:chOff x="0" y="0"/>
+          <a:chExt cx="0" cy="0"/>
+        </a:xfrm>
+      </p:grpSpPr>
+      <p:sp>
+        <p:nvSpPr>
+          <p:cNvPr id="2" name="PlaceHolder 1"/>
+          <p:cNvSpPr>
+            <a:spLocks noGrp="1"/>
+          </p:cNvSpPr>
+          <p:nvPr>
+            <p:ph type="sldNum" idx="3"/>
+          </p:nvPr>
+        </p:nvSpPr>
+        <p:spPr/>
+        <p:txBody>
+          <a:bodyPr/>
+          <a:p>
+            <a:fld id="{5867B532-6823-49C7-A832-194C66D093D5}" type="slidenum">
               <a:t>&lt;#&gt;</a:t>
             </a:fld>
           </a:p>
@@ -1089,30 +1008,20 @@
             <a:noAutofit/>
           </a:bodyPr>
           <a:p>
-            <a:pPr indent="0">
+            <a:pPr indent="0" algn="ctr">
               <a:buNone/>
             </a:pPr>
             <a:r>
-              <a:rPr b="0" lang="en-US" sz="1800" strike="noStrike" u="none">
+              <a:rPr b="0" lang="en-US" sz="4400" strike="noStrike" u="none">
                 <a:solidFill>
                   <a:srgbClr val="000000"/>
                 </a:solidFill>
                 <a:uFillTx/>
                 <a:latin typeface="Arial"/>
               </a:rPr>
-              <a:t>Click to edit the title </a:t>
-            </a:r>
-            <a:r>
-              <a:rPr b="0" lang="en-US" sz="1800" strike="noStrike" u="none">
-                <a:solidFill>
-                  <a:srgbClr val="000000"/>
-                </a:solidFill>
-                <a:uFillTx/>
-                <a:latin typeface="Arial"/>
-              </a:rPr>
-              <a:t>text format</a:t>
-            </a:r>
-            <a:endParaRPr b="0" lang="en-US" sz="1800" strike="noStrike" u="none">
+              <a:t>Click to edit the title text format</a:t>
+            </a:r>
+            <a:endParaRPr b="0" lang="en-US" sz="4400" strike="noStrike" u="none">
               <a:solidFill>
                 <a:srgbClr val="000000"/>
               </a:solidFill>
@@ -1544,7 +1453,7 @@
                 <a:tab algn="l" pos="0"/>
               </a:tabLst>
             </a:pPr>
-            <a:fld id="{EF6E7B9E-7751-44E6-8535-A124998F46FB}" type="slidenum">
+            <a:fld id="{AA9FD90B-9860-4132-BDB5-CD1EECBA1F5F}" type="slidenum">
               <a:rPr b="0" lang="en-IE" sz="1200" strike="noStrike" u="none">
                 <a:solidFill>
                   <a:schemeClr val="dk1">
@@ -1554,7 +1463,7 @@
                 <a:uFillTx/>
                 <a:latin typeface="Calibri"/>
               </a:rPr>
-              <a:t>1</a:t>
+              <a:t>&lt;number&gt;</a:t>
             </a:fld>
             <a:endParaRPr b="0" lang="en-US" sz="1200" strike="noStrike" u="none">
               <a:solidFill>
@@ -1605,37 +1514,7 @@
                 <a:uFillTx/>
                 <a:latin typeface="Arial"/>
               </a:rPr>
-              <a:t>Click to </a:t>
-            </a:r>
-            <a:r>
-              <a:rPr b="0" lang="en-US" sz="4400" strike="noStrike" u="none">
-                <a:solidFill>
-                  <a:srgbClr val="000000"/>
-                </a:solidFill>
-                <a:uFillTx/>
-                <a:latin typeface="Arial"/>
-              </a:rPr>
-              <a:t>edit the </a:t>
-            </a:r>
-            <a:r>
-              <a:rPr b="0" lang="en-US" sz="4400" strike="noStrike" u="none">
-                <a:solidFill>
-                  <a:srgbClr val="000000"/>
-                </a:solidFill>
-                <a:uFillTx/>
-                <a:latin typeface="Arial"/>
-              </a:rPr>
-              <a:t>title text </a:t>
-            </a:r>
-            <a:r>
-              <a:rPr b="0" lang="en-US" sz="4400" strike="noStrike" u="none">
-                <a:solidFill>
-                  <a:srgbClr val="000000"/>
-                </a:solidFill>
-                <a:uFillTx/>
-                <a:latin typeface="Arial"/>
-              </a:rPr>
-              <a:t>format</a:t>
+              <a:t>Click to edit the title text format</a:t>
             </a:r>
             <a:endParaRPr b="0" lang="en-US" sz="4400" strike="noStrike" u="none">
               <a:solidFill>
@@ -2534,7 +2413,7 @@
                 <a:tab algn="l" pos="0"/>
               </a:tabLst>
             </a:pPr>
-            <a:fld id="{C53AD5CB-E5C9-40B8-9556-5FD5555C3685}" type="slidenum">
+            <a:fld id="{DDBE7871-E32A-4246-B7EA-FA6DA916F298}" type="slidenum">
               <a:rPr b="0" lang="en-IE" sz="1200" strike="noStrike" u="none">
                 <a:solidFill>
                   <a:schemeClr val="dk1">
@@ -2544,7 +2423,7 @@
                 <a:uFillTx/>
                 <a:latin typeface="Calibri"/>
               </a:rPr>
-              <a:t>1</a:t>
+              <a:t>&lt;number&gt;</a:t>
             </a:fld>
             <a:endParaRPr b="0" lang="en-US" sz="1200" strike="noStrike" u="none">
               <a:solidFill>
@@ -2851,7 +2730,501 @@
   <p:clrMap bg1="lt1" tx1="dk1" bg2="lt2" tx2="dk2" accent1="accent1" accent2="accent2" accent3="accent3" accent4="accent4" accent5="accent5" accent6="accent6" hlink="hlink" folHlink="folHlink"/>
   <p:sldLayoutIdLst>
     <p:sldLayoutId id="2147483655" r:id="rId2"/>
-    <p:sldLayoutId id="2147483656" r:id="rId3"/>
+  </p:sldLayoutIdLst>
+</p:sldMaster>
+</file>
+
+<file path=ppt/slideMasters/slideMaster5.xml><?xml version="1.0" encoding="utf-8"?>
+<p:sldMaster xmlns:a="http://schemas.openxmlformats.org/drawingml/2006/main" xmlns:p="http://schemas.openxmlformats.org/presentationml/2006/main" xmlns:r="http://schemas.openxmlformats.org/officeDocument/2006/relationships" xmlns:p14="http://schemas.microsoft.com/office/powerpoint/2010/main" xmlns:p15="http://schemas.microsoft.com/office/powerpoint/2012/main" xmlns:mc="http://schemas.openxmlformats.org/markup-compatibility/2006">
+  <p:cSld>
+    <p:bg>
+      <p:bgPr>
+        <a:solidFill>
+          <a:srgbClr val="ffffff"/>
+        </a:solidFill>
+      </p:bgPr>
+    </p:bg>
+    <p:spTree>
+      <p:nvGrpSpPr>
+        <p:cNvPr id="1" name=""/>
+        <p:cNvGrpSpPr/>
+        <p:nvPr/>
+      </p:nvGrpSpPr>
+      <p:grpSpPr>
+        <a:xfrm>
+          <a:off x="0" y="0"/>
+          <a:ext cx="0" cy="0"/>
+          <a:chOff x="0" y="0"/>
+          <a:chExt cx="0" cy="0"/>
+        </a:xfrm>
+      </p:grpSpPr>
+      <p:sp>
+        <p:nvSpPr>
+          <p:cNvPr id="24" name="Rectangle 10"/>
+          <p:cNvSpPr/>
+          <p:nvPr/>
+        </p:nvSpPr>
+        <p:spPr>
+          <a:xfrm>
+            <a:off x="0" y="6498000"/>
+            <a:ext cx="9142920" cy="358920"/>
+          </a:xfrm>
+          <a:prstGeom prst="rect">
+            <a:avLst/>
+          </a:prstGeom>
+          <a:solidFill>
+            <a:srgbClr val="0e73b9"/>
+          </a:solidFill>
+          <a:ln w="3240">
+            <a:noFill/>
+          </a:ln>
+        </p:spPr>
+        <p:style>
+          <a:lnRef idx="0"/>
+          <a:fillRef idx="0"/>
+          <a:effectRef idx="0"/>
+          <a:fontRef idx="minor"/>
+        </p:style>
+        <p:txBody>
+          <a:bodyPr lIns="90000" rIns="90000" tIns="45000" bIns="45000" anchor="t">
+            <a:noAutofit/>
+          </a:bodyPr>
+          <a:p>
+            <a:pPr marL="727200" defTabSz="914400">
+              <a:lnSpc>
+                <a:spcPct val="100000"/>
+              </a:lnSpc>
+              <a:tabLst>
+                <a:tab algn="l" pos="0"/>
+              </a:tabLst>
+            </a:pPr>
+            <a:r>
+              <a:rPr b="1" lang="en-GB" sz="1000" strike="noStrike" u="none">
+                <a:solidFill>
+                  <a:schemeClr val="lt1"/>
+                </a:solidFill>
+                <a:uFillTx/>
+                <a:latin typeface="Calibri"/>
+                <a:ea typeface="DejaVu Sans"/>
+              </a:rPr>
+              <a:t>Trinity College Dublin, </a:t>
+            </a:r>
+            <a:r>
+              <a:rPr b="0" lang="en-GB" sz="1000" strike="noStrike" u="none">
+                <a:solidFill>
+                  <a:schemeClr val="lt1"/>
+                </a:solidFill>
+                <a:uFillTx/>
+                <a:latin typeface="Calibri"/>
+                <a:ea typeface="DejaVu Sans"/>
+              </a:rPr>
+              <a:t>The University of Dublin</a:t>
+            </a:r>
+            <a:endParaRPr b="0" lang="en-US" sz="1000" strike="noStrike" u="none">
+              <a:solidFill>
+                <a:srgbClr val="ffffff"/>
+              </a:solidFill>
+              <a:uFillTx/>
+              <a:latin typeface="Arial"/>
+            </a:endParaRPr>
+          </a:p>
+        </p:txBody>
+      </p:sp>
+      <p:cxnSp>
+        <p:nvCxnSpPr>
+          <p:cNvPr id="25" name="Straight Connector 5"/>
+          <p:cNvCxnSpPr/>
+          <p:nvPr/>
+        </p:nvCxnSpPr>
+        <p:spPr>
+          <a:xfrm>
+            <a:off x="0" y="1438200"/>
+            <a:ext cx="9145080" cy="1080"/>
+          </a:xfrm>
+          <a:prstGeom prst="straightConnector1">
+            <a:avLst/>
+          </a:prstGeom>
+          <a:ln w="0">
+            <a:solidFill>
+              <a:srgbClr val="0e73b9"/>
+            </a:solidFill>
+          </a:ln>
+        </p:spPr>
+      </p:cxnSp>
+      <p:sp>
+        <p:nvSpPr>
+          <p:cNvPr id="26" name="PlaceHolder 1"/>
+          <p:cNvSpPr>
+            <a:spLocks noGrp="1"/>
+          </p:cNvSpPr>
+          <p:nvPr>
+            <p:ph type="sldNum" idx="3"/>
+          </p:nvPr>
+        </p:nvSpPr>
+        <p:spPr>
+          <a:xfrm>
+            <a:off x="7086600" y="6133680"/>
+            <a:ext cx="2056320" cy="363960"/>
+          </a:xfrm>
+          <a:prstGeom prst="rect">
+            <a:avLst/>
+          </a:prstGeom>
+          <a:noFill/>
+          <a:ln w="0">
+            <a:noFill/>
+          </a:ln>
+        </p:spPr>
+        <p:txBody>
+          <a:bodyPr lIns="91440" rIns="91440" tIns="45720" bIns="45720" anchor="ctr">
+            <a:noAutofit/>
+          </a:bodyPr>
+          <a:lstStyle>
+            <a:lvl1pPr indent="0" algn="r" defTabSz="914400">
+              <a:lnSpc>
+                <a:spcPct val="100000"/>
+              </a:lnSpc>
+              <a:buNone/>
+              <a:tabLst>
+                <a:tab algn="l" pos="0"/>
+              </a:tabLst>
+              <a:defRPr b="0" lang="en-IE" sz="1200" strike="noStrike" u="none">
+                <a:solidFill>
+                  <a:schemeClr val="dk1">
+                    <a:tint val="75000"/>
+                  </a:schemeClr>
+                </a:solidFill>
+                <a:uFillTx/>
+                <a:latin typeface="Calibri"/>
+              </a:defRPr>
+            </a:lvl1pPr>
+          </a:lstStyle>
+          <a:p>
+            <a:pPr indent="0" algn="r" defTabSz="914400">
+              <a:lnSpc>
+                <a:spcPct val="100000"/>
+              </a:lnSpc>
+              <a:buNone/>
+              <a:tabLst>
+                <a:tab algn="l" pos="0"/>
+              </a:tabLst>
+            </a:pPr>
+            <a:fld id="{4DFB3B39-0012-4394-BB39-5AC0FB42F88F}" type="slidenum">
+              <a:rPr b="0" lang="en-IE" sz="1200" strike="noStrike" u="none">
+                <a:solidFill>
+                  <a:schemeClr val="dk1">
+                    <a:tint val="75000"/>
+                  </a:schemeClr>
+                </a:solidFill>
+                <a:uFillTx/>
+                <a:latin typeface="Calibri"/>
+              </a:rPr>
+              <a:t>&lt;number&gt;</a:t>
+            </a:fld>
+            <a:endParaRPr b="0" lang="en-US" sz="1200" strike="noStrike" u="none">
+              <a:solidFill>
+                <a:srgbClr val="000000"/>
+              </a:solidFill>
+              <a:uFillTx/>
+              <a:latin typeface="Times New Roman"/>
+            </a:endParaRPr>
+          </a:p>
+        </p:txBody>
+      </p:sp>
+      <p:sp>
+        <p:nvSpPr>
+          <p:cNvPr id="27" name="PlaceHolder 2"/>
+          <p:cNvSpPr>
+            <a:spLocks noGrp="1"/>
+          </p:cNvSpPr>
+          <p:nvPr>
+            <p:ph type="title"/>
+          </p:nvPr>
+        </p:nvSpPr>
+        <p:spPr>
+          <a:xfrm>
+            <a:off x="457200" y="273600"/>
+            <a:ext cx="8229240" cy="1144800"/>
+          </a:xfrm>
+          <a:prstGeom prst="rect">
+            <a:avLst/>
+          </a:prstGeom>
+          <a:noFill/>
+          <a:ln w="0">
+            <a:noFill/>
+          </a:ln>
+        </p:spPr>
+        <p:txBody>
+          <a:bodyPr lIns="0" rIns="0" tIns="0" bIns="0" anchor="ctr">
+            <a:noAutofit/>
+          </a:bodyPr>
+          <a:p>
+            <a:pPr indent="0" algn="ctr">
+              <a:buNone/>
+            </a:pPr>
+            <a:r>
+              <a:rPr b="0" lang="en-US" sz="4400" strike="noStrike" u="none">
+                <a:solidFill>
+                  <a:srgbClr val="000000"/>
+                </a:solidFill>
+                <a:uFillTx/>
+                <a:latin typeface="Arial"/>
+              </a:rPr>
+              <a:t>Click to edit the title text format</a:t>
+            </a:r>
+            <a:endParaRPr b="0" lang="en-US" sz="4400" strike="noStrike" u="none">
+              <a:solidFill>
+                <a:srgbClr val="000000"/>
+              </a:solidFill>
+              <a:uFillTx/>
+              <a:latin typeface="Arial"/>
+            </a:endParaRPr>
+          </a:p>
+        </p:txBody>
+      </p:sp>
+      <p:sp>
+        <p:nvSpPr>
+          <p:cNvPr id="28" name="PlaceHolder 3"/>
+          <p:cNvSpPr>
+            <a:spLocks noGrp="1"/>
+          </p:cNvSpPr>
+          <p:nvPr>
+            <p:ph type="body"/>
+          </p:nvPr>
+        </p:nvSpPr>
+        <p:spPr>
+          <a:xfrm>
+            <a:off x="457200" y="1604520"/>
+            <a:ext cx="8229240" cy="3977280"/>
+          </a:xfrm>
+          <a:prstGeom prst="rect">
+            <a:avLst/>
+          </a:prstGeom>
+          <a:noFill/>
+          <a:ln w="0">
+            <a:noFill/>
+          </a:ln>
+        </p:spPr>
+        <p:txBody>
+          <a:bodyPr lIns="0" rIns="0" tIns="0" bIns="0" anchor="t">
+            <a:normAutofit/>
+          </a:bodyPr>
+          <a:p>
+            <a:pPr marL="432000" indent="-324000">
+              <a:spcBef>
+                <a:spcPts val="1417"/>
+              </a:spcBef>
+              <a:buClr>
+                <a:srgbClr val="000000"/>
+              </a:buClr>
+              <a:buSzPct val="45000"/>
+              <a:buFont typeface="Wingdings" charset="2"/>
+              <a:buChar char=""/>
+            </a:pPr>
+            <a:r>
+              <a:rPr b="0" lang="en-US" sz="3200" strike="noStrike" u="none">
+                <a:solidFill>
+                  <a:srgbClr val="000000"/>
+                </a:solidFill>
+                <a:uFillTx/>
+                <a:latin typeface="Arial"/>
+              </a:rPr>
+              <a:t>Click to edit the outline text format</a:t>
+            </a:r>
+            <a:endParaRPr b="0" lang="en-US" sz="3200" strike="noStrike" u="none">
+              <a:solidFill>
+                <a:srgbClr val="000000"/>
+              </a:solidFill>
+              <a:uFillTx/>
+              <a:latin typeface="Arial"/>
+            </a:endParaRPr>
+          </a:p>
+          <a:p>
+            <a:pPr lvl="1" marL="864000" indent="-324000">
+              <a:spcBef>
+                <a:spcPts val="1134"/>
+              </a:spcBef>
+              <a:buClr>
+                <a:srgbClr val="000000"/>
+              </a:buClr>
+              <a:buSzPct val="75000"/>
+              <a:buFont typeface="Symbol" charset="2"/>
+              <a:buChar char=""/>
+            </a:pPr>
+            <a:r>
+              <a:rPr b="0" lang="en-US" sz="2800" strike="noStrike" u="none">
+                <a:solidFill>
+                  <a:srgbClr val="000000"/>
+                </a:solidFill>
+                <a:uFillTx/>
+                <a:latin typeface="Arial"/>
+              </a:rPr>
+              <a:t>Second Outline Level</a:t>
+            </a:r>
+            <a:endParaRPr b="0" lang="en-US" sz="2800" strike="noStrike" u="none">
+              <a:solidFill>
+                <a:srgbClr val="000000"/>
+              </a:solidFill>
+              <a:uFillTx/>
+              <a:latin typeface="Arial"/>
+            </a:endParaRPr>
+          </a:p>
+          <a:p>
+            <a:pPr lvl="2" marL="1296000" indent="-288000">
+              <a:spcBef>
+                <a:spcPts val="850"/>
+              </a:spcBef>
+              <a:buClr>
+                <a:srgbClr val="000000"/>
+              </a:buClr>
+              <a:buSzPct val="45000"/>
+              <a:buFont typeface="Wingdings" charset="2"/>
+              <a:buChar char=""/>
+            </a:pPr>
+            <a:r>
+              <a:rPr b="0" lang="en-US" sz="2400" strike="noStrike" u="none">
+                <a:solidFill>
+                  <a:srgbClr val="000000"/>
+                </a:solidFill>
+                <a:uFillTx/>
+                <a:latin typeface="Arial"/>
+              </a:rPr>
+              <a:t>Third Outline Level</a:t>
+            </a:r>
+            <a:endParaRPr b="0" lang="en-US" sz="2400" strike="noStrike" u="none">
+              <a:solidFill>
+                <a:srgbClr val="000000"/>
+              </a:solidFill>
+              <a:uFillTx/>
+              <a:latin typeface="Arial"/>
+            </a:endParaRPr>
+          </a:p>
+          <a:p>
+            <a:pPr lvl="3" marL="1728000" indent="-216000">
+              <a:spcBef>
+                <a:spcPts val="567"/>
+              </a:spcBef>
+              <a:buClr>
+                <a:srgbClr val="000000"/>
+              </a:buClr>
+              <a:buSzPct val="75000"/>
+              <a:buFont typeface="Symbol" charset="2"/>
+              <a:buChar char=""/>
+            </a:pPr>
+            <a:r>
+              <a:rPr b="0" lang="en-US" sz="2000" strike="noStrike" u="none">
+                <a:solidFill>
+                  <a:srgbClr val="000000"/>
+                </a:solidFill>
+                <a:uFillTx/>
+                <a:latin typeface="Arial"/>
+              </a:rPr>
+              <a:t>Fourth Outline Level</a:t>
+            </a:r>
+            <a:endParaRPr b="0" lang="en-US" sz="2000" strike="noStrike" u="none">
+              <a:solidFill>
+                <a:srgbClr val="000000"/>
+              </a:solidFill>
+              <a:uFillTx/>
+              <a:latin typeface="Arial"/>
+            </a:endParaRPr>
+          </a:p>
+          <a:p>
+            <a:pPr lvl="4" marL="2160000" indent="-216000">
+              <a:spcBef>
+                <a:spcPts val="283"/>
+              </a:spcBef>
+              <a:buClr>
+                <a:srgbClr val="000000"/>
+              </a:buClr>
+              <a:buSzPct val="45000"/>
+              <a:buFont typeface="Wingdings" charset="2"/>
+              <a:buChar char=""/>
+            </a:pPr>
+            <a:r>
+              <a:rPr b="0" lang="en-US" sz="2000" strike="noStrike" u="none">
+                <a:solidFill>
+                  <a:srgbClr val="000000"/>
+                </a:solidFill>
+                <a:uFillTx/>
+                <a:latin typeface="Arial"/>
+              </a:rPr>
+              <a:t>Fifth Outline Level</a:t>
+            </a:r>
+            <a:endParaRPr b="0" lang="en-US" sz="2000" strike="noStrike" u="none">
+              <a:solidFill>
+                <a:srgbClr val="000000"/>
+              </a:solidFill>
+              <a:uFillTx/>
+              <a:latin typeface="Arial"/>
+            </a:endParaRPr>
+          </a:p>
+          <a:p>
+            <a:pPr lvl="5" marL="2592000" indent="-216000">
+              <a:spcBef>
+                <a:spcPts val="283"/>
+              </a:spcBef>
+              <a:buClr>
+                <a:srgbClr val="000000"/>
+              </a:buClr>
+              <a:buSzPct val="45000"/>
+              <a:buFont typeface="Wingdings" charset="2"/>
+              <a:buChar char=""/>
+            </a:pPr>
+            <a:r>
+              <a:rPr b="0" lang="en-US" sz="2000" strike="noStrike" u="none">
+                <a:solidFill>
+                  <a:srgbClr val="000000"/>
+                </a:solidFill>
+                <a:uFillTx/>
+                <a:latin typeface="Arial"/>
+              </a:rPr>
+              <a:t>Sixth Outline Level</a:t>
+            </a:r>
+            <a:endParaRPr b="0" lang="en-US" sz="2000" strike="noStrike" u="none">
+              <a:solidFill>
+                <a:srgbClr val="000000"/>
+              </a:solidFill>
+              <a:uFillTx/>
+              <a:latin typeface="Arial"/>
+            </a:endParaRPr>
+          </a:p>
+          <a:p>
+            <a:pPr lvl="6" marL="3024000" indent="-216000">
+              <a:spcBef>
+                <a:spcPts val="283"/>
+              </a:spcBef>
+              <a:buClr>
+                <a:srgbClr val="000000"/>
+              </a:buClr>
+              <a:buSzPct val="45000"/>
+              <a:buFont typeface="Wingdings" charset="2"/>
+              <a:buChar char=""/>
+            </a:pPr>
+            <a:r>
+              <a:rPr b="0" lang="en-US" sz="2000" strike="noStrike" u="none">
+                <a:solidFill>
+                  <a:srgbClr val="000000"/>
+                </a:solidFill>
+                <a:uFillTx/>
+                <a:latin typeface="Arial"/>
+              </a:rPr>
+              <a:t>Seventh Outline Level</a:t>
+            </a:r>
+            <a:endParaRPr b="0" lang="en-US" sz="2000" strike="noStrike" u="none">
+              <a:solidFill>
+                <a:srgbClr val="000000"/>
+              </a:solidFill>
+              <a:uFillTx/>
+              <a:latin typeface="Arial"/>
+            </a:endParaRPr>
+          </a:p>
+        </p:txBody>
+      </p:sp>
+    </p:spTree>
+  </p:cSld>
+  <p:clrMap bg1="lt1" tx1="dk1" bg2="lt2" tx2="dk2" accent1="accent1" accent2="accent2" accent3="accent3" accent4="accent4" accent5="accent5" accent6="accent6" hlink="hlink" folHlink="folHlink"/>
+  <p:sldLayoutIdLst>
+    <p:sldLayoutId id="2147483657" r:id="rId2"/>
   </p:sldLayoutIdLst>
 </p:sldMaster>
 </file>
@@ -2875,7 +3248,7 @@
       </p:grpSpPr>
       <p:sp>
         <p:nvSpPr>
-          <p:cNvPr id="32" name="PlaceHolder 1"/>
+          <p:cNvPr id="35" name="PlaceHolder 1"/>
           <p:cNvSpPr>
             <a:spLocks noGrp="1"/>
           </p:cNvSpPr>
@@ -2932,7 +3305,7 @@
       </p:sp>
       <p:sp>
         <p:nvSpPr>
-          <p:cNvPr id="33" name="PlaceHolder 2"/>
+          <p:cNvPr id="36" name="PlaceHolder 2"/>
           <p:cNvSpPr>
             <a:spLocks noGrp="1"/>
           </p:cNvSpPr>
@@ -2992,7 +3365,7 @@
       </p:sp>
       <p:sp>
         <p:nvSpPr>
-          <p:cNvPr id="34" name="PlaceHolder 3"/>
+          <p:cNvPr id="37" name="PlaceHolder 3"/>
           <p:cNvSpPr>
             <a:spLocks noGrp="1"/>
           </p:cNvSpPr>
@@ -3179,7 +3552,7 @@
       </p:grpSpPr>
       <p:sp>
         <p:nvSpPr>
-          <p:cNvPr id="68" name="PlaceHolder 1"/>
+          <p:cNvPr id="72" name="PlaceHolder 1"/>
           <p:cNvSpPr>
             <a:spLocks noGrp="1"/>
           </p:cNvSpPr>
@@ -3222,7 +3595,7 @@
                 <a:uFillTx/>
                 <a:latin typeface="Calibri"/>
               </a:rPr>
-              <a:t>Experiment</a:t>
+              <a:t>Implementation</a:t>
             </a:r>
             <a:endParaRPr b="0" lang="en-US" sz="2800" strike="noStrike" u="none">
               <a:solidFill>
@@ -3236,7 +3609,7 @@
       </p:sp>
       <p:sp>
         <p:nvSpPr>
-          <p:cNvPr id="69" name="PlaceHolder 2"/>
+          <p:cNvPr id="73" name="PlaceHolder 2"/>
           <p:cNvSpPr>
             <a:spLocks noGrp="1"/>
           </p:cNvSpPr>
@@ -3280,13 +3653,13 @@
       </p:sp>
       <p:sp>
         <p:nvSpPr>
-          <p:cNvPr id="70" name="Text Placeholder 2"/>
+          <p:cNvPr id="74" name="Text Placeholder 5"/>
           <p:cNvSpPr/>
           <p:nvPr/>
         </p:nvSpPr>
         <p:spPr>
           <a:xfrm>
-            <a:off x="729000" y="1675440"/>
+            <a:off x="729360" y="5715000"/>
             <a:ext cx="7499880" cy="4039200"/>
           </a:xfrm>
           <a:prstGeom prst="rect">
@@ -3321,8 +3694,61 @@
               <a:buFont typeface="Arial"/>
               <a:buChar char="•"/>
             </a:pPr>
-            <a:r>
-              <a:rPr b="0" lang="en-US" sz="2000" strike="noStrike" u="none">
+            <a:endParaRPr b="0" lang="en-US" sz="1800" strike="noStrike" u="none">
+              <a:solidFill>
+                <a:srgbClr val="000000"/>
+              </a:solidFill>
+              <a:uFillTx/>
+              <a:latin typeface="Arial"/>
+            </a:endParaRPr>
+          </a:p>
+        </p:txBody>
+      </p:sp>
+      <p:sp>
+        <p:nvSpPr>
+          <p:cNvPr id="75" name="Text Placeholder 4"/>
+          <p:cNvSpPr/>
+          <p:nvPr/>
+        </p:nvSpPr>
+        <p:spPr>
+          <a:xfrm>
+            <a:off x="729720" y="1675800"/>
+            <a:ext cx="7499880" cy="4039200"/>
+          </a:xfrm>
+          <a:prstGeom prst="rect">
+            <a:avLst/>
+          </a:prstGeom>
+          <a:noFill/>
+          <a:ln w="0">
+            <a:noFill/>
+          </a:ln>
+        </p:spPr>
+        <p:style>
+          <a:lnRef idx="0"/>
+          <a:fillRef idx="0"/>
+          <a:effectRef idx="0"/>
+          <a:fontRef idx="minor"/>
+        </p:style>
+        <p:txBody>
+          <a:bodyPr lIns="0" rIns="0" tIns="0" bIns="0" anchor="t">
+            <a:noAutofit/>
+          </a:bodyPr>
+          <a:p>
+            <a:pPr marL="343080" indent="-343080" defTabSz="914400">
+              <a:lnSpc>
+                <a:spcPct val="100000"/>
+              </a:lnSpc>
+              <a:spcBef>
+                <a:spcPts val="1417"/>
+              </a:spcBef>
+              <a:buClr>
+                <a:srgbClr val="000000"/>
+              </a:buClr>
+              <a:buFont typeface="Arial"/>
+              <a:buChar char="•"/>
+            </a:pPr>
+            <a:r>
+              <a:rPr b="0" lang="en-US" sz="2400" strike="noStrike" u="none">
                 <a:solidFill>
                   <a:schemeClr val="dk1"/>
                 </a:solidFill>
@@ -3330,18 +3756,51 @@
                 <a:latin typeface="Calibri"/>
                 <a:ea typeface="DejaVu Sans"/>
               </a:rPr>
-              <a:t>Participants aged 18-24 who applied to college through the CAO system</a:t>
-            </a:r>
-            <a:endParaRPr b="0" lang="en-US" sz="2000" strike="noStrike" u="none">
-              <a:solidFill>
-                <a:srgbClr val="000000"/>
-              </a:solidFill>
-              <a:uFillTx/>
-              <a:latin typeface="Arial"/>
-            </a:endParaRPr>
-          </a:p>
-          <a:p>
-            <a:pPr lvl="2" marL="648000" indent="-216000" defTabSz="914400">
+              <a:t>Giving 20 “computer science” courses isn’t exactly helpful…</a:t>
+            </a:r>
+            <a:endParaRPr b="0" lang="en-US" sz="2400" strike="noStrike" u="none">
+              <a:solidFill>
+                <a:srgbClr val="000000"/>
+              </a:solidFill>
+              <a:uFillTx/>
+              <a:latin typeface="Arial"/>
+            </a:endParaRPr>
+          </a:p>
+          <a:p>
+            <a:pPr marL="343080" indent="-343080" defTabSz="914400">
+              <a:lnSpc>
+                <a:spcPct val="100000"/>
+              </a:lnSpc>
+              <a:spcBef>
+                <a:spcPts val="1417"/>
+              </a:spcBef>
+              <a:buClr>
+                <a:srgbClr val="000000"/>
+              </a:buClr>
+              <a:buFont typeface="Arial"/>
+              <a:buChar char="•"/>
+            </a:pPr>
+            <a:r>
+              <a:rPr b="1" lang="en-US" sz="2400" strike="noStrike" u="none">
+                <a:solidFill>
+                  <a:schemeClr val="dk1"/>
+                </a:solidFill>
+                <a:uFillTx/>
+                <a:latin typeface="Calibri"/>
+                <a:ea typeface="DejaVu Sans"/>
+              </a:rPr>
+              <a:t>Courses with identical names are not recommended</a:t>
+            </a:r>
+            <a:endParaRPr b="0" lang="en-US" sz="2400" strike="noStrike" u="none">
+              <a:solidFill>
+                <a:srgbClr val="000000"/>
+              </a:solidFill>
+              <a:uFillTx/>
+              <a:latin typeface="Arial"/>
+            </a:endParaRPr>
+          </a:p>
+          <a:p>
+            <a:pPr lvl="3" marL="864000" indent="-216000" defTabSz="914400">
               <a:lnSpc>
                 <a:spcPct val="100000"/>
               </a:lnSpc>
@@ -3356,7 +3815,7 @@
               <a:buChar char=""/>
             </a:pPr>
             <a:r>
-              <a:rPr b="0" lang="en-US" sz="2000" strike="noStrike" u="none">
+              <a:rPr b="0" lang="en-US" sz="2400" strike="noStrike" u="none">
                 <a:solidFill>
                   <a:schemeClr val="dk1"/>
                 </a:solidFill>
@@ -3364,18 +3823,51 @@
                 <a:latin typeface="Calibri"/>
                 <a:ea typeface="DejaVu Sans"/>
               </a:rPr>
-              <a:t>Participants were sought opportunistically</a:t>
-            </a:r>
-            <a:endParaRPr b="0" lang="en-US" sz="2000" strike="noStrike" u="none">
-              <a:solidFill>
-                <a:srgbClr val="000000"/>
-              </a:solidFill>
-              <a:uFillTx/>
-              <a:latin typeface="Arial"/>
-            </a:endParaRPr>
-          </a:p>
-          <a:p>
-            <a:pPr lvl="2" marL="648000" indent="-216000" defTabSz="914400">
+              <a:t>e.g. you won’t get recommended 2 “Computer Science” courses</a:t>
+            </a:r>
+            <a:endParaRPr b="0" lang="en-US" sz="2400" strike="noStrike" u="none">
+              <a:solidFill>
+                <a:srgbClr val="000000"/>
+              </a:solidFill>
+              <a:uFillTx/>
+              <a:latin typeface="Arial"/>
+            </a:endParaRPr>
+          </a:p>
+          <a:p>
+            <a:pPr marL="343080" indent="-343080" defTabSz="914400">
+              <a:lnSpc>
+                <a:spcPct val="100000"/>
+              </a:lnSpc>
+              <a:spcBef>
+                <a:spcPts val="1417"/>
+              </a:spcBef>
+              <a:buClr>
+                <a:srgbClr val="000000"/>
+              </a:buClr>
+              <a:buFont typeface="Arial"/>
+              <a:buChar char="•"/>
+            </a:pPr>
+            <a:r>
+              <a:rPr b="0" lang="en-US" sz="2400" strike="noStrike" u="none">
+                <a:solidFill>
+                  <a:schemeClr val="dk1"/>
+                </a:solidFill>
+                <a:uFillTx/>
+                <a:latin typeface="Calibri"/>
+                <a:ea typeface="DejaVu Sans"/>
+              </a:rPr>
+              <a:t>Courses are recommended across the user’s top 5-scored categories</a:t>
+            </a:r>
+            <a:endParaRPr b="0" lang="en-US" sz="2400" strike="noStrike" u="none">
+              <a:solidFill>
+                <a:srgbClr val="000000"/>
+              </a:solidFill>
+              <a:uFillTx/>
+              <a:latin typeface="Arial"/>
+            </a:endParaRPr>
+          </a:p>
+          <a:p>
+            <a:pPr lvl="3" marL="864000" indent="-216000" defTabSz="914400">
               <a:lnSpc>
                 <a:spcPct val="100000"/>
               </a:lnSpc>
@@ -3390,7 +3882,7 @@
               <a:buChar char=""/>
             </a:pPr>
             <a:r>
-              <a:rPr b="0" lang="en-US" sz="2000" strike="noStrike" u="none">
+              <a:rPr b="0" lang="en-US" sz="2400" strike="noStrike" u="none">
                 <a:solidFill>
                   <a:schemeClr val="dk1"/>
                 </a:solidFill>
@@ -3398,9 +3890,9 @@
                 <a:latin typeface="Calibri"/>
                 <a:ea typeface="DejaVu Sans"/>
               </a:rPr>
-              <a:t>Ethics approved</a:t>
-            </a:r>
-            <a:endParaRPr b="0" lang="en-US" sz="2000" strike="noStrike" u="none">
+              <a:t>Keeps diversity across different areas of study</a:t>
+            </a:r>
+            <a:endParaRPr b="0" lang="en-US" sz="2400" strike="noStrike" u="none">
               <a:solidFill>
                 <a:srgbClr val="000000"/>
               </a:solidFill>
@@ -3423,7 +3915,7 @@
               <a:buChar char="•"/>
             </a:pPr>
             <a:r>
-              <a:rPr b="0" lang="en-US" sz="2000" strike="noStrike" u="none">
+              <a:rPr b="1" lang="en-US" sz="2400" strike="noStrike" u="none">
                 <a:solidFill>
                   <a:schemeClr val="dk1"/>
                 </a:solidFill>
@@ -3431,32 +3923,10 @@
                 <a:latin typeface="Calibri"/>
                 <a:ea typeface="DejaVu Sans"/>
               </a:rPr>
-              <a:t>N = 31</a:t>
-            </a:r>
-            <a:endParaRPr b="0" lang="en-US" sz="2000" strike="noStrike" u="none">
-              <a:solidFill>
-                <a:srgbClr val="000000"/>
-              </a:solidFill>
-              <a:uFillTx/>
-              <a:latin typeface="Arial"/>
-            </a:endParaRPr>
-          </a:p>
-          <a:p>
-            <a:pPr marL="343080" indent="-343080" defTabSz="914400">
-              <a:lnSpc>
-                <a:spcPct val="100000"/>
-              </a:lnSpc>
-              <a:spcBef>
-                <a:spcPts val="1417"/>
-              </a:spcBef>
-              <a:buClr>
-                <a:srgbClr val="000000"/>
-              </a:buClr>
-              <a:buFont typeface="Arial"/>
-              <a:buChar char="•"/>
-            </a:pPr>
-            <a:r>
-              <a:rPr b="0" lang="en-US" sz="2000" strike="noStrike" u="none">
+              <a:t>Diversity </a:t>
+            </a:r>
+            <a:r>
+              <a:rPr b="0" lang="en-US" sz="2400" strike="noStrike" u="none">
                 <a:solidFill>
                   <a:schemeClr val="dk1"/>
                 </a:solidFill>
@@ -3464,33 +3934,10 @@
                 <a:latin typeface="Calibri"/>
                 <a:ea typeface="DejaVu Sans"/>
               </a:rPr>
-              <a:t>Participants got 2 recommendation sets:</a:t>
-            </a:r>
-            <a:endParaRPr b="0" lang="en-US" sz="2000" strike="noStrike" u="none">
-              <a:solidFill>
-                <a:srgbClr val="000000"/>
-              </a:solidFill>
-              <a:uFillTx/>
-              <a:latin typeface="Arial"/>
-            </a:endParaRPr>
-          </a:p>
-          <a:p>
-            <a:pPr lvl="3" marL="864000" indent="-216000" defTabSz="914400">
-              <a:lnSpc>
-                <a:spcPct val="100000"/>
-              </a:lnSpc>
-              <a:spcBef>
-                <a:spcPts val="1417"/>
-              </a:spcBef>
-              <a:buClr>
-                <a:srgbClr val="000000"/>
-              </a:buClr>
-              <a:buSzPct val="45000"/>
-              <a:buFont typeface="Wingdings" charset="2"/>
-              <a:buChar char=""/>
-            </a:pPr>
-            <a:r>
-              <a:rPr b="0" lang="en-US" sz="2000" strike="noStrike" u="none">
+              <a:t>leads to more </a:t>
+            </a:r>
+            <a:r>
+              <a:rPr b="1" lang="en-US" sz="2400" strike="noStrike" u="none">
                 <a:solidFill>
                   <a:schemeClr val="dk1"/>
                 </a:solidFill>
@@ -3498,121 +3945,9 @@
                 <a:latin typeface="Calibri"/>
                 <a:ea typeface="DejaVu Sans"/>
               </a:rPr>
-              <a:t>Actual</a:t>
-            </a:r>
-            <a:endParaRPr b="0" lang="en-US" sz="2000" strike="noStrike" u="none">
-              <a:solidFill>
-                <a:srgbClr val="000000"/>
-              </a:solidFill>
-              <a:uFillTx/>
-              <a:latin typeface="Arial"/>
-            </a:endParaRPr>
-          </a:p>
-          <a:p>
-            <a:pPr lvl="3" marL="864000" indent="-216000" defTabSz="914400">
-              <a:lnSpc>
-                <a:spcPct val="100000"/>
-              </a:lnSpc>
-              <a:spcBef>
-                <a:spcPts val="1417"/>
-              </a:spcBef>
-              <a:buClr>
-                <a:srgbClr val="000000"/>
-              </a:buClr>
-              <a:buSzPct val="45000"/>
-              <a:buFont typeface="Wingdings" charset="2"/>
-              <a:buChar char=""/>
-            </a:pPr>
-            <a:r>
-              <a:rPr b="0" lang="en-US" sz="2000" strike="noStrike" u="none">
-                <a:solidFill>
-                  <a:schemeClr val="dk1"/>
-                </a:solidFill>
-                <a:uFillTx/>
-                <a:latin typeface="Calibri"/>
-                <a:ea typeface="DejaVu Sans"/>
-              </a:rPr>
-              <a:t>Baseline</a:t>
-            </a:r>
-            <a:endParaRPr b="0" lang="en-US" sz="2000" strike="noStrike" u="none">
-              <a:solidFill>
-                <a:srgbClr val="000000"/>
-              </a:solidFill>
-              <a:uFillTx/>
-              <a:latin typeface="Arial"/>
-            </a:endParaRPr>
-          </a:p>
-          <a:p>
-            <a:pPr lvl="5" marL="1296000" indent="-216000" defTabSz="914400">
-              <a:lnSpc>
-                <a:spcPct val="100000"/>
-              </a:lnSpc>
-              <a:spcBef>
-                <a:spcPts val="1417"/>
-              </a:spcBef>
-              <a:buClr>
-                <a:srgbClr val="000000"/>
-              </a:buClr>
-              <a:buSzPct val="45000"/>
-              <a:buFont typeface="Wingdings" charset="2"/>
-              <a:buChar char=""/>
-            </a:pPr>
-            <a:r>
-              <a:rPr b="0" lang="en-US" sz="2000" strike="noStrike" u="none">
-                <a:solidFill>
-                  <a:schemeClr val="dk1"/>
-                </a:solidFill>
-                <a:uFillTx/>
-                <a:latin typeface="Calibri"/>
-                <a:ea typeface="DejaVu Sans"/>
-              </a:rPr>
-              <a:t>Top courses sorted by </a:t>
-            </a:r>
-            <a:r>
-              <a:rPr b="1" lang="en-US" sz="2000" strike="noStrike" u="none">
-                <a:solidFill>
-                  <a:schemeClr val="dk1"/>
-                </a:solidFill>
-                <a:uFillTx/>
-                <a:latin typeface="Calibri"/>
-                <a:ea typeface="DejaVu Sans"/>
-              </a:rPr>
-              <a:t>LC points</a:t>
-            </a:r>
-            <a:endParaRPr b="0" lang="en-US" sz="2000" strike="noStrike" u="none">
-              <a:solidFill>
-                <a:srgbClr val="000000"/>
-              </a:solidFill>
-              <a:uFillTx/>
-              <a:latin typeface="Arial"/>
-            </a:endParaRPr>
-          </a:p>
-          <a:p>
-            <a:pPr marL="343080" indent="-343080" defTabSz="914400">
-              <a:lnSpc>
-                <a:spcPct val="100000"/>
-              </a:lnSpc>
-              <a:spcBef>
-                <a:spcPts val="1417"/>
-              </a:spcBef>
-              <a:buClr>
-                <a:srgbClr val="000000"/>
-              </a:buClr>
-              <a:buFont typeface="Arial"/>
-              <a:buChar char="•"/>
-            </a:pPr>
-            <a:r>
-              <a:rPr b="0" lang="en-US" sz="2000" strike="noStrike" u="none">
-                <a:solidFill>
-                  <a:schemeClr val="dk1"/>
-                </a:solidFill>
-                <a:uFillTx/>
-                <a:latin typeface="Calibri"/>
-                <a:ea typeface="DejaVu Sans"/>
-              </a:rPr>
-              <a:t>Participants provided their original college application list</a:t>
-            </a:r>
-            <a:endParaRPr b="0" lang="en-US" sz="2000" strike="noStrike" u="none">
+              <a:t>exploration – revisit RQ!</a:t>
+            </a:r>
+            <a:endParaRPr b="0" lang="en-US" sz="2400" strike="noStrike" u="none">
               <a:solidFill>
                 <a:srgbClr val="000000"/>
               </a:solidFill>
@@ -3629,14 +3964,14 @@
             <a:spLocks noGrp="1"/>
           </p:cNvSpPr>
           <p:nvPr>
-            <p:ph type="sldNum" idx="2"/>
+            <p:ph type="sldNum" idx="3"/>
           </p:nvPr>
         </p:nvSpPr>
         <p:spPr/>
         <p:txBody>
           <a:bodyPr/>
           <a:p>
-            <a:fld id="{AC3DA907-FC0D-40CF-9555-C87B3B893E78}" type="slidenum">
+            <a:fld id="{72DC9DBA-3683-4A36-9743-9B1C72E20914}" type="slidenum">
               <a:t>10</a:t>
             </a:fld>
           </a:p>
@@ -3674,7 +4009,7 @@
       </p:grpSpPr>
       <p:sp>
         <p:nvSpPr>
-          <p:cNvPr id="71" name="PlaceHolder 1"/>
+          <p:cNvPr id="76" name="PlaceHolder 1"/>
           <p:cNvSpPr>
             <a:spLocks noGrp="1"/>
           </p:cNvSpPr>
@@ -3717,7 +4052,7 @@
                 <a:uFillTx/>
                 <a:latin typeface="Calibri"/>
               </a:rPr>
-              <a:t>Demo of Project</a:t>
+              <a:t>Experiment</a:t>
             </a:r>
             <a:endParaRPr b="0" lang="en-US" sz="2800" strike="noStrike" u="none">
               <a:solidFill>
@@ -3731,51 +4066,7 @@
       </p:sp>
       <p:sp>
         <p:nvSpPr>
-          <p:cNvPr id="72" name="PlaceHolder 2"/>
-          <p:cNvSpPr>
-            <a:spLocks noGrp="1"/>
-          </p:cNvSpPr>
-          <p:nvPr>
-            <p:ph/>
-          </p:nvPr>
-        </p:nvSpPr>
-        <p:spPr>
-          <a:xfrm>
-            <a:off x="828720" y="1881000"/>
-            <a:ext cx="7499880" cy="4039200"/>
-          </a:xfrm>
-          <a:prstGeom prst="rect">
-            <a:avLst/>
-          </a:prstGeom>
-          <a:noFill/>
-          <a:ln w="0">
-            <a:noFill/>
-          </a:ln>
-        </p:spPr>
-        <p:txBody>
-          <a:bodyPr lIns="0" rIns="0" tIns="0" bIns="0" anchor="t">
-            <a:noAutofit/>
-          </a:bodyPr>
-          <a:p>
-            <a:pPr indent="0">
-              <a:spcBef>
-                <a:spcPts val="1417"/>
-              </a:spcBef>
-              <a:buNone/>
-            </a:pPr>
-            <a:endParaRPr b="0" lang="en-US" sz="1800" strike="noStrike" u="none">
-              <a:solidFill>
-                <a:srgbClr val="000000"/>
-              </a:solidFill>
-              <a:uFillTx/>
-              <a:latin typeface="Arial"/>
-            </a:endParaRPr>
-          </a:p>
-        </p:txBody>
-      </p:sp>
-      <p:sp>
-        <p:nvSpPr>
-          <p:cNvPr id="73" name="PlaceHolder 3"/>
+          <p:cNvPr id="77" name="PlaceHolder 2"/>
           <p:cNvSpPr>
             <a:spLocks noGrp="1"/>
           </p:cNvSpPr>
@@ -3819,19 +4110,363 @@
       </p:sp>
       <p:sp>
         <p:nvSpPr>
-          <p:cNvPr id="5" name="PlaceHolder 4"/>
+          <p:cNvPr id="78" name="Text Placeholder 2"/>
+          <p:cNvSpPr/>
+          <p:nvPr/>
+        </p:nvSpPr>
+        <p:spPr>
+          <a:xfrm>
+            <a:off x="729000" y="1675440"/>
+            <a:ext cx="7499880" cy="4039200"/>
+          </a:xfrm>
+          <a:prstGeom prst="rect">
+            <a:avLst/>
+          </a:prstGeom>
+          <a:noFill/>
+          <a:ln w="0">
+            <a:noFill/>
+          </a:ln>
+        </p:spPr>
+        <p:style>
+          <a:lnRef idx="0"/>
+          <a:fillRef idx="0"/>
+          <a:effectRef idx="0"/>
+          <a:fontRef idx="minor"/>
+        </p:style>
+        <p:txBody>
+          <a:bodyPr lIns="0" rIns="0" tIns="0" bIns="0" anchor="t">
+            <a:noAutofit/>
+          </a:bodyPr>
+          <a:p>
+            <a:pPr marL="343080" indent="-343080" defTabSz="914400">
+              <a:lnSpc>
+                <a:spcPct val="100000"/>
+              </a:lnSpc>
+              <a:spcBef>
+                <a:spcPts val="1417"/>
+              </a:spcBef>
+              <a:buClr>
+                <a:srgbClr val="000000"/>
+              </a:buClr>
+              <a:buFont typeface="Arial"/>
+              <a:buChar char="•"/>
+            </a:pPr>
+            <a:r>
+              <a:rPr b="0" lang="en-US" sz="2000" strike="noStrike" u="none">
+                <a:solidFill>
+                  <a:schemeClr val="dk1"/>
+                </a:solidFill>
+                <a:uFillTx/>
+                <a:latin typeface="Calibri"/>
+                <a:ea typeface="DejaVu Sans"/>
+              </a:rPr>
+              <a:t>Participants aged 18-24 who applied to college through the CAO system</a:t>
+            </a:r>
+            <a:endParaRPr b="0" lang="en-US" sz="2000" strike="noStrike" u="none">
+              <a:solidFill>
+                <a:srgbClr val="000000"/>
+              </a:solidFill>
+              <a:uFillTx/>
+              <a:latin typeface="Arial"/>
+            </a:endParaRPr>
+          </a:p>
+          <a:p>
+            <a:pPr lvl="2" marL="648000" indent="-216000" defTabSz="914400">
+              <a:lnSpc>
+                <a:spcPct val="100000"/>
+              </a:lnSpc>
+              <a:spcBef>
+                <a:spcPts val="1417"/>
+              </a:spcBef>
+              <a:buClr>
+                <a:srgbClr val="000000"/>
+              </a:buClr>
+              <a:buSzPct val="45000"/>
+              <a:buFont typeface="Wingdings" charset="2"/>
+              <a:buChar char=""/>
+            </a:pPr>
+            <a:r>
+              <a:rPr b="0" lang="en-US" sz="2000" strike="noStrike" u="none">
+                <a:solidFill>
+                  <a:schemeClr val="dk1"/>
+                </a:solidFill>
+                <a:uFillTx/>
+                <a:latin typeface="Calibri"/>
+                <a:ea typeface="DejaVu Sans"/>
+              </a:rPr>
+              <a:t>Participants were sought opportunistically</a:t>
+            </a:r>
+            <a:endParaRPr b="0" lang="en-US" sz="2000" strike="noStrike" u="none">
+              <a:solidFill>
+                <a:srgbClr val="000000"/>
+              </a:solidFill>
+              <a:uFillTx/>
+              <a:latin typeface="Arial"/>
+            </a:endParaRPr>
+          </a:p>
+          <a:p>
+            <a:pPr lvl="2" marL="648000" indent="-216000" defTabSz="914400">
+              <a:lnSpc>
+                <a:spcPct val="100000"/>
+              </a:lnSpc>
+              <a:spcBef>
+                <a:spcPts val="1417"/>
+              </a:spcBef>
+              <a:buClr>
+                <a:srgbClr val="000000"/>
+              </a:buClr>
+              <a:buSzPct val="45000"/>
+              <a:buFont typeface="Wingdings" charset="2"/>
+              <a:buChar char=""/>
+            </a:pPr>
+            <a:r>
+              <a:rPr b="0" lang="en-US" sz="2000" strike="noStrike" u="none">
+                <a:solidFill>
+                  <a:schemeClr val="dk1"/>
+                </a:solidFill>
+                <a:uFillTx/>
+                <a:latin typeface="Calibri"/>
+                <a:ea typeface="DejaVu Sans"/>
+              </a:rPr>
+              <a:t>Ethics approved</a:t>
+            </a:r>
+            <a:endParaRPr b="0" lang="en-US" sz="2000" strike="noStrike" u="none">
+              <a:solidFill>
+                <a:srgbClr val="000000"/>
+              </a:solidFill>
+              <a:uFillTx/>
+              <a:latin typeface="Arial"/>
+            </a:endParaRPr>
+          </a:p>
+          <a:p>
+            <a:pPr marL="343080" indent="-343080" defTabSz="914400">
+              <a:lnSpc>
+                <a:spcPct val="100000"/>
+              </a:lnSpc>
+              <a:spcBef>
+                <a:spcPts val="1417"/>
+              </a:spcBef>
+              <a:buClr>
+                <a:srgbClr val="000000"/>
+              </a:buClr>
+              <a:buFont typeface="Arial"/>
+              <a:buChar char="•"/>
+            </a:pPr>
+            <a:r>
+              <a:rPr b="0" lang="en-US" sz="2000" strike="noStrike" u="none">
+                <a:solidFill>
+                  <a:schemeClr val="dk1"/>
+                </a:solidFill>
+                <a:uFillTx/>
+                <a:latin typeface="Calibri"/>
+                <a:ea typeface="DejaVu Sans"/>
+              </a:rPr>
+              <a:t>N = 31</a:t>
+            </a:r>
+            <a:endParaRPr b="0" lang="en-US" sz="2000" strike="noStrike" u="none">
+              <a:solidFill>
+                <a:srgbClr val="000000"/>
+              </a:solidFill>
+              <a:uFillTx/>
+              <a:latin typeface="Arial"/>
+            </a:endParaRPr>
+          </a:p>
+          <a:p>
+            <a:pPr marL="343080" indent="-343080" defTabSz="914400">
+              <a:lnSpc>
+                <a:spcPct val="100000"/>
+              </a:lnSpc>
+              <a:spcBef>
+                <a:spcPts val="1417"/>
+              </a:spcBef>
+              <a:buClr>
+                <a:srgbClr val="000000"/>
+              </a:buClr>
+              <a:buFont typeface="Arial"/>
+              <a:buChar char="•"/>
+            </a:pPr>
+            <a:r>
+              <a:rPr b="0" lang="en-US" sz="2000" strike="noStrike" u="none">
+                <a:solidFill>
+                  <a:schemeClr val="dk1"/>
+                </a:solidFill>
+                <a:uFillTx/>
+                <a:latin typeface="Calibri"/>
+                <a:ea typeface="DejaVu Sans"/>
+              </a:rPr>
+              <a:t>Participants got 2 recommendation sets:</a:t>
+            </a:r>
+            <a:endParaRPr b="0" lang="en-US" sz="2000" strike="noStrike" u="none">
+              <a:solidFill>
+                <a:srgbClr val="000000"/>
+              </a:solidFill>
+              <a:uFillTx/>
+              <a:latin typeface="Arial"/>
+            </a:endParaRPr>
+          </a:p>
+          <a:p>
+            <a:pPr lvl="3" marL="864000" indent="-216000" defTabSz="914400">
+              <a:lnSpc>
+                <a:spcPct val="100000"/>
+              </a:lnSpc>
+              <a:spcBef>
+                <a:spcPts val="1417"/>
+              </a:spcBef>
+              <a:buClr>
+                <a:srgbClr val="000000"/>
+              </a:buClr>
+              <a:buSzPct val="45000"/>
+              <a:buFont typeface="Wingdings" charset="2"/>
+              <a:buChar char=""/>
+            </a:pPr>
+            <a:r>
+              <a:rPr b="0" lang="en-US" sz="2000" strike="noStrike" u="none">
+                <a:solidFill>
+                  <a:schemeClr val="dk1"/>
+                </a:solidFill>
+                <a:uFillTx/>
+                <a:latin typeface="Calibri"/>
+                <a:ea typeface="DejaVu Sans"/>
+              </a:rPr>
+              <a:t>Actual</a:t>
+            </a:r>
+            <a:endParaRPr b="0" lang="en-US" sz="2000" strike="noStrike" u="none">
+              <a:solidFill>
+                <a:srgbClr val="000000"/>
+              </a:solidFill>
+              <a:uFillTx/>
+              <a:latin typeface="Arial"/>
+            </a:endParaRPr>
+          </a:p>
+          <a:p>
+            <a:pPr lvl="3" marL="864000" indent="-216000" defTabSz="914400">
+              <a:lnSpc>
+                <a:spcPct val="100000"/>
+              </a:lnSpc>
+              <a:spcBef>
+                <a:spcPts val="1417"/>
+              </a:spcBef>
+              <a:buClr>
+                <a:srgbClr val="000000"/>
+              </a:buClr>
+              <a:buSzPct val="45000"/>
+              <a:buFont typeface="Wingdings" charset="2"/>
+              <a:buChar char=""/>
+            </a:pPr>
+            <a:r>
+              <a:rPr b="0" lang="en-US" sz="2000" strike="noStrike" u="none">
+                <a:solidFill>
+                  <a:schemeClr val="dk1"/>
+                </a:solidFill>
+                <a:uFillTx/>
+                <a:latin typeface="Calibri"/>
+                <a:ea typeface="DejaVu Sans"/>
+              </a:rPr>
+              <a:t>Baseline</a:t>
+            </a:r>
+            <a:endParaRPr b="0" lang="en-US" sz="2000" strike="noStrike" u="none">
+              <a:solidFill>
+                <a:srgbClr val="000000"/>
+              </a:solidFill>
+              <a:uFillTx/>
+              <a:latin typeface="Arial"/>
+            </a:endParaRPr>
+          </a:p>
+          <a:p>
+            <a:pPr lvl="5" marL="1296000" indent="-216000" defTabSz="914400">
+              <a:lnSpc>
+                <a:spcPct val="100000"/>
+              </a:lnSpc>
+              <a:spcBef>
+                <a:spcPts val="1417"/>
+              </a:spcBef>
+              <a:buClr>
+                <a:srgbClr val="000000"/>
+              </a:buClr>
+              <a:buSzPct val="45000"/>
+              <a:buFont typeface="Wingdings" charset="2"/>
+              <a:buChar char=""/>
+            </a:pPr>
+            <a:r>
+              <a:rPr b="0" lang="en-US" sz="2000" strike="noStrike" u="none">
+                <a:solidFill>
+                  <a:schemeClr val="dk1"/>
+                </a:solidFill>
+                <a:uFillTx/>
+                <a:latin typeface="Calibri"/>
+                <a:ea typeface="DejaVu Sans"/>
+              </a:rPr>
+              <a:t>Top courses sorted by </a:t>
+            </a:r>
+            <a:r>
+              <a:rPr b="1" lang="en-US" sz="2000" strike="noStrike" u="none">
+                <a:solidFill>
+                  <a:schemeClr val="dk1"/>
+                </a:solidFill>
+                <a:uFillTx/>
+                <a:latin typeface="Calibri"/>
+                <a:ea typeface="DejaVu Sans"/>
+              </a:rPr>
+              <a:t>LC points</a:t>
+            </a:r>
+            <a:endParaRPr b="0" lang="en-US" sz="2000" strike="noStrike" u="none">
+              <a:solidFill>
+                <a:srgbClr val="000000"/>
+              </a:solidFill>
+              <a:uFillTx/>
+              <a:latin typeface="Arial"/>
+            </a:endParaRPr>
+          </a:p>
+          <a:p>
+            <a:pPr marL="343080" indent="-343080" defTabSz="914400">
+              <a:lnSpc>
+                <a:spcPct val="100000"/>
+              </a:lnSpc>
+              <a:spcBef>
+                <a:spcPts val="1417"/>
+              </a:spcBef>
+              <a:buClr>
+                <a:srgbClr val="000000"/>
+              </a:buClr>
+              <a:buFont typeface="Arial"/>
+              <a:buChar char="•"/>
+            </a:pPr>
+            <a:r>
+              <a:rPr b="0" lang="en-US" sz="2000" strike="noStrike" u="none">
+                <a:solidFill>
+                  <a:schemeClr val="dk1"/>
+                </a:solidFill>
+                <a:uFillTx/>
+                <a:latin typeface="Calibri"/>
+                <a:ea typeface="DejaVu Sans"/>
+              </a:rPr>
+              <a:t>Participants provided their original college application list</a:t>
+            </a:r>
+            <a:endParaRPr b="0" lang="en-US" sz="2000" strike="noStrike" u="none">
+              <a:solidFill>
+                <a:srgbClr val="000000"/>
+              </a:solidFill>
+              <a:uFillTx/>
+              <a:latin typeface="Arial"/>
+            </a:endParaRPr>
+          </a:p>
+        </p:txBody>
+      </p:sp>
+      <p:sp>
+        <p:nvSpPr>
+          <p:cNvPr id="4" name="PlaceHolder 3"/>
           <p:cNvSpPr>
             <a:spLocks noGrp="1"/>
           </p:cNvSpPr>
           <p:nvPr>
-            <p:ph type="sldNum" idx="1"/>
+            <p:ph type="sldNum" idx="2"/>
           </p:nvPr>
         </p:nvSpPr>
         <p:spPr/>
         <p:txBody>
           <a:bodyPr/>
           <a:p>
-            <a:fld id="{E32A301B-799C-48CF-AE8B-848EB9520093}" type="slidenum">
+            <a:fld id="{29E6C935-A410-4BBB-862F-2ADD66D3C7C0}" type="slidenum">
               <a:t>11</a:t>
             </a:fld>
           </a:p>
@@ -3851,308 +4486,6 @@
 </file>
 
 <file path=ppt/slides/slide12.xml><?xml version="1.0" encoding="utf-8"?>
-<p:sld xmlns:a="http://schemas.openxmlformats.org/drawingml/2006/main" xmlns:p="http://schemas.openxmlformats.org/presentationml/2006/main" xmlns:r="http://schemas.openxmlformats.org/officeDocument/2006/relationships" xmlns:p14="http://schemas.microsoft.com/office/powerpoint/2010/main" xmlns:p15="http://schemas.microsoft.com/office/powerpoint/2012/main" xmlns:mc="http://schemas.openxmlformats.org/markup-compatibility/2006">
-  <p:cSld>
-    <p:spTree>
-      <p:nvGrpSpPr>
-        <p:cNvPr id="1" name=""/>
-        <p:cNvGrpSpPr/>
-        <p:nvPr/>
-      </p:nvGrpSpPr>
-      <p:grpSpPr>
-        <a:xfrm>
-          <a:off x="0" y="0"/>
-          <a:ext cx="0" cy="0"/>
-          <a:chOff x="0" y="0"/>
-          <a:chExt cx="0" cy="0"/>
-        </a:xfrm>
-      </p:grpSpPr>
-      <p:sp>
-        <p:nvSpPr>
-          <p:cNvPr id="74" name="PlaceHolder 1"/>
-          <p:cNvSpPr>
-            <a:spLocks noGrp="1"/>
-          </p:cNvSpPr>
-          <p:nvPr>
-            <p:ph type="title"/>
-          </p:nvPr>
-        </p:nvSpPr>
-        <p:spPr>
-          <a:xfrm>
-            <a:off x="828720" y="360000"/>
-            <a:ext cx="7499880" cy="560520"/>
-          </a:xfrm>
-          <a:prstGeom prst="rect">
-            <a:avLst/>
-          </a:prstGeom>
-          <a:noFill/>
-          <a:ln w="0">
-            <a:noFill/>
-          </a:ln>
-        </p:spPr>
-        <p:txBody>
-          <a:bodyPr lIns="0" rIns="0" tIns="0" bIns="0" anchor="b">
-            <a:noAutofit/>
-          </a:bodyPr>
-          <a:p>
-            <a:pPr indent="0" defTabSz="914400">
-              <a:lnSpc>
-                <a:spcPct val="100000"/>
-              </a:lnSpc>
-              <a:buNone/>
-              <a:tabLst>
-                <a:tab algn="l" pos="0"/>
-              </a:tabLst>
-            </a:pPr>
-            <a:r>
-              <a:rPr b="1" lang="en-GB" sz="2800" strike="noStrike" u="none">
-                <a:solidFill>
-                  <a:schemeClr val="dk1"/>
-                </a:solidFill>
-                <a:uFillTx/>
-                <a:latin typeface="Calibri"/>
-              </a:rPr>
-              <a:t>Evaluation</a:t>
-            </a:r>
-            <a:endParaRPr b="0" lang="en-US" sz="2800" strike="noStrike" u="none">
-              <a:solidFill>
-                <a:srgbClr val="000000"/>
-              </a:solidFill>
-              <a:uFillTx/>
-              <a:latin typeface="Arial"/>
-            </a:endParaRPr>
-          </a:p>
-        </p:txBody>
-      </p:sp>
-      <p:sp>
-        <p:nvSpPr>
-          <p:cNvPr id="75" name="PlaceHolder 2"/>
-          <p:cNvSpPr>
-            <a:spLocks noGrp="1"/>
-          </p:cNvSpPr>
-          <p:nvPr>
-            <p:ph/>
-          </p:nvPr>
-        </p:nvSpPr>
-        <p:spPr>
-          <a:xfrm>
-            <a:off x="828720" y="4875840"/>
-            <a:ext cx="7499880" cy="4039200"/>
-          </a:xfrm>
-          <a:prstGeom prst="rect">
-            <a:avLst/>
-          </a:prstGeom>
-          <a:noFill/>
-          <a:ln w="0">
-            <a:noFill/>
-          </a:ln>
-        </p:spPr>
-        <p:txBody>
-          <a:bodyPr lIns="0" rIns="0" tIns="0" bIns="0" anchor="t">
-            <a:noAutofit/>
-          </a:bodyPr>
-          <a:p>
-            <a:pPr marL="343080" indent="0" defTabSz="914400">
-              <a:lnSpc>
-                <a:spcPct val="100000"/>
-              </a:lnSpc>
-              <a:spcBef>
-                <a:spcPts val="1417"/>
-              </a:spcBef>
-              <a:buNone/>
-              <a:tabLst>
-                <a:tab algn="l" pos="0"/>
-              </a:tabLst>
-            </a:pPr>
-            <a:r>
-              <a:rPr b="0" lang="en-GB" sz="2400" strike="noStrike" u="none">
-                <a:solidFill>
-                  <a:schemeClr val="dk1"/>
-                </a:solidFill>
-                <a:uFillTx/>
-                <a:latin typeface="Calibri"/>
-              </a:rPr>
-              <a:t> </a:t>
-            </a:r>
-            <a:endParaRPr b="0" lang="en-US" sz="2400" strike="noStrike" u="none">
-              <a:solidFill>
-                <a:srgbClr val="000000"/>
-              </a:solidFill>
-              <a:uFillTx/>
-              <a:latin typeface="Arial"/>
-            </a:endParaRPr>
-          </a:p>
-          <a:p>
-            <a:pPr marL="343080" indent="0" defTabSz="914400">
-              <a:lnSpc>
-                <a:spcPct val="100000"/>
-              </a:lnSpc>
-              <a:spcBef>
-                <a:spcPts val="1417"/>
-              </a:spcBef>
-              <a:buNone/>
-              <a:tabLst>
-                <a:tab algn="l" pos="0"/>
-              </a:tabLst>
-            </a:pPr>
-            <a:endParaRPr b="0" lang="en-US" sz="2000" strike="noStrike" u="none">
-              <a:solidFill>
-                <a:srgbClr val="000000"/>
-              </a:solidFill>
-              <a:uFillTx/>
-              <a:latin typeface="Arial"/>
-            </a:endParaRPr>
-          </a:p>
-          <a:p>
-            <a:pPr marL="343080" indent="0" defTabSz="914400">
-              <a:lnSpc>
-                <a:spcPct val="100000"/>
-              </a:lnSpc>
-              <a:spcBef>
-                <a:spcPts val="1417"/>
-              </a:spcBef>
-              <a:buNone/>
-              <a:tabLst>
-                <a:tab algn="l" pos="0"/>
-              </a:tabLst>
-            </a:pPr>
-            <a:endParaRPr b="0" lang="en-US" sz="2000" strike="noStrike" u="none">
-              <a:solidFill>
-                <a:srgbClr val="000000"/>
-              </a:solidFill>
-              <a:uFillTx/>
-              <a:latin typeface="Arial"/>
-            </a:endParaRPr>
-          </a:p>
-          <a:p>
-            <a:pPr marL="343080" indent="0" defTabSz="914400">
-              <a:lnSpc>
-                <a:spcPct val="100000"/>
-              </a:lnSpc>
-              <a:spcBef>
-                <a:spcPts val="1134"/>
-              </a:spcBef>
-              <a:buNone/>
-              <a:tabLst>
-                <a:tab algn="l" pos="0"/>
-              </a:tabLst>
-            </a:pPr>
-            <a:endParaRPr b="0" lang="en-US" sz="2000" strike="noStrike" u="none">
-              <a:solidFill>
-                <a:srgbClr val="000000"/>
-              </a:solidFill>
-              <a:uFillTx/>
-              <a:latin typeface="Arial"/>
-            </a:endParaRPr>
-          </a:p>
-        </p:txBody>
-      </p:sp>
-      <p:pic>
-        <p:nvPicPr>
-          <p:cNvPr id="76" name="" descr=""/>
-          <p:cNvPicPr/>
-          <p:nvPr/>
-        </p:nvPicPr>
-        <p:blipFill>
-          <a:blip r:embed="rId1"/>
-          <a:stretch/>
-        </p:blipFill>
-        <p:spPr>
-          <a:xfrm>
-            <a:off x="228600" y="1828800"/>
-            <a:ext cx="3885840" cy="3885840"/>
-          </a:xfrm>
-          <a:prstGeom prst="rect">
-            <a:avLst/>
-          </a:prstGeom>
-          <a:noFill/>
-          <a:ln w="0">
-            <a:noFill/>
-          </a:ln>
-        </p:spPr>
-      </p:pic>
-      <p:pic>
-        <p:nvPicPr>
-          <p:cNvPr id="77" name="" descr=""/>
-          <p:cNvPicPr/>
-          <p:nvPr/>
-        </p:nvPicPr>
-        <p:blipFill>
-          <a:blip r:embed="rId2"/>
-          <a:stretch/>
-        </p:blipFill>
-        <p:spPr>
-          <a:xfrm>
-            <a:off x="4359600" y="1936800"/>
-            <a:ext cx="4737600" cy="1606320"/>
-          </a:xfrm>
-          <a:prstGeom prst="rect">
-            <a:avLst/>
-          </a:prstGeom>
-          <a:noFill/>
-          <a:ln w="0">
-            <a:noFill/>
-          </a:ln>
-        </p:spPr>
-      </p:pic>
-      <p:pic>
-        <p:nvPicPr>
-          <p:cNvPr id="78" name="" descr=""/>
-          <p:cNvPicPr/>
-          <p:nvPr/>
-        </p:nvPicPr>
-        <p:blipFill>
-          <a:blip r:embed="rId3"/>
-          <a:stretch/>
-        </p:blipFill>
-        <p:spPr>
-          <a:xfrm>
-            <a:off x="4343400" y="3707280"/>
-            <a:ext cx="4571640" cy="1550160"/>
-          </a:xfrm>
-          <a:prstGeom prst="rect">
-            <a:avLst/>
-          </a:prstGeom>
-          <a:noFill/>
-          <a:ln w="0">
-            <a:noFill/>
-          </a:ln>
-        </p:spPr>
-      </p:pic>
-      <p:sp>
-        <p:nvSpPr>
-          <p:cNvPr id="4" name="PlaceHolder 3"/>
-          <p:cNvSpPr>
-            <a:spLocks noGrp="1"/>
-          </p:cNvSpPr>
-          <p:nvPr>
-            <p:ph type="sldNum" idx="1"/>
-          </p:nvPr>
-        </p:nvSpPr>
-        <p:spPr/>
-        <p:txBody>
-          <a:bodyPr/>
-          <a:p>
-            <a:fld id="{7BB007CA-E302-4C4C-9F17-5595591F8951}" type="slidenum">
-              <a:t>12</a:t>
-            </a:fld>
-          </a:p>
-        </p:txBody>
-      </p:sp>
-    </p:spTree>
-  </p:cSld>
-  <mc:AlternateContent>
-    <mc:Choice Requires="p14">
-      <p:transition spd="slow" p14:dur="2000"/>
-    </mc:Choice>
-    <mc:Fallback>
-      <p:transition spd="slow"/>
-    </mc:Fallback>
-  </mc:AlternateContent>
-</p:sld>
-</file>
-
-<file path=ppt/slides/slide13.xml><?xml version="1.0" encoding="utf-8"?>
 <p:sld xmlns:a="http://schemas.openxmlformats.org/drawingml/2006/main" xmlns:p="http://schemas.openxmlformats.org/presentationml/2006/main" xmlns:r="http://schemas.openxmlformats.org/officeDocument/2006/relationships" xmlns:p14="http://schemas.microsoft.com/office/powerpoint/2010/main" xmlns:p15="http://schemas.microsoft.com/office/powerpoint/2012/main" xmlns:mc="http://schemas.openxmlformats.org/markup-compatibility/2006">
   <p:cSld>
     <p:spTree>
@@ -4214,7 +4547,7 @@
                 <a:uFillTx/>
                 <a:latin typeface="Calibri"/>
               </a:rPr>
-              <a:t>Evaluation</a:t>
+              <a:t>Demo of Project</a:t>
             </a:r>
             <a:endParaRPr b="0" lang="en-US" sz="2800" strike="noStrike" u="none">
               <a:solidFill>
@@ -4229,6 +4562,201 @@
       <p:sp>
         <p:nvSpPr>
           <p:cNvPr id="80" name="PlaceHolder 2"/>
+          <p:cNvSpPr>
+            <a:spLocks noGrp="1"/>
+          </p:cNvSpPr>
+          <p:nvPr>
+            <p:ph/>
+          </p:nvPr>
+        </p:nvSpPr>
+        <p:spPr>
+          <a:xfrm>
+            <a:off x="828720" y="1881000"/>
+            <a:ext cx="7499880" cy="4039200"/>
+          </a:xfrm>
+          <a:prstGeom prst="rect">
+            <a:avLst/>
+          </a:prstGeom>
+          <a:noFill/>
+          <a:ln w="0">
+            <a:noFill/>
+          </a:ln>
+        </p:spPr>
+        <p:txBody>
+          <a:bodyPr lIns="0" rIns="0" tIns="0" bIns="0" anchor="t">
+            <a:noAutofit/>
+          </a:bodyPr>
+          <a:p>
+            <a:pPr indent="0">
+              <a:spcBef>
+                <a:spcPts val="1417"/>
+              </a:spcBef>
+              <a:buNone/>
+            </a:pPr>
+            <a:endParaRPr b="0" lang="en-US" sz="1800" strike="noStrike" u="none">
+              <a:solidFill>
+                <a:srgbClr val="000000"/>
+              </a:solidFill>
+              <a:uFillTx/>
+              <a:latin typeface="Arial"/>
+            </a:endParaRPr>
+          </a:p>
+        </p:txBody>
+      </p:sp>
+      <p:sp>
+        <p:nvSpPr>
+          <p:cNvPr id="81" name="PlaceHolder 3"/>
+          <p:cNvSpPr>
+            <a:spLocks noGrp="1"/>
+          </p:cNvSpPr>
+          <p:nvPr>
+            <p:ph/>
+          </p:nvPr>
+        </p:nvSpPr>
+        <p:spPr>
+          <a:xfrm>
+            <a:off x="828720" y="914400"/>
+            <a:ext cx="7499880" cy="275040"/>
+          </a:xfrm>
+          <a:prstGeom prst="rect">
+            <a:avLst/>
+          </a:prstGeom>
+          <a:noFill/>
+          <a:ln w="0">
+            <a:noFill/>
+          </a:ln>
+        </p:spPr>
+        <p:txBody>
+          <a:bodyPr lIns="0" rIns="0" tIns="0" bIns="0" anchor="t">
+            <a:noAutofit/>
+          </a:bodyPr>
+          <a:p>
+            <a:pPr indent="0">
+              <a:spcBef>
+                <a:spcPts val="1417"/>
+              </a:spcBef>
+              <a:buNone/>
+            </a:pPr>
+            <a:endParaRPr b="0" lang="en-US" sz="1800" strike="noStrike" u="none">
+              <a:solidFill>
+                <a:srgbClr val="000000"/>
+              </a:solidFill>
+              <a:uFillTx/>
+              <a:latin typeface="Arial"/>
+            </a:endParaRPr>
+          </a:p>
+        </p:txBody>
+      </p:sp>
+      <p:sp>
+        <p:nvSpPr>
+          <p:cNvPr id="5" name="PlaceHolder 4"/>
+          <p:cNvSpPr>
+            <a:spLocks noGrp="1"/>
+          </p:cNvSpPr>
+          <p:nvPr>
+            <p:ph type="sldNum" idx="1"/>
+          </p:nvPr>
+        </p:nvSpPr>
+        <p:spPr/>
+        <p:txBody>
+          <a:bodyPr/>
+          <a:p>
+            <a:fld id="{05C264DB-B7FD-4111-98E8-C7F3B017EA67}" type="slidenum">
+              <a:t>12</a:t>
+            </a:fld>
+          </a:p>
+        </p:txBody>
+      </p:sp>
+    </p:spTree>
+  </p:cSld>
+  <mc:AlternateContent>
+    <mc:Choice Requires="p14">
+      <p:transition spd="slow" p14:dur="2000"/>
+    </mc:Choice>
+    <mc:Fallback>
+      <p:transition spd="slow"/>
+    </mc:Fallback>
+  </mc:AlternateContent>
+</p:sld>
+</file>
+
+<file path=ppt/slides/slide13.xml><?xml version="1.0" encoding="utf-8"?>
+<p:sld xmlns:a="http://schemas.openxmlformats.org/drawingml/2006/main" xmlns:p="http://schemas.openxmlformats.org/presentationml/2006/main" xmlns:r="http://schemas.openxmlformats.org/officeDocument/2006/relationships" xmlns:p14="http://schemas.microsoft.com/office/powerpoint/2010/main" xmlns:p15="http://schemas.microsoft.com/office/powerpoint/2012/main" xmlns:mc="http://schemas.openxmlformats.org/markup-compatibility/2006">
+  <p:cSld>
+    <p:spTree>
+      <p:nvGrpSpPr>
+        <p:cNvPr id="1" name=""/>
+        <p:cNvGrpSpPr/>
+        <p:nvPr/>
+      </p:nvGrpSpPr>
+      <p:grpSpPr>
+        <a:xfrm>
+          <a:off x="0" y="0"/>
+          <a:ext cx="0" cy="0"/>
+          <a:chOff x="0" y="0"/>
+          <a:chExt cx="0" cy="0"/>
+        </a:xfrm>
+      </p:grpSpPr>
+      <p:sp>
+        <p:nvSpPr>
+          <p:cNvPr id="82" name="PlaceHolder 1"/>
+          <p:cNvSpPr>
+            <a:spLocks noGrp="1"/>
+          </p:cNvSpPr>
+          <p:nvPr>
+            <p:ph type="title"/>
+          </p:nvPr>
+        </p:nvSpPr>
+        <p:spPr>
+          <a:xfrm>
+            <a:off x="828720" y="360000"/>
+            <a:ext cx="7499880" cy="560520"/>
+          </a:xfrm>
+          <a:prstGeom prst="rect">
+            <a:avLst/>
+          </a:prstGeom>
+          <a:noFill/>
+          <a:ln w="0">
+            <a:noFill/>
+          </a:ln>
+        </p:spPr>
+        <p:txBody>
+          <a:bodyPr lIns="0" rIns="0" tIns="0" bIns="0" anchor="b">
+            <a:noAutofit/>
+          </a:bodyPr>
+          <a:p>
+            <a:pPr indent="0" defTabSz="914400">
+              <a:lnSpc>
+                <a:spcPct val="100000"/>
+              </a:lnSpc>
+              <a:buNone/>
+              <a:tabLst>
+                <a:tab algn="l" pos="0"/>
+              </a:tabLst>
+            </a:pPr>
+            <a:r>
+              <a:rPr b="1" lang="en-GB" sz="2800" strike="noStrike" u="none">
+                <a:solidFill>
+                  <a:schemeClr val="dk1"/>
+                </a:solidFill>
+                <a:uFillTx/>
+                <a:latin typeface="Calibri"/>
+              </a:rPr>
+              <a:t>Evaluation</a:t>
+            </a:r>
+            <a:endParaRPr b="0" lang="en-US" sz="2800" strike="noStrike" u="none">
+              <a:solidFill>
+                <a:srgbClr val="000000"/>
+              </a:solidFill>
+              <a:uFillTx/>
+              <a:latin typeface="Arial"/>
+            </a:endParaRPr>
+          </a:p>
+        </p:txBody>
+      </p:sp>
+      <p:sp>
+        <p:nvSpPr>
+          <p:cNvPr id="83" name="PlaceHolder 2"/>
           <p:cNvSpPr>
             <a:spLocks noGrp="1"/>
           </p:cNvSpPr>
@@ -4351,7 +4879,309 @@
       </p:sp>
       <p:pic>
         <p:nvPicPr>
-          <p:cNvPr id="81" name="" descr=""/>
+          <p:cNvPr id="84" name="" descr=""/>
+          <p:cNvPicPr/>
+          <p:nvPr/>
+        </p:nvPicPr>
+        <p:blipFill>
+          <a:blip r:embed="rId1"/>
+          <a:stretch/>
+        </p:blipFill>
+        <p:spPr>
+          <a:xfrm>
+            <a:off x="228600" y="1828800"/>
+            <a:ext cx="3885840" cy="3885840"/>
+          </a:xfrm>
+          <a:prstGeom prst="rect">
+            <a:avLst/>
+          </a:prstGeom>
+          <a:noFill/>
+          <a:ln w="0">
+            <a:noFill/>
+          </a:ln>
+        </p:spPr>
+      </p:pic>
+      <p:pic>
+        <p:nvPicPr>
+          <p:cNvPr id="85" name="" descr=""/>
+          <p:cNvPicPr/>
+          <p:nvPr/>
+        </p:nvPicPr>
+        <p:blipFill>
+          <a:blip r:embed="rId2"/>
+          <a:stretch/>
+        </p:blipFill>
+        <p:spPr>
+          <a:xfrm>
+            <a:off x="4359600" y="1936800"/>
+            <a:ext cx="4737600" cy="1606320"/>
+          </a:xfrm>
+          <a:prstGeom prst="rect">
+            <a:avLst/>
+          </a:prstGeom>
+          <a:noFill/>
+          <a:ln w="0">
+            <a:noFill/>
+          </a:ln>
+        </p:spPr>
+      </p:pic>
+      <p:pic>
+        <p:nvPicPr>
+          <p:cNvPr id="86" name="" descr=""/>
+          <p:cNvPicPr/>
+          <p:nvPr/>
+        </p:nvPicPr>
+        <p:blipFill>
+          <a:blip r:embed="rId3"/>
+          <a:stretch/>
+        </p:blipFill>
+        <p:spPr>
+          <a:xfrm>
+            <a:off x="4343400" y="3707280"/>
+            <a:ext cx="4571640" cy="1550160"/>
+          </a:xfrm>
+          <a:prstGeom prst="rect">
+            <a:avLst/>
+          </a:prstGeom>
+          <a:noFill/>
+          <a:ln w="0">
+            <a:noFill/>
+          </a:ln>
+        </p:spPr>
+      </p:pic>
+      <p:sp>
+        <p:nvSpPr>
+          <p:cNvPr id="4" name="PlaceHolder 3"/>
+          <p:cNvSpPr>
+            <a:spLocks noGrp="1"/>
+          </p:cNvSpPr>
+          <p:nvPr>
+            <p:ph type="sldNum" idx="1"/>
+          </p:nvPr>
+        </p:nvSpPr>
+        <p:spPr/>
+        <p:txBody>
+          <a:bodyPr/>
+          <a:p>
+            <a:fld id="{9FD9484E-7C68-49B7-A50A-9935391A99BA}" type="slidenum">
+              <a:t>13</a:t>
+            </a:fld>
+          </a:p>
+        </p:txBody>
+      </p:sp>
+    </p:spTree>
+  </p:cSld>
+  <mc:AlternateContent>
+    <mc:Choice Requires="p14">
+      <p:transition spd="slow" p14:dur="2000"/>
+    </mc:Choice>
+    <mc:Fallback>
+      <p:transition spd="slow"/>
+    </mc:Fallback>
+  </mc:AlternateContent>
+</p:sld>
+</file>
+
+<file path=ppt/slides/slide14.xml><?xml version="1.0" encoding="utf-8"?>
+<p:sld xmlns:a="http://schemas.openxmlformats.org/drawingml/2006/main" xmlns:p="http://schemas.openxmlformats.org/presentationml/2006/main" xmlns:r="http://schemas.openxmlformats.org/officeDocument/2006/relationships" xmlns:p14="http://schemas.microsoft.com/office/powerpoint/2010/main" xmlns:p15="http://schemas.microsoft.com/office/powerpoint/2012/main" xmlns:mc="http://schemas.openxmlformats.org/markup-compatibility/2006">
+  <p:cSld>
+    <p:spTree>
+      <p:nvGrpSpPr>
+        <p:cNvPr id="1" name=""/>
+        <p:cNvGrpSpPr/>
+        <p:nvPr/>
+      </p:nvGrpSpPr>
+      <p:grpSpPr>
+        <a:xfrm>
+          <a:off x="0" y="0"/>
+          <a:ext cx="0" cy="0"/>
+          <a:chOff x="0" y="0"/>
+          <a:chExt cx="0" cy="0"/>
+        </a:xfrm>
+      </p:grpSpPr>
+      <p:sp>
+        <p:nvSpPr>
+          <p:cNvPr id="87" name="PlaceHolder 1"/>
+          <p:cNvSpPr>
+            <a:spLocks noGrp="1"/>
+          </p:cNvSpPr>
+          <p:nvPr>
+            <p:ph type="title"/>
+          </p:nvPr>
+        </p:nvSpPr>
+        <p:spPr>
+          <a:xfrm>
+            <a:off x="828720" y="360000"/>
+            <a:ext cx="7499880" cy="560520"/>
+          </a:xfrm>
+          <a:prstGeom prst="rect">
+            <a:avLst/>
+          </a:prstGeom>
+          <a:noFill/>
+          <a:ln w="0">
+            <a:noFill/>
+          </a:ln>
+        </p:spPr>
+        <p:txBody>
+          <a:bodyPr lIns="0" rIns="0" tIns="0" bIns="0" anchor="b">
+            <a:noAutofit/>
+          </a:bodyPr>
+          <a:p>
+            <a:pPr indent="0" defTabSz="914400">
+              <a:lnSpc>
+                <a:spcPct val="100000"/>
+              </a:lnSpc>
+              <a:buNone/>
+              <a:tabLst>
+                <a:tab algn="l" pos="0"/>
+              </a:tabLst>
+            </a:pPr>
+            <a:r>
+              <a:rPr b="1" lang="en-GB" sz="2800" strike="noStrike" u="none">
+                <a:solidFill>
+                  <a:schemeClr val="dk1"/>
+                </a:solidFill>
+                <a:uFillTx/>
+                <a:latin typeface="Calibri"/>
+              </a:rPr>
+              <a:t>Evaluation</a:t>
+            </a:r>
+            <a:endParaRPr b="0" lang="en-US" sz="2800" strike="noStrike" u="none">
+              <a:solidFill>
+                <a:srgbClr val="000000"/>
+              </a:solidFill>
+              <a:uFillTx/>
+              <a:latin typeface="Arial"/>
+            </a:endParaRPr>
+          </a:p>
+        </p:txBody>
+      </p:sp>
+      <p:sp>
+        <p:nvSpPr>
+          <p:cNvPr id="88" name="PlaceHolder 2"/>
+          <p:cNvSpPr>
+            <a:spLocks noGrp="1"/>
+          </p:cNvSpPr>
+          <p:nvPr>
+            <p:ph/>
+          </p:nvPr>
+        </p:nvSpPr>
+        <p:spPr>
+          <a:xfrm>
+            <a:off x="828720" y="4875840"/>
+            <a:ext cx="7499880" cy="4039200"/>
+          </a:xfrm>
+          <a:prstGeom prst="rect">
+            <a:avLst/>
+          </a:prstGeom>
+          <a:noFill/>
+          <a:ln w="0">
+            <a:noFill/>
+          </a:ln>
+        </p:spPr>
+        <p:txBody>
+          <a:bodyPr lIns="0" rIns="0" tIns="0" bIns="0" anchor="t">
+            <a:noAutofit/>
+          </a:bodyPr>
+          <a:p>
+            <a:pPr marL="343080" indent="0" defTabSz="914400">
+              <a:lnSpc>
+                <a:spcPct val="100000"/>
+              </a:lnSpc>
+              <a:spcBef>
+                <a:spcPts val="1417"/>
+              </a:spcBef>
+              <a:buNone/>
+              <a:tabLst>
+                <a:tab algn="l" pos="0"/>
+              </a:tabLst>
+            </a:pPr>
+            <a:r>
+              <a:rPr b="0" lang="en-GB" sz="2400" strike="noStrike" u="none">
+                <a:solidFill>
+                  <a:schemeClr val="dk1"/>
+                </a:solidFill>
+                <a:uFillTx/>
+                <a:latin typeface="Calibri"/>
+              </a:rPr>
+              <a:t> </a:t>
+            </a:r>
+            <a:endParaRPr b="0" lang="en-US" sz="2400" strike="noStrike" u="none">
+              <a:solidFill>
+                <a:srgbClr val="000000"/>
+              </a:solidFill>
+              <a:uFillTx/>
+              <a:latin typeface="Arial"/>
+            </a:endParaRPr>
+          </a:p>
+          <a:p>
+            <a:pPr marL="343080" indent="0" defTabSz="914400">
+              <a:lnSpc>
+                <a:spcPct val="100000"/>
+              </a:lnSpc>
+              <a:spcBef>
+                <a:spcPts val="1417"/>
+              </a:spcBef>
+              <a:buNone/>
+              <a:tabLst>
+                <a:tab algn="l" pos="0"/>
+              </a:tabLst>
+            </a:pPr>
+            <a:endParaRPr b="0" lang="en-US" sz="2000" strike="noStrike" u="none">
+              <a:solidFill>
+                <a:srgbClr val="000000"/>
+              </a:solidFill>
+              <a:uFillTx/>
+              <a:latin typeface="Arial"/>
+            </a:endParaRPr>
+          </a:p>
+          <a:p>
+            <a:pPr marL="343080" indent="0" defTabSz="914400">
+              <a:lnSpc>
+                <a:spcPct val="100000"/>
+              </a:lnSpc>
+              <a:spcBef>
+                <a:spcPts val="1417"/>
+              </a:spcBef>
+              <a:buNone/>
+              <a:tabLst>
+                <a:tab algn="l" pos="0"/>
+              </a:tabLst>
+            </a:pPr>
+            <a:endParaRPr b="0" lang="en-US" sz="2000" strike="noStrike" u="none">
+              <a:solidFill>
+                <a:srgbClr val="000000"/>
+              </a:solidFill>
+              <a:uFillTx/>
+              <a:latin typeface="Arial"/>
+            </a:endParaRPr>
+          </a:p>
+          <a:p>
+            <a:pPr marL="343080" indent="0" defTabSz="914400">
+              <a:lnSpc>
+                <a:spcPct val="100000"/>
+              </a:lnSpc>
+              <a:spcBef>
+                <a:spcPts val="1134"/>
+              </a:spcBef>
+              <a:buNone/>
+              <a:tabLst>
+                <a:tab algn="l" pos="0"/>
+              </a:tabLst>
+            </a:pPr>
+            <a:endParaRPr b="0" lang="en-US" sz="2000" strike="noStrike" u="none">
+              <a:solidFill>
+                <a:srgbClr val="000000"/>
+              </a:solidFill>
+              <a:uFillTx/>
+              <a:latin typeface="Arial"/>
+            </a:endParaRPr>
+          </a:p>
+        </p:txBody>
+      </p:sp>
+      <p:pic>
+        <p:nvPicPr>
+          <p:cNvPr id="89" name="" descr=""/>
           <p:cNvPicPr/>
           <p:nvPr/>
         </p:nvPicPr>
@@ -4387,367 +5217,7 @@
         <p:txBody>
           <a:bodyPr/>
           <a:p>
-            <a:fld id="{E0689D0D-68A5-4D3A-A12F-AB5569106AF6}" type="slidenum">
-              <a:t>13</a:t>
-            </a:fld>
-          </a:p>
-        </p:txBody>
-      </p:sp>
-    </p:spTree>
-  </p:cSld>
-  <mc:AlternateContent>
-    <mc:Choice Requires="p14">
-      <p:transition spd="slow" p14:dur="2000"/>
-    </mc:Choice>
-    <mc:Fallback>
-      <p:transition spd="slow"/>
-    </mc:Fallback>
-  </mc:AlternateContent>
-</p:sld>
-</file>
-
-<file path=ppt/slides/slide14.xml><?xml version="1.0" encoding="utf-8"?>
-<p:sld xmlns:a="http://schemas.openxmlformats.org/drawingml/2006/main" xmlns:p="http://schemas.openxmlformats.org/presentationml/2006/main" xmlns:r="http://schemas.openxmlformats.org/officeDocument/2006/relationships" xmlns:p14="http://schemas.microsoft.com/office/powerpoint/2010/main" xmlns:p15="http://schemas.microsoft.com/office/powerpoint/2012/main" xmlns:mc="http://schemas.openxmlformats.org/markup-compatibility/2006">
-  <p:cSld>
-    <p:spTree>
-      <p:nvGrpSpPr>
-        <p:cNvPr id="1" name=""/>
-        <p:cNvGrpSpPr/>
-        <p:nvPr/>
-      </p:nvGrpSpPr>
-      <p:grpSpPr>
-        <a:xfrm>
-          <a:off x="0" y="0"/>
-          <a:ext cx="0" cy="0"/>
-          <a:chOff x="0" y="0"/>
-          <a:chExt cx="0" cy="0"/>
-        </a:xfrm>
-      </p:grpSpPr>
-      <p:pic>
-        <p:nvPicPr>
-          <p:cNvPr id="82" name="" descr=""/>
-          <p:cNvPicPr/>
-          <p:nvPr/>
-        </p:nvPicPr>
-        <p:blipFill>
-          <a:blip r:embed="rId1"/>
-          <a:stretch/>
-        </p:blipFill>
-        <p:spPr>
-          <a:xfrm>
-            <a:off x="1360080" y="1068480"/>
-            <a:ext cx="6191640" cy="3596040"/>
-          </a:xfrm>
-          <a:prstGeom prst="rect">
-            <a:avLst/>
-          </a:prstGeom>
-          <a:noFill/>
-          <a:ln w="0">
-            <a:noFill/>
-          </a:ln>
-        </p:spPr>
-      </p:pic>
-      <p:sp>
-        <p:nvSpPr>
-          <p:cNvPr id="83" name="PlaceHolder 1"/>
-          <p:cNvSpPr>
-            <a:spLocks noGrp="1"/>
-          </p:cNvSpPr>
-          <p:nvPr>
-            <p:ph type="title"/>
-          </p:nvPr>
-        </p:nvSpPr>
-        <p:spPr>
-          <a:xfrm>
-            <a:off x="828720" y="360000"/>
-            <a:ext cx="7499880" cy="560520"/>
-          </a:xfrm>
-          <a:prstGeom prst="rect">
-            <a:avLst/>
-          </a:prstGeom>
-          <a:noFill/>
-          <a:ln w="0">
-            <a:noFill/>
-          </a:ln>
-        </p:spPr>
-        <p:txBody>
-          <a:bodyPr lIns="0" rIns="0" tIns="0" bIns="0" anchor="b">
-            <a:noAutofit/>
-          </a:bodyPr>
-          <a:p>
-            <a:pPr indent="0" defTabSz="914400">
-              <a:lnSpc>
-                <a:spcPct val="100000"/>
-              </a:lnSpc>
-              <a:buNone/>
-              <a:tabLst>
-                <a:tab algn="l" pos="0"/>
-              </a:tabLst>
-            </a:pPr>
-            <a:r>
-              <a:rPr b="1" lang="en-GB" sz="2800" strike="noStrike" u="none">
-                <a:solidFill>
-                  <a:schemeClr val="dk1"/>
-                </a:solidFill>
-                <a:uFillTx/>
-                <a:latin typeface="Calibri"/>
-              </a:rPr>
-              <a:t>Evaluation</a:t>
-            </a:r>
-            <a:endParaRPr b="0" lang="en-US" sz="2800" strike="noStrike" u="none">
-              <a:solidFill>
-                <a:srgbClr val="000000"/>
-              </a:solidFill>
-              <a:uFillTx/>
-              <a:latin typeface="Arial"/>
-            </a:endParaRPr>
-          </a:p>
-        </p:txBody>
-      </p:sp>
-      <p:sp>
-        <p:nvSpPr>
-          <p:cNvPr id="84" name="Text Placeholder 3"/>
-          <p:cNvSpPr/>
-          <p:nvPr/>
-        </p:nvSpPr>
-        <p:spPr>
-          <a:xfrm>
-            <a:off x="500760" y="4647240"/>
-            <a:ext cx="7499880" cy="4039200"/>
-          </a:xfrm>
-          <a:prstGeom prst="rect">
-            <a:avLst/>
-          </a:prstGeom>
-          <a:noFill/>
-          <a:ln w="0">
-            <a:noFill/>
-          </a:ln>
-        </p:spPr>
-        <p:style>
-          <a:lnRef idx="0"/>
-          <a:fillRef idx="0"/>
-          <a:effectRef idx="0"/>
-          <a:fontRef idx="minor"/>
-        </p:style>
-        <p:txBody>
-          <a:bodyPr lIns="0" rIns="0" tIns="0" bIns="0" anchor="t">
-            <a:noAutofit/>
-          </a:bodyPr>
-          <a:p>
-            <a:pPr marL="343080" indent="-343080" defTabSz="914400">
-              <a:lnSpc>
-                <a:spcPct val="100000"/>
-              </a:lnSpc>
-              <a:spcBef>
-                <a:spcPts val="1417"/>
-              </a:spcBef>
-              <a:buClr>
-                <a:srgbClr val="000000"/>
-              </a:buClr>
-              <a:buFont typeface="Arial"/>
-              <a:buChar char="•"/>
-            </a:pPr>
-            <a:r>
-              <a:rPr b="1" lang="en-US" sz="2000" strike="noStrike" u="none">
-                <a:solidFill>
-                  <a:schemeClr val="dk1"/>
-                </a:solidFill>
-                <a:uFillTx/>
-                <a:latin typeface="Calibri"/>
-                <a:ea typeface="DejaVu Sans"/>
-              </a:rPr>
-              <a:t>Diversity </a:t>
-            </a:r>
-            <a:r>
-              <a:rPr b="0" lang="en-US" sz="2000" strike="noStrike" u="none">
-                <a:solidFill>
-                  <a:schemeClr val="dk1"/>
-                </a:solidFill>
-                <a:uFillTx/>
-                <a:latin typeface="Calibri"/>
-                <a:ea typeface="DejaVu Sans"/>
-              </a:rPr>
-              <a:t>= </a:t>
-            </a:r>
-            <a:r>
-              <a:rPr b="1" lang="en-US" sz="2000" strike="noStrike" u="none">
-                <a:solidFill>
-                  <a:schemeClr val="dk1"/>
-                </a:solidFill>
-                <a:uFillTx/>
-                <a:latin typeface="Calibri"/>
-                <a:ea typeface="DejaVu Sans"/>
-              </a:rPr>
-              <a:t>insignificant </a:t>
-            </a:r>
-            <a:r>
-              <a:rPr b="0" lang="en-US" sz="2000" strike="noStrike" u="none">
-                <a:solidFill>
-                  <a:schemeClr val="dk1"/>
-                </a:solidFill>
-                <a:uFillTx/>
-                <a:latin typeface="Calibri"/>
-                <a:ea typeface="DejaVu Sans"/>
-              </a:rPr>
-              <a:t>differences between actual and baseline</a:t>
-            </a:r>
-            <a:endParaRPr b="0" lang="en-US" sz="2000" strike="noStrike" u="none">
-              <a:solidFill>
-                <a:srgbClr val="000000"/>
-              </a:solidFill>
-              <a:uFillTx/>
-              <a:latin typeface="Arial"/>
-            </a:endParaRPr>
-          </a:p>
-          <a:p>
-            <a:pPr marL="343080" indent="-343080" defTabSz="914400">
-              <a:lnSpc>
-                <a:spcPct val="100000"/>
-              </a:lnSpc>
-              <a:spcBef>
-                <a:spcPts val="1417"/>
-              </a:spcBef>
-              <a:buClr>
-                <a:srgbClr val="000000"/>
-              </a:buClr>
-              <a:buFont typeface="Arial"/>
-              <a:buChar char="•"/>
-            </a:pPr>
-            <a:r>
-              <a:rPr b="1" lang="en-US" sz="2000" strike="noStrike" u="none">
-                <a:solidFill>
-                  <a:schemeClr val="dk1"/>
-                </a:solidFill>
-                <a:uFillTx/>
-                <a:latin typeface="Calibri"/>
-                <a:ea typeface="DejaVu Sans"/>
-              </a:rPr>
-              <a:t>Novelty </a:t>
-            </a:r>
-            <a:r>
-              <a:rPr b="0" lang="en-US" sz="2000" strike="noStrike" u="none">
-                <a:solidFill>
-                  <a:schemeClr val="dk1"/>
-                </a:solidFill>
-                <a:uFillTx/>
-                <a:latin typeface="Calibri"/>
-                <a:ea typeface="DejaVu Sans"/>
-              </a:rPr>
-              <a:t>= </a:t>
-            </a:r>
-            <a:r>
-              <a:rPr b="1" lang="en-US" sz="2000" strike="noStrike" u="none">
-                <a:solidFill>
-                  <a:schemeClr val="dk1"/>
-                </a:solidFill>
-                <a:uFillTx/>
-                <a:latin typeface="Calibri"/>
-                <a:ea typeface="DejaVu Sans"/>
-              </a:rPr>
-              <a:t>significant </a:t>
-            </a:r>
-            <a:r>
-              <a:rPr b="0" lang="en-US" sz="2000" strike="noStrike" u="none">
-                <a:solidFill>
-                  <a:schemeClr val="dk1"/>
-                </a:solidFill>
-                <a:uFillTx/>
-                <a:latin typeface="Calibri"/>
-                <a:ea typeface="DejaVu Sans"/>
-              </a:rPr>
-              <a:t>improvement of baseline compared to actual</a:t>
-            </a:r>
-            <a:endParaRPr b="0" lang="en-US" sz="2000" strike="noStrike" u="none">
-              <a:solidFill>
-                <a:srgbClr val="000000"/>
-              </a:solidFill>
-              <a:uFillTx/>
-              <a:latin typeface="Arial"/>
-            </a:endParaRPr>
-          </a:p>
-          <a:p>
-            <a:pPr marL="343080" indent="-343080" defTabSz="914400">
-              <a:lnSpc>
-                <a:spcPct val="100000"/>
-              </a:lnSpc>
-              <a:spcBef>
-                <a:spcPts val="1417"/>
-              </a:spcBef>
-              <a:buClr>
-                <a:srgbClr val="000000"/>
-              </a:buClr>
-              <a:buFont typeface="Arial"/>
-              <a:buChar char="•"/>
-            </a:pPr>
-            <a:r>
-              <a:rPr b="1" lang="en-US" sz="2000" strike="noStrike" u="none">
-                <a:solidFill>
-                  <a:schemeClr val="dk1"/>
-                </a:solidFill>
-                <a:uFillTx/>
-                <a:latin typeface="Calibri"/>
-                <a:ea typeface="DejaVu Sans"/>
-              </a:rPr>
-              <a:t>Everything else </a:t>
-            </a:r>
-            <a:r>
-              <a:rPr b="0" lang="en-US" sz="2000" strike="noStrike" u="none">
-                <a:solidFill>
-                  <a:schemeClr val="dk1"/>
-                </a:solidFill>
-                <a:uFillTx/>
-                <a:latin typeface="Calibri"/>
-                <a:ea typeface="DejaVu Sans"/>
-              </a:rPr>
-              <a:t>= </a:t>
-            </a:r>
-            <a:r>
-              <a:rPr b="1" lang="en-US" sz="2000" strike="noStrike" u="none">
-                <a:solidFill>
-                  <a:schemeClr val="dk1"/>
-                </a:solidFill>
-                <a:uFillTx/>
-                <a:latin typeface="Calibri"/>
-                <a:ea typeface="DejaVu Sans"/>
-              </a:rPr>
-              <a:t>significant </a:t>
-            </a:r>
-            <a:r>
-              <a:rPr b="0" lang="en-US" sz="2000" strike="noStrike" u="none">
-                <a:solidFill>
-                  <a:schemeClr val="dk1"/>
-                </a:solidFill>
-                <a:uFillTx/>
-                <a:latin typeface="Calibri"/>
-                <a:ea typeface="DejaVu Sans"/>
-              </a:rPr>
-              <a:t>improvements of actual compared to baseline</a:t>
-            </a:r>
-            <a:endParaRPr b="0" lang="en-US" sz="2000" strike="noStrike" u="none">
-              <a:solidFill>
-                <a:srgbClr val="000000"/>
-              </a:solidFill>
-              <a:uFillTx/>
-              <a:latin typeface="Arial"/>
-            </a:endParaRPr>
-          </a:p>
-        </p:txBody>
-      </p:sp>
-      <p:sp>
-        <p:nvSpPr>
-          <p:cNvPr id="3" name="PlaceHolder 2"/>
-          <p:cNvSpPr>
-            <a:spLocks noGrp="1"/>
-          </p:cNvSpPr>
-          <p:nvPr>
-            <p:ph type="sldNum" idx="1"/>
-          </p:nvPr>
-        </p:nvSpPr>
-        <p:spPr/>
-        <p:txBody>
-          <a:bodyPr/>
-          <a:p>
-            <a:fld id="{3BA4AF64-F3ED-4171-8D57-BEFC3CC2F4A6}" type="slidenum">
+            <a:fld id="{79C002C5-FA4B-47BD-9233-E53F2BE63F0B}" type="slidenum">
               <a:t>14</a:t>
             </a:fld>
           </a:p>
@@ -4783,9 +5253,33 @@
           <a:chExt cx="0" cy="0"/>
         </a:xfrm>
       </p:grpSpPr>
+      <p:pic>
+        <p:nvPicPr>
+          <p:cNvPr id="90" name="" descr=""/>
+          <p:cNvPicPr/>
+          <p:nvPr/>
+        </p:nvPicPr>
+        <p:blipFill>
+          <a:blip r:embed="rId1"/>
+          <a:stretch/>
+        </p:blipFill>
+        <p:spPr>
+          <a:xfrm>
+            <a:off x="1360080" y="1068480"/>
+            <a:ext cx="6191640" cy="3596040"/>
+          </a:xfrm>
+          <a:prstGeom prst="rect">
+            <a:avLst/>
+          </a:prstGeom>
+          <a:noFill/>
+          <a:ln w="0">
+            <a:noFill/>
+          </a:ln>
+        </p:spPr>
+      </p:pic>
       <p:sp>
         <p:nvSpPr>
-          <p:cNvPr id="85" name="PlaceHolder 1"/>
+          <p:cNvPr id="91" name="PlaceHolder 1"/>
           <p:cNvSpPr>
             <a:spLocks noGrp="1"/>
           </p:cNvSpPr>
@@ -4828,7 +5322,7 @@
                 <a:uFillTx/>
                 <a:latin typeface="Calibri"/>
               </a:rPr>
-              <a:t>Conclusions</a:t>
+              <a:t>Evaluation</a:t>
             </a:r>
             <a:endParaRPr b="0" lang="en-US" sz="2800" strike="noStrike" u="none">
               <a:solidFill>
@@ -4842,17 +5336,13 @@
       </p:sp>
       <p:sp>
         <p:nvSpPr>
-          <p:cNvPr id="86" name="PlaceHolder 2"/>
-          <p:cNvSpPr>
-            <a:spLocks noGrp="1"/>
-          </p:cNvSpPr>
-          <p:nvPr>
-            <p:ph/>
-          </p:nvPr>
+          <p:cNvPr id="92" name="Text Placeholder 3"/>
+          <p:cNvSpPr/>
+          <p:nvPr/>
         </p:nvSpPr>
         <p:spPr>
           <a:xfrm>
-            <a:off x="828720" y="1881000"/>
+            <a:off x="500760" y="4647240"/>
             <a:ext cx="7499880" cy="4039200"/>
           </a:xfrm>
           <a:prstGeom prst="rect">
@@ -4863,6 +5353,12 @@
             <a:noFill/>
           </a:ln>
         </p:spPr>
+        <p:style>
+          <a:lnRef idx="0"/>
+          <a:fillRef idx="0"/>
+          <a:effectRef idx="0"/>
+          <a:fontRef idx="minor"/>
+        </p:style>
         <p:txBody>
           <a:bodyPr lIns="0" rIns="0" tIns="0" bIns="0" anchor="t">
             <a:noAutofit/>
@@ -4882,125 +5378,50 @@
               <a:buChar char="•"/>
             </a:pPr>
             <a:r>
-              <a:rPr b="0" lang="en-US" sz="2400" strike="noStrike" u="none">
-                <a:solidFill>
-                  <a:schemeClr val="dk1"/>
-                </a:solidFill>
-                <a:uFillTx/>
-                <a:latin typeface="Calibri"/>
-              </a:rPr>
-              <a:t>Research question: </a:t>
-            </a:r>
-            <a:r>
-              <a:rPr b="0" i="1" lang="en-US" sz="2400" strike="noStrike" u="none">
-                <a:solidFill>
-                  <a:schemeClr val="dk1"/>
-                </a:solidFill>
-                <a:uFillTx/>
-                <a:latin typeface="Calibri"/>
-              </a:rPr>
-              <a:t>“How can a Recommender System assist an Irish student in their college course decision-making process”</a:t>
-            </a:r>
-            <a:endParaRPr b="0" lang="en-US" sz="2400" strike="noStrike" u="none">
-              <a:solidFill>
-                <a:srgbClr val="000000"/>
-              </a:solidFill>
-              <a:uFillTx/>
-              <a:latin typeface="Arial"/>
-            </a:endParaRPr>
-          </a:p>
-          <a:p>
-            <a:pPr lvl="1" marL="864000" indent="-324000" defTabSz="914400">
-              <a:lnSpc>
-                <a:spcPct val="100000"/>
-              </a:lnSpc>
-              <a:spcBef>
-                <a:spcPts val="1134"/>
-              </a:spcBef>
-              <a:buClr>
-                <a:srgbClr val="000000"/>
-              </a:buClr>
-              <a:buSzPct val="75000"/>
-              <a:buFont typeface="Symbol" charset="2"/>
-              <a:buChar char=""/>
-            </a:pPr>
-            <a:r>
-              <a:rPr b="0" i="1" lang="en-US" sz="2400" strike="noStrike" u="none">
-                <a:solidFill>
-                  <a:schemeClr val="dk1"/>
-                </a:solidFill>
-                <a:uFillTx/>
-                <a:latin typeface="Calibri"/>
-              </a:rPr>
-              <a:t>By recommending college courses that:</a:t>
-            </a:r>
-            <a:endParaRPr b="0" lang="en-US" sz="2400" strike="noStrike" u="none">
-              <a:solidFill>
-                <a:srgbClr val="000000"/>
-              </a:solidFill>
-              <a:uFillTx/>
-              <a:latin typeface="Arial"/>
-            </a:endParaRPr>
-          </a:p>
-          <a:p>
-            <a:pPr lvl="2" marL="1296000" indent="-288000" defTabSz="914400">
-              <a:lnSpc>
-                <a:spcPct val="100000"/>
-              </a:lnSpc>
-              <a:spcBef>
-                <a:spcPts val="850"/>
-              </a:spcBef>
-              <a:buClr>
-                <a:srgbClr val="000000"/>
-              </a:buClr>
-              <a:buSzPct val="45000"/>
-              <a:buFont typeface="Wingdings" charset="2"/>
-              <a:buChar char=""/>
-            </a:pPr>
-            <a:r>
-              <a:rPr b="0" i="1" lang="en-US" sz="2400" strike="noStrike" u="none">
-                <a:solidFill>
-                  <a:schemeClr val="dk1"/>
-                </a:solidFill>
-                <a:uFillTx/>
-                <a:latin typeface="Calibri"/>
-              </a:rPr>
-              <a:t>Are relevant to their preferences</a:t>
-            </a:r>
-            <a:endParaRPr b="0" lang="en-US" sz="2400" strike="noStrike" u="none">
-              <a:solidFill>
-                <a:srgbClr val="000000"/>
-              </a:solidFill>
-              <a:uFillTx/>
-              <a:latin typeface="Arial"/>
-            </a:endParaRPr>
-          </a:p>
-          <a:p>
-            <a:pPr lvl="2" marL="1296000" indent="-288000" defTabSz="914400">
-              <a:lnSpc>
-                <a:spcPct val="100000"/>
-              </a:lnSpc>
-              <a:spcBef>
-                <a:spcPts val="850"/>
-              </a:spcBef>
-              <a:buClr>
-                <a:srgbClr val="000000"/>
-              </a:buClr>
-              <a:buSzPct val="45000"/>
-              <a:buFont typeface="Wingdings" charset="2"/>
-              <a:buChar char=""/>
-            </a:pPr>
-            <a:r>
-              <a:rPr b="0" i="1" lang="en-US" sz="2400" strike="noStrike" u="none">
-                <a:solidFill>
-                  <a:schemeClr val="dk1"/>
-                </a:solidFill>
-                <a:uFillTx/>
-                <a:latin typeface="Calibri"/>
-              </a:rPr>
-              <a:t>Serendipitous</a:t>
-            </a:r>
-            <a:endParaRPr b="0" lang="en-US" sz="2400" strike="noStrike" u="none">
+              <a:rPr b="1" lang="en-US" sz="2000" strike="noStrike" u="none">
+                <a:solidFill>
+                  <a:schemeClr val="dk1"/>
+                </a:solidFill>
+                <a:uFillTx/>
+                <a:latin typeface="Calibri"/>
+                <a:ea typeface="DejaVu Sans"/>
+              </a:rPr>
+              <a:t>Diversity </a:t>
+            </a:r>
+            <a:r>
+              <a:rPr b="0" lang="en-US" sz="2000" strike="noStrike" u="none">
+                <a:solidFill>
+                  <a:schemeClr val="dk1"/>
+                </a:solidFill>
+                <a:uFillTx/>
+                <a:latin typeface="Calibri"/>
+                <a:ea typeface="DejaVu Sans"/>
+              </a:rPr>
+              <a:t>= </a:t>
+            </a:r>
+            <a:r>
+              <a:rPr b="1" lang="en-US" sz="2000" strike="noStrike" u="none">
+                <a:solidFill>
+                  <a:schemeClr val="dk1"/>
+                </a:solidFill>
+                <a:uFillTx/>
+                <a:latin typeface="Calibri"/>
+                <a:ea typeface="DejaVu Sans"/>
+              </a:rPr>
+              <a:t>insignificant </a:t>
+            </a:r>
+            <a:r>
+              <a:rPr b="0" lang="en-US" sz="2000" strike="noStrike" u="none">
+                <a:solidFill>
+                  <a:schemeClr val="dk1"/>
+                </a:solidFill>
+                <a:uFillTx/>
+                <a:latin typeface="Calibri"/>
+                <a:ea typeface="DejaVu Sans"/>
+              </a:rPr>
+              <a:t>differences between actual and baseline</a:t>
+            </a:r>
+            <a:endParaRPr b="0" lang="en-US" sz="2000" strike="noStrike" u="none">
               <a:solidFill>
                 <a:srgbClr val="000000"/>
               </a:solidFill>
@@ -5023,59 +5444,116 @@
               <a:buChar char="•"/>
             </a:pPr>
             <a:r>
-              <a:rPr b="1" i="1" lang="en-US" sz="2400" strike="noStrike" u="none">
-                <a:solidFill>
-                  <a:schemeClr val="dk1"/>
-                </a:solidFill>
-                <a:uFillTx/>
-                <a:latin typeface="Calibri"/>
-              </a:rPr>
-              <a:t>Future work: </a:t>
-            </a:r>
-            <a:endParaRPr b="0" lang="en-US" sz="2400" strike="noStrike" u="none">
-              <a:solidFill>
-                <a:srgbClr val="000000"/>
-              </a:solidFill>
-              <a:uFillTx/>
-              <a:latin typeface="Arial"/>
-            </a:endParaRPr>
-          </a:p>
-          <a:p>
-            <a:pPr lvl="1" marL="864000" indent="-324000" defTabSz="914400">
+              <a:rPr b="1" lang="en-US" sz="2000" strike="noStrike" u="none">
+                <a:solidFill>
+                  <a:schemeClr val="dk1"/>
+                </a:solidFill>
+                <a:uFillTx/>
+                <a:latin typeface="Calibri"/>
+                <a:ea typeface="DejaVu Sans"/>
+              </a:rPr>
+              <a:t>Novelty </a:t>
+            </a:r>
+            <a:r>
+              <a:rPr b="0" lang="en-US" sz="2000" strike="noStrike" u="none">
+                <a:solidFill>
+                  <a:schemeClr val="dk1"/>
+                </a:solidFill>
+                <a:uFillTx/>
+                <a:latin typeface="Calibri"/>
+                <a:ea typeface="DejaVu Sans"/>
+              </a:rPr>
+              <a:t>= </a:t>
+            </a:r>
+            <a:r>
+              <a:rPr b="1" lang="en-US" sz="2000" strike="noStrike" u="none">
+                <a:solidFill>
+                  <a:schemeClr val="dk1"/>
+                </a:solidFill>
+                <a:uFillTx/>
+                <a:latin typeface="Calibri"/>
+                <a:ea typeface="DejaVu Sans"/>
+              </a:rPr>
+              <a:t>significant </a:t>
+            </a:r>
+            <a:r>
+              <a:rPr b="0" lang="en-US" sz="2000" strike="noStrike" u="none">
+                <a:solidFill>
+                  <a:schemeClr val="dk1"/>
+                </a:solidFill>
+                <a:uFillTx/>
+                <a:latin typeface="Calibri"/>
+                <a:ea typeface="DejaVu Sans"/>
+              </a:rPr>
+              <a:t>improvement of baseline compared to actual</a:t>
+            </a:r>
+            <a:endParaRPr b="0" lang="en-US" sz="2000" strike="noStrike" u="none">
+              <a:solidFill>
+                <a:srgbClr val="000000"/>
+              </a:solidFill>
+              <a:uFillTx/>
+              <a:latin typeface="Arial"/>
+            </a:endParaRPr>
+          </a:p>
+          <a:p>
+            <a:pPr marL="343080" indent="-343080" defTabSz="914400">
               <a:lnSpc>
                 <a:spcPct val="100000"/>
               </a:lnSpc>
               <a:spcBef>
-                <a:spcPts val="1134"/>
+                <a:spcPts val="1417"/>
               </a:spcBef>
               <a:buClr>
                 <a:srgbClr val="000000"/>
               </a:buClr>
-              <a:buSzPct val="75000"/>
-              <a:buFont typeface="Symbol" charset="2"/>
-              <a:buChar char=""/>
-            </a:pPr>
-            <a:r>
-              <a:rPr b="0" i="1" lang="en-US" sz="2400" strike="noStrike" u="none">
-                <a:solidFill>
-                  <a:schemeClr val="dk1"/>
-                </a:solidFill>
-                <a:uFillTx/>
-                <a:latin typeface="Calibri"/>
-              </a:rPr>
-              <a:t>“</a:t>
-            </a:r>
-            <a:r>
-              <a:rPr b="0" i="1" lang="en-US" sz="2400" strike="noStrike" u="none">
-                <a:solidFill>
-                  <a:schemeClr val="dk1"/>
-                </a:solidFill>
-                <a:uFillTx/>
-                <a:latin typeface="Calibri"/>
-              </a:rPr>
-              <a:t>Academic Interests” were too broad, e.g. Economics being classed under social science</a:t>
-            </a:r>
-            <a:endParaRPr b="0" lang="en-US" sz="2400" strike="noStrike" u="none">
+              <a:buFont typeface="Arial"/>
+              <a:buChar char="•"/>
+            </a:pPr>
+            <a:r>
+              <a:rPr b="1" lang="en-US" sz="2000" strike="noStrike" u="none">
+                <a:solidFill>
+                  <a:schemeClr val="dk1"/>
+                </a:solidFill>
+                <a:uFillTx/>
+                <a:latin typeface="Calibri"/>
+                <a:ea typeface="DejaVu Sans"/>
+              </a:rPr>
+              <a:t>Everything else </a:t>
+            </a:r>
+            <a:r>
+              <a:rPr b="0" lang="en-US" sz="2000" strike="noStrike" u="none">
+                <a:solidFill>
+                  <a:schemeClr val="dk1"/>
+                </a:solidFill>
+                <a:uFillTx/>
+                <a:latin typeface="Calibri"/>
+                <a:ea typeface="DejaVu Sans"/>
+              </a:rPr>
+              <a:t>= </a:t>
+            </a:r>
+            <a:r>
+              <a:rPr b="1" lang="en-US" sz="2000" strike="noStrike" u="none">
+                <a:solidFill>
+                  <a:schemeClr val="dk1"/>
+                </a:solidFill>
+                <a:uFillTx/>
+                <a:latin typeface="Calibri"/>
+                <a:ea typeface="DejaVu Sans"/>
+              </a:rPr>
+              <a:t>significant </a:t>
+            </a:r>
+            <a:r>
+              <a:rPr b="0" lang="en-US" sz="2000" strike="noStrike" u="none">
+                <a:solidFill>
+                  <a:schemeClr val="dk1"/>
+                </a:solidFill>
+                <a:uFillTx/>
+                <a:latin typeface="Calibri"/>
+                <a:ea typeface="DejaVu Sans"/>
+              </a:rPr>
+              <a:t>improvements of actual compared to baseline</a:t>
+            </a:r>
+            <a:endParaRPr b="0" lang="en-US" sz="2000" strike="noStrike" u="none">
               <a:solidFill>
                 <a:srgbClr val="000000"/>
               </a:solidFill>
@@ -5087,51 +5565,7 @@
       </p:sp>
       <p:sp>
         <p:nvSpPr>
-          <p:cNvPr id="87" name="PlaceHolder 3"/>
-          <p:cNvSpPr>
-            <a:spLocks noGrp="1"/>
-          </p:cNvSpPr>
-          <p:nvPr>
-            <p:ph/>
-          </p:nvPr>
-        </p:nvSpPr>
-        <p:spPr>
-          <a:xfrm>
-            <a:off x="828720" y="914400"/>
-            <a:ext cx="7499880" cy="275040"/>
-          </a:xfrm>
-          <a:prstGeom prst="rect">
-            <a:avLst/>
-          </a:prstGeom>
-          <a:noFill/>
-          <a:ln w="0">
-            <a:noFill/>
-          </a:ln>
-        </p:spPr>
-        <p:txBody>
-          <a:bodyPr lIns="0" rIns="0" tIns="0" bIns="0" anchor="t">
-            <a:noAutofit/>
-          </a:bodyPr>
-          <a:p>
-            <a:pPr indent="0">
-              <a:spcBef>
-                <a:spcPts val="1417"/>
-              </a:spcBef>
-              <a:buNone/>
-            </a:pPr>
-            <a:endParaRPr b="0" lang="en-US" sz="1800" strike="noStrike" u="none">
-              <a:solidFill>
-                <a:srgbClr val="000000"/>
-              </a:solidFill>
-              <a:uFillTx/>
-              <a:latin typeface="Arial"/>
-            </a:endParaRPr>
-          </a:p>
-        </p:txBody>
-      </p:sp>
-      <p:sp>
-        <p:nvSpPr>
-          <p:cNvPr id="5" name="PlaceHolder 4"/>
+          <p:cNvPr id="3" name="PlaceHolder 2"/>
           <p:cNvSpPr>
             <a:spLocks noGrp="1"/>
           </p:cNvSpPr>
@@ -5143,7 +5577,7 @@
         <p:txBody>
           <a:bodyPr/>
           <a:p>
-            <a:fld id="{F25B3CDD-221A-4924-8F86-4DA702DA188C}" type="slidenum">
+            <a:fld id="{7C16E444-EEB4-420A-BC6F-13161447633F}" type="slidenum">
               <a:t>15</a:t>
             </a:fld>
           </a:p>
@@ -5181,7 +5615,7 @@
       </p:grpSpPr>
       <p:sp>
         <p:nvSpPr>
-          <p:cNvPr id="88" name="PlaceHolder 1"/>
+          <p:cNvPr id="93" name="PlaceHolder 1"/>
           <p:cNvSpPr>
             <a:spLocks noGrp="1"/>
           </p:cNvSpPr>
@@ -5191,8 +5625,8 @@
         </p:nvSpPr>
         <p:spPr>
           <a:xfrm>
-            <a:off x="828720" y="3131640"/>
-            <a:ext cx="7499880" cy="646200"/>
+            <a:off x="828720" y="360000"/>
+            <a:ext cx="7499880" cy="560520"/>
           </a:xfrm>
           <a:prstGeom prst="rect">
             <a:avLst/>
@@ -5207,7 +5641,7 @@
             <a:noAutofit/>
           </a:bodyPr>
           <a:p>
-            <a:pPr indent="0" algn="ctr" defTabSz="914400">
+            <a:pPr indent="0" defTabSz="914400">
               <a:lnSpc>
                 <a:spcPct val="100000"/>
               </a:lnSpc>
@@ -5217,22 +5651,364 @@
               </a:tabLst>
             </a:pPr>
             <a:r>
-              <a:rPr b="1" lang="en-GB" sz="5400" strike="noStrike" u="none">
-                <a:solidFill>
-                  <a:schemeClr val="lt1"/>
-                </a:solidFill>
-                <a:uFillTx/>
-                <a:latin typeface="Calibri"/>
-              </a:rPr>
-              <a:t>Questions ?</a:t>
-            </a:r>
-            <a:endParaRPr b="0" lang="en-US" sz="5400" strike="noStrike" u="none">
-              <a:solidFill>
-                <a:srgbClr val="000000"/>
-              </a:solidFill>
-              <a:uFillTx/>
-              <a:latin typeface="Arial"/>
-            </a:endParaRPr>
+              <a:rPr b="1" lang="en-GB" sz="2800" strike="noStrike" u="none">
+                <a:solidFill>
+                  <a:schemeClr val="dk1"/>
+                </a:solidFill>
+                <a:uFillTx/>
+                <a:latin typeface="Calibri"/>
+              </a:rPr>
+              <a:t>Conclusions</a:t>
+            </a:r>
+            <a:endParaRPr b="0" lang="en-US" sz="2800" strike="noStrike" u="none">
+              <a:solidFill>
+                <a:srgbClr val="000000"/>
+              </a:solidFill>
+              <a:uFillTx/>
+              <a:latin typeface="Arial"/>
+            </a:endParaRPr>
+          </a:p>
+        </p:txBody>
+      </p:sp>
+      <p:sp>
+        <p:nvSpPr>
+          <p:cNvPr id="94" name="PlaceHolder 2"/>
+          <p:cNvSpPr>
+            <a:spLocks noGrp="1"/>
+          </p:cNvSpPr>
+          <p:nvPr>
+            <p:ph/>
+          </p:nvPr>
+        </p:nvSpPr>
+        <p:spPr>
+          <a:xfrm>
+            <a:off x="828720" y="1881000"/>
+            <a:ext cx="7499880" cy="4039200"/>
+          </a:xfrm>
+          <a:prstGeom prst="rect">
+            <a:avLst/>
+          </a:prstGeom>
+          <a:noFill/>
+          <a:ln w="0">
+            <a:noFill/>
+          </a:ln>
+        </p:spPr>
+        <p:txBody>
+          <a:bodyPr lIns="0" rIns="0" tIns="0" bIns="0" anchor="t">
+            <a:noAutofit/>
+          </a:bodyPr>
+          <a:p>
+            <a:pPr marL="343080" indent="-343080" defTabSz="914400">
+              <a:lnSpc>
+                <a:spcPct val="100000"/>
+              </a:lnSpc>
+              <a:spcBef>
+                <a:spcPts val="1417"/>
+              </a:spcBef>
+              <a:buClr>
+                <a:srgbClr val="000000"/>
+              </a:buClr>
+              <a:buFont typeface="Arial"/>
+              <a:buChar char="•"/>
+            </a:pPr>
+            <a:r>
+              <a:rPr b="0" lang="en-US" sz="2400" strike="noStrike" u="none">
+                <a:solidFill>
+                  <a:schemeClr val="dk1"/>
+                </a:solidFill>
+                <a:uFillTx/>
+                <a:latin typeface="Calibri"/>
+              </a:rPr>
+              <a:t>Research question: </a:t>
+            </a:r>
+            <a:r>
+              <a:rPr b="0" i="1" lang="en-US" sz="2400" strike="noStrike" u="none">
+                <a:solidFill>
+                  <a:schemeClr val="dk1"/>
+                </a:solidFill>
+                <a:uFillTx/>
+                <a:latin typeface="Calibri"/>
+              </a:rPr>
+              <a:t>“How can a Recommender System assist an Irish student in their college course decision-making process”</a:t>
+            </a:r>
+            <a:endParaRPr b="0" lang="en-US" sz="2400" strike="noStrike" u="none">
+              <a:solidFill>
+                <a:srgbClr val="000000"/>
+              </a:solidFill>
+              <a:uFillTx/>
+              <a:latin typeface="Arial"/>
+            </a:endParaRPr>
+          </a:p>
+          <a:p>
+            <a:pPr lvl="1" marL="864000" indent="-324000" defTabSz="914400">
+              <a:lnSpc>
+                <a:spcPct val="100000"/>
+              </a:lnSpc>
+              <a:spcBef>
+                <a:spcPts val="1134"/>
+              </a:spcBef>
+              <a:buClr>
+                <a:srgbClr val="000000"/>
+              </a:buClr>
+              <a:buSzPct val="75000"/>
+              <a:buFont typeface="Symbol" charset="2"/>
+              <a:buChar char=""/>
+            </a:pPr>
+            <a:r>
+              <a:rPr b="0" i="1" lang="en-US" sz="2400" strike="noStrike" u="none">
+                <a:solidFill>
+                  <a:schemeClr val="dk1"/>
+                </a:solidFill>
+                <a:uFillTx/>
+                <a:latin typeface="Calibri"/>
+              </a:rPr>
+              <a:t>By recommending college courses that:</a:t>
+            </a:r>
+            <a:endParaRPr b="0" lang="en-US" sz="2400" strike="noStrike" u="none">
+              <a:solidFill>
+                <a:srgbClr val="000000"/>
+              </a:solidFill>
+              <a:uFillTx/>
+              <a:latin typeface="Arial"/>
+            </a:endParaRPr>
+          </a:p>
+          <a:p>
+            <a:pPr lvl="2" marL="1296000" indent="-288000" defTabSz="914400">
+              <a:lnSpc>
+                <a:spcPct val="100000"/>
+              </a:lnSpc>
+              <a:spcBef>
+                <a:spcPts val="850"/>
+              </a:spcBef>
+              <a:buClr>
+                <a:srgbClr val="000000"/>
+              </a:buClr>
+              <a:buSzPct val="45000"/>
+              <a:buFont typeface="Wingdings" charset="2"/>
+              <a:buChar char=""/>
+            </a:pPr>
+            <a:r>
+              <a:rPr b="0" i="1" lang="en-US" sz="2400" strike="noStrike" u="none">
+                <a:solidFill>
+                  <a:schemeClr val="dk1"/>
+                </a:solidFill>
+                <a:uFillTx/>
+                <a:latin typeface="Calibri"/>
+              </a:rPr>
+              <a:t>Are relevant to their preferences</a:t>
+            </a:r>
+            <a:endParaRPr b="0" lang="en-US" sz="2400" strike="noStrike" u="none">
+              <a:solidFill>
+                <a:srgbClr val="000000"/>
+              </a:solidFill>
+              <a:uFillTx/>
+              <a:latin typeface="Arial"/>
+            </a:endParaRPr>
+          </a:p>
+          <a:p>
+            <a:pPr lvl="2" marL="1296000" indent="-288000" defTabSz="914400">
+              <a:lnSpc>
+                <a:spcPct val="100000"/>
+              </a:lnSpc>
+              <a:spcBef>
+                <a:spcPts val="850"/>
+              </a:spcBef>
+              <a:buClr>
+                <a:srgbClr val="000000"/>
+              </a:buClr>
+              <a:buSzPct val="45000"/>
+              <a:buFont typeface="Wingdings" charset="2"/>
+              <a:buChar char=""/>
+            </a:pPr>
+            <a:r>
+              <a:rPr b="1" i="1" lang="en-US" sz="2400" strike="noStrike" u="none">
+                <a:solidFill>
+                  <a:schemeClr val="dk1"/>
+                </a:solidFill>
+                <a:uFillTx/>
+                <a:latin typeface="Calibri"/>
+              </a:rPr>
+              <a:t>They would not have seen otherwise</a:t>
+            </a:r>
+            <a:endParaRPr b="0" lang="en-US" sz="2400" strike="noStrike" u="none">
+              <a:solidFill>
+                <a:srgbClr val="000000"/>
+              </a:solidFill>
+              <a:uFillTx/>
+              <a:latin typeface="Arial"/>
+            </a:endParaRPr>
+          </a:p>
+          <a:p>
+            <a:pPr marL="343080" indent="-343080" defTabSz="914400">
+              <a:lnSpc>
+                <a:spcPct val="100000"/>
+              </a:lnSpc>
+              <a:spcBef>
+                <a:spcPts val="1417"/>
+              </a:spcBef>
+              <a:buClr>
+                <a:srgbClr val="000000"/>
+              </a:buClr>
+              <a:buFont typeface="Arial"/>
+              <a:buChar char="•"/>
+            </a:pPr>
+            <a:r>
+              <a:rPr b="1" i="1" lang="en-US" sz="2400" strike="noStrike" u="none">
+                <a:solidFill>
+                  <a:schemeClr val="dk1"/>
+                </a:solidFill>
+                <a:uFillTx/>
+                <a:latin typeface="Calibri"/>
+              </a:rPr>
+              <a:t>Future work: </a:t>
+            </a:r>
+            <a:endParaRPr b="0" lang="en-US" sz="2400" strike="noStrike" u="none">
+              <a:solidFill>
+                <a:srgbClr val="000000"/>
+              </a:solidFill>
+              <a:uFillTx/>
+              <a:latin typeface="Arial"/>
+            </a:endParaRPr>
+          </a:p>
+          <a:p>
+            <a:pPr lvl="1" marL="864000" indent="-324000" defTabSz="914400">
+              <a:lnSpc>
+                <a:spcPct val="100000"/>
+              </a:lnSpc>
+              <a:spcBef>
+                <a:spcPts val="1134"/>
+              </a:spcBef>
+              <a:buClr>
+                <a:srgbClr val="000000"/>
+              </a:buClr>
+              <a:buSzPct val="75000"/>
+              <a:buFont typeface="Symbol" charset="2"/>
+              <a:buChar char=""/>
+            </a:pPr>
+            <a:r>
+              <a:rPr b="0" i="1" lang="en-US" sz="2400" strike="noStrike" u="none">
+                <a:solidFill>
+                  <a:schemeClr val="dk1"/>
+                </a:solidFill>
+                <a:uFillTx/>
+                <a:latin typeface="Calibri"/>
+              </a:rPr>
+              <a:t>“</a:t>
+            </a:r>
+            <a:r>
+              <a:rPr b="0" i="1" lang="en-US" sz="2400" strike="noStrike" u="none">
+                <a:solidFill>
+                  <a:schemeClr val="dk1"/>
+                </a:solidFill>
+                <a:uFillTx/>
+                <a:latin typeface="Calibri"/>
+              </a:rPr>
+              <a:t>Academic Interests” were too broad, e.g. Economics being classed under social science</a:t>
+            </a:r>
+            <a:endParaRPr b="0" lang="en-US" sz="2400" strike="noStrike" u="none">
+              <a:solidFill>
+                <a:srgbClr val="000000"/>
+              </a:solidFill>
+              <a:uFillTx/>
+              <a:latin typeface="Arial"/>
+            </a:endParaRPr>
+          </a:p>
+          <a:p>
+            <a:pPr lvl="1" marL="864000" indent="-324000" defTabSz="914400">
+              <a:lnSpc>
+                <a:spcPct val="100000"/>
+              </a:lnSpc>
+              <a:spcBef>
+                <a:spcPts val="1134"/>
+              </a:spcBef>
+              <a:buClr>
+                <a:srgbClr val="000000"/>
+              </a:buClr>
+              <a:buSzPct val="75000"/>
+              <a:buFont typeface="Symbol" charset="2"/>
+              <a:buChar char=""/>
+            </a:pPr>
+            <a:r>
+              <a:rPr b="0" i="1" lang="en-US" sz="2400" strike="noStrike" u="none">
+                <a:solidFill>
+                  <a:schemeClr val="dk1"/>
+                </a:solidFill>
+                <a:uFillTx/>
+                <a:latin typeface="Calibri"/>
+              </a:rPr>
+              <a:t>Subject &amp; Grade requirements</a:t>
+            </a:r>
+            <a:endParaRPr b="0" lang="en-US" sz="2400" strike="noStrike" u="none">
+              <a:solidFill>
+                <a:srgbClr val="000000"/>
+              </a:solidFill>
+              <a:uFillTx/>
+              <a:latin typeface="Arial"/>
+            </a:endParaRPr>
+          </a:p>
+        </p:txBody>
+      </p:sp>
+      <p:sp>
+        <p:nvSpPr>
+          <p:cNvPr id="95" name="PlaceHolder 3"/>
+          <p:cNvSpPr>
+            <a:spLocks noGrp="1"/>
+          </p:cNvSpPr>
+          <p:nvPr>
+            <p:ph/>
+          </p:nvPr>
+        </p:nvSpPr>
+        <p:spPr>
+          <a:xfrm>
+            <a:off x="828720" y="914400"/>
+            <a:ext cx="7499880" cy="275040"/>
+          </a:xfrm>
+          <a:prstGeom prst="rect">
+            <a:avLst/>
+          </a:prstGeom>
+          <a:noFill/>
+          <a:ln w="0">
+            <a:noFill/>
+          </a:ln>
+        </p:spPr>
+        <p:txBody>
+          <a:bodyPr lIns="0" rIns="0" tIns="0" bIns="0" anchor="t">
+            <a:noAutofit/>
+          </a:bodyPr>
+          <a:p>
+            <a:pPr indent="0">
+              <a:spcBef>
+                <a:spcPts val="1417"/>
+              </a:spcBef>
+              <a:buNone/>
+            </a:pPr>
+            <a:endParaRPr b="0" lang="en-US" sz="1800" strike="noStrike" u="none">
+              <a:solidFill>
+                <a:srgbClr val="000000"/>
+              </a:solidFill>
+              <a:uFillTx/>
+              <a:latin typeface="Arial"/>
+            </a:endParaRPr>
+          </a:p>
+        </p:txBody>
+      </p:sp>
+      <p:sp>
+        <p:nvSpPr>
+          <p:cNvPr id="5" name="PlaceHolder 4"/>
+          <p:cNvSpPr>
+            <a:spLocks noGrp="1"/>
+          </p:cNvSpPr>
+          <p:nvPr>
+            <p:ph type="sldNum" idx="1"/>
+          </p:nvPr>
+        </p:nvSpPr>
+        <p:spPr/>
+        <p:txBody>
+          <a:bodyPr/>
+          <a:p>
+            <a:fld id="{150C28BB-FCB2-42B2-8BBA-370FDF95CDDF}" type="slidenum">
+              <a:t>16</a:t>
+            </a:fld>
           </a:p>
         </p:txBody>
       </p:sp>
@@ -5268,7 +6044,7 @@
       </p:grpSpPr>
       <p:sp>
         <p:nvSpPr>
-          <p:cNvPr id="89" name="PlaceHolder 1"/>
+          <p:cNvPr id="96" name="PlaceHolder 1"/>
           <p:cNvSpPr>
             <a:spLocks noGrp="1"/>
           </p:cNvSpPr>
@@ -5278,8 +6054,8 @@
         </p:nvSpPr>
         <p:spPr>
           <a:xfrm>
-            <a:off x="828720" y="3715200"/>
-            <a:ext cx="7499880" cy="553680"/>
+            <a:off x="828720" y="3131640"/>
+            <a:ext cx="7499880" cy="646200"/>
           </a:xfrm>
           <a:prstGeom prst="rect">
             <a:avLst/>
@@ -5294,7 +6070,7 @@
             <a:noAutofit/>
           </a:bodyPr>
           <a:p>
-            <a:pPr indent="0" defTabSz="914400">
+            <a:pPr indent="0" algn="ctr" defTabSz="914400">
               <a:lnSpc>
                 <a:spcPct val="100000"/>
               </a:lnSpc>
@@ -5304,16 +6080,16 @@
               </a:tabLst>
             </a:pPr>
             <a:r>
-              <a:rPr b="1" lang="en-GB" sz="4200" strike="noStrike" u="none">
+              <a:rPr b="1" lang="en-GB" sz="5400" strike="noStrike" u="none">
                 <a:solidFill>
                   <a:schemeClr val="lt1"/>
                 </a:solidFill>
                 <a:uFillTx/>
                 <a:latin typeface="Calibri"/>
               </a:rPr>
-              <a:t>Thank You</a:t>
-            </a:r>
-            <a:endParaRPr b="0" lang="en-US" sz="4200" strike="noStrike" u="none">
+              <a:t>Questions ?</a:t>
+            </a:r>
+            <a:endParaRPr b="0" lang="en-US" sz="5400" strike="noStrike" u="none">
               <a:solidFill>
                 <a:srgbClr val="000000"/>
               </a:solidFill>
@@ -5355,7 +6131,7 @@
       </p:grpSpPr>
       <p:sp>
         <p:nvSpPr>
-          <p:cNvPr id="90" name="PlaceHolder 1"/>
+          <p:cNvPr id="97" name="PlaceHolder 1"/>
           <p:cNvSpPr>
             <a:spLocks noGrp="1"/>
           </p:cNvSpPr>
@@ -5365,8 +6141,8 @@
         </p:nvSpPr>
         <p:spPr>
           <a:xfrm>
-            <a:off x="828720" y="360000"/>
-            <a:ext cx="7499880" cy="560520"/>
+            <a:off x="828720" y="3715200"/>
+            <a:ext cx="7499880" cy="553680"/>
           </a:xfrm>
           <a:prstGeom prst="rect">
             <a:avLst/>
@@ -5391,339 +6167,22 @@
               </a:tabLst>
             </a:pPr>
             <a:r>
-              <a:rPr b="1" lang="en-GB" sz="2800" strike="noStrike" u="none">
-                <a:solidFill>
-                  <a:schemeClr val="dk1"/>
-                </a:solidFill>
-                <a:uFillTx/>
-                <a:latin typeface="Calibri"/>
-              </a:rPr>
-              <a:t>Bibliography</a:t>
-            </a:r>
-            <a:endParaRPr b="0" lang="en-US" sz="2800" strike="noStrike" u="none">
-              <a:solidFill>
-                <a:srgbClr val="000000"/>
-              </a:solidFill>
-              <a:uFillTx/>
-              <a:latin typeface="Arial"/>
-            </a:endParaRPr>
-          </a:p>
-        </p:txBody>
-      </p:sp>
-      <p:sp>
-        <p:nvSpPr>
-          <p:cNvPr id="91" name="PlaceHolder 2"/>
-          <p:cNvSpPr>
-            <a:spLocks noGrp="1"/>
-          </p:cNvSpPr>
-          <p:nvPr>
-            <p:ph/>
-          </p:nvPr>
-        </p:nvSpPr>
-        <p:spPr>
-          <a:xfrm>
-            <a:off x="828720" y="1881000"/>
-            <a:ext cx="7499880" cy="4039200"/>
-          </a:xfrm>
-          <a:prstGeom prst="rect">
-            <a:avLst/>
-          </a:prstGeom>
-          <a:noFill/>
-          <a:ln w="0">
-            <a:noFill/>
-          </a:ln>
-        </p:spPr>
-        <p:txBody>
-          <a:bodyPr lIns="0" rIns="0" tIns="0" bIns="0" anchor="t">
-            <a:noAutofit/>
-          </a:bodyPr>
-          <a:p>
-            <a:pPr marL="432000" indent="-324000">
-              <a:spcBef>
-                <a:spcPts val="1191"/>
-              </a:spcBef>
-              <a:spcAft>
-                <a:spcPts val="992"/>
-              </a:spcAft>
-              <a:buClr>
-                <a:srgbClr val="000000"/>
-              </a:buClr>
-              <a:buFont typeface="OpenSymbol"/>
-              <a:buAutoNum type="arabicParenR"/>
-            </a:pPr>
-            <a:r>
-              <a:rPr b="0" lang="en-US" sz="1000" strike="noStrike" u="none">
-                <a:solidFill>
-                  <a:srgbClr val="000000"/>
-                </a:solidFill>
-                <a:uFillTx/>
-                <a:latin typeface="Arial"/>
-              </a:rPr>
-              <a:t>Higher Education Authority (2024). Key facts and figures for ireland’s publicly-funded higher education institutions. https://hea.ie/statistics/ data-for-download-and-visualisations/key-facts-figures-report/. Accessed: 2026-03-11.</a:t>
-            </a:r>
-            <a:endParaRPr b="0" lang="en-US" sz="1000" strike="noStrike" u="none">
-              <a:solidFill>
-                <a:srgbClr val="000000"/>
-              </a:solidFill>
-              <a:uFillTx/>
-              <a:latin typeface="Arial"/>
-            </a:endParaRPr>
-          </a:p>
-          <a:p>
-            <a:pPr marL="432000" indent="-324000">
-              <a:spcBef>
-                <a:spcPts val="1191"/>
-              </a:spcBef>
-              <a:spcAft>
-                <a:spcPts val="992"/>
-              </a:spcAft>
-              <a:buClr>
-                <a:srgbClr val="000000"/>
-              </a:buClr>
-              <a:buFont typeface="OpenSymbol"/>
-              <a:buAutoNum type="arabicParenR"/>
-            </a:pPr>
-            <a:r>
-              <a:rPr b="0" lang="en-US" sz="1000" strike="noStrike" u="none">
-                <a:solidFill>
-                  <a:srgbClr val="000000"/>
-                </a:solidFill>
-                <a:uFillTx/>
-                <a:latin typeface="Arial"/>
-              </a:rPr>
-              <a:t>Higher Education Authority (2018). Graduate outcomes: Honours degree graduates. https://hea.ie/statistics/graduate-outcomes-data-and-reports/ graduate-outcomes-2018/honours-degree-graduates/. Accessed: 2026-03-11.</a:t>
-            </a:r>
-            <a:endParaRPr b="0" lang="en-US" sz="1000" strike="noStrike" u="none">
-              <a:solidFill>
-                <a:srgbClr val="000000"/>
-              </a:solidFill>
-              <a:uFillTx/>
-              <a:latin typeface="Arial"/>
-            </a:endParaRPr>
-          </a:p>
-          <a:p>
-            <a:pPr marL="432000" indent="-324000">
-              <a:spcBef>
-                <a:spcPts val="1191"/>
-              </a:spcBef>
-              <a:spcAft>
-                <a:spcPts val="992"/>
-              </a:spcAft>
-              <a:buClr>
-                <a:srgbClr val="000000"/>
-              </a:buClr>
-              <a:buFont typeface="OpenSymbol"/>
-              <a:buAutoNum type="arabicParenR"/>
-            </a:pPr>
-            <a:r>
-              <a:rPr b="0" lang="en-US" sz="1000" strike="noStrike" u="none">
-                <a:solidFill>
-                  <a:srgbClr val="000000"/>
-                </a:solidFill>
-                <a:uFillTx/>
-                <a:latin typeface="Arial"/>
-              </a:rPr>
-              <a:t>Holland, J. L. (1959). A theory of vocational choice. Journal of counseling psychology, 6(1):35.</a:t>
-            </a:r>
-            <a:endParaRPr b="0" lang="en-US" sz="1000" strike="noStrike" u="none">
-              <a:solidFill>
-                <a:srgbClr val="000000"/>
-              </a:solidFill>
-              <a:uFillTx/>
-              <a:latin typeface="Arial"/>
-            </a:endParaRPr>
-          </a:p>
-          <a:p>
-            <a:pPr marL="432000" indent="-324000">
-              <a:spcBef>
-                <a:spcPts val="1191"/>
-              </a:spcBef>
-              <a:spcAft>
-                <a:spcPts val="992"/>
-              </a:spcAft>
-              <a:buClr>
-                <a:srgbClr val="000000"/>
-              </a:buClr>
-              <a:buFont typeface="OpenSymbol"/>
-              <a:buAutoNum type="arabicParenR"/>
-            </a:pPr>
-            <a:r>
-              <a:rPr b="0" lang="en-US" sz="1000" strike="noStrike" u="none">
-                <a:solidFill>
-                  <a:srgbClr val="000000"/>
-                </a:solidFill>
-                <a:uFillTx/>
-                <a:latin typeface="Arial"/>
-              </a:rPr>
-              <a:t>Spokane, A. R. and Cruza-Guet, M. C. (2005). Holland’s theory of vocational personalities in work environments. Career development and counseling: Putting theory and research to work, 24.</a:t>
-            </a:r>
-            <a:endParaRPr b="0" lang="en-US" sz="1000" strike="noStrike" u="none">
-              <a:solidFill>
-                <a:srgbClr val="000000"/>
-              </a:solidFill>
-              <a:uFillTx/>
-              <a:latin typeface="Arial"/>
-            </a:endParaRPr>
-          </a:p>
-          <a:p>
-            <a:pPr marL="432000" indent="-324000">
-              <a:spcBef>
-                <a:spcPts val="1191"/>
-              </a:spcBef>
-              <a:spcAft>
-                <a:spcPts val="992"/>
-              </a:spcAft>
-              <a:buClr>
-                <a:srgbClr val="000000"/>
-              </a:buClr>
-              <a:buFont typeface="OpenSymbol"/>
-              <a:buAutoNum type="arabicParenR"/>
-            </a:pPr>
-            <a:r>
-              <a:rPr b="0" lang="en-US" sz="1000" strike="noStrike" u="none">
-                <a:solidFill>
-                  <a:srgbClr val="000000"/>
-                </a:solidFill>
-                <a:uFillTx/>
-                <a:latin typeface="Arial"/>
-              </a:rPr>
-              <a:t>Matthews, K. N., Edmondson, D. R., and Matthews, L. (2024). Why students select their college major: An investigative study. Atlantic Marketing Journal, 13(1):11.</a:t>
-            </a:r>
-            <a:endParaRPr b="0" lang="en-US" sz="1000" strike="noStrike" u="none">
-              <a:solidFill>
-                <a:srgbClr val="000000"/>
-              </a:solidFill>
-              <a:uFillTx/>
-              <a:latin typeface="Arial"/>
-            </a:endParaRPr>
-          </a:p>
-          <a:p>
-            <a:pPr marL="432000" indent="-324000">
-              <a:spcBef>
-                <a:spcPts val="1191"/>
-              </a:spcBef>
-              <a:spcAft>
-                <a:spcPts val="992"/>
-              </a:spcAft>
-              <a:buClr>
-                <a:srgbClr val="000000"/>
-              </a:buClr>
-              <a:buFont typeface="OpenSymbol"/>
-              <a:buAutoNum type="arabicParenR"/>
-            </a:pPr>
-            <a:r>
-              <a:rPr b="0" lang="en-US" sz="1000" strike="noStrike" u="none">
-                <a:solidFill>
-                  <a:srgbClr val="000000"/>
-                </a:solidFill>
-                <a:uFillTx/>
-                <a:latin typeface="Arial"/>
-              </a:rPr>
-              <a:t>Hoff, K., Wee, C., Song, Q. C., Phan, W. M. J., and Rounds, J. (2018). Meta-analysis of vocational interests and job satisfaction: Challenging a common belief. Academy of Management Proceedings, 2018:12220.</a:t>
-            </a:r>
-            <a:endParaRPr b="0" lang="en-US" sz="1000" strike="noStrike" u="none">
-              <a:solidFill>
-                <a:srgbClr val="000000"/>
-              </a:solidFill>
-              <a:uFillTx/>
-              <a:latin typeface="Arial"/>
-            </a:endParaRPr>
-          </a:p>
-          <a:p>
-            <a:pPr marL="432000" indent="-324000">
-              <a:spcBef>
-                <a:spcPts val="1191"/>
-              </a:spcBef>
-              <a:spcAft>
-                <a:spcPts val="992"/>
-              </a:spcAft>
-              <a:buClr>
-                <a:srgbClr val="000000"/>
-              </a:buClr>
-              <a:buFont typeface="OpenSymbol"/>
-              <a:buAutoNum type="arabicParenR"/>
-            </a:pPr>
-            <a:r>
-              <a:rPr b="0" lang="en-US" sz="1000" strike="noStrike" u="none">
-                <a:solidFill>
-                  <a:srgbClr val="000000"/>
-                </a:solidFill>
-                <a:uFillTx/>
-                <a:latin typeface="Arial"/>
-              </a:rPr>
-              <a:t>Judge, T. A., Piccolo, R. F., Podsakoff, N. P., Shaw, J. C., and Rich, B. L. (2010). The relationship between pay and job satisfaction: A meta-analysis of the literature. Journal of vocational behavior, 77(2):157–167.</a:t>
-            </a:r>
-            <a:endParaRPr b="0" lang="en-US" sz="1000" strike="noStrike" u="none">
-              <a:solidFill>
-                <a:srgbClr val="000000"/>
-              </a:solidFill>
-              <a:uFillTx/>
-              <a:latin typeface="Arial"/>
-            </a:endParaRPr>
-          </a:p>
-        </p:txBody>
-      </p:sp>
-      <p:sp>
-        <p:nvSpPr>
-          <p:cNvPr id="92" name="PlaceHolder 3"/>
-          <p:cNvSpPr>
-            <a:spLocks noGrp="1"/>
-          </p:cNvSpPr>
-          <p:nvPr>
-            <p:ph/>
-          </p:nvPr>
-        </p:nvSpPr>
-        <p:spPr>
-          <a:xfrm>
-            <a:off x="828720" y="914400"/>
-            <a:ext cx="7499880" cy="275040"/>
-          </a:xfrm>
-          <a:prstGeom prst="rect">
-            <a:avLst/>
-          </a:prstGeom>
-          <a:noFill/>
-          <a:ln w="0">
-            <a:noFill/>
-          </a:ln>
-        </p:spPr>
-        <p:txBody>
-          <a:bodyPr lIns="0" rIns="0" tIns="0" bIns="0" anchor="t">
-            <a:noAutofit/>
-          </a:bodyPr>
-          <a:p>
-            <a:pPr indent="0">
-              <a:spcBef>
-                <a:spcPts val="1417"/>
-              </a:spcBef>
-              <a:buNone/>
-            </a:pPr>
-            <a:endParaRPr b="0" lang="en-US" sz="1800" strike="noStrike" u="none">
-              <a:solidFill>
-                <a:srgbClr val="000000"/>
-              </a:solidFill>
-              <a:uFillTx/>
-              <a:latin typeface="Arial"/>
-            </a:endParaRPr>
-          </a:p>
-        </p:txBody>
-      </p:sp>
-      <p:sp>
-        <p:nvSpPr>
-          <p:cNvPr id="5" name="PlaceHolder 4"/>
-          <p:cNvSpPr>
-            <a:spLocks noGrp="1"/>
-          </p:cNvSpPr>
-          <p:nvPr>
-            <p:ph type="sldNum" idx="2"/>
-          </p:nvPr>
-        </p:nvSpPr>
-        <p:spPr/>
-        <p:txBody>
-          <a:bodyPr/>
-          <a:p>
-            <a:fld id="{1ECDF146-9F67-4D41-B49F-2F2D85D0684C}" type="slidenum">
-              <a:t>18</a:t>
-            </a:fld>
+              <a:rPr b="1" lang="en-GB" sz="4200" strike="noStrike" u="none">
+                <a:solidFill>
+                  <a:schemeClr val="lt1"/>
+                </a:solidFill>
+                <a:uFillTx/>
+                <a:latin typeface="Calibri"/>
+              </a:rPr>
+              <a:t>Thank You</a:t>
+            </a:r>
+            <a:endParaRPr b="0" lang="en-US" sz="4200" strike="noStrike" u="none">
+              <a:solidFill>
+                <a:srgbClr val="000000"/>
+              </a:solidFill>
+              <a:uFillTx/>
+              <a:latin typeface="Arial"/>
+            </a:endParaRPr>
           </a:p>
         </p:txBody>
       </p:sp>
@@ -5741,424 +6200,6 @@
 </file>
 
 <file path=ppt/slides/slide2.xml><?xml version="1.0" encoding="utf-8"?>
-<p:sld xmlns:a="http://schemas.openxmlformats.org/drawingml/2006/main" xmlns:p="http://schemas.openxmlformats.org/presentationml/2006/main" xmlns:r="http://schemas.openxmlformats.org/officeDocument/2006/relationships" xmlns:p14="http://schemas.microsoft.com/office/powerpoint/2010/main" xmlns:p15="http://schemas.microsoft.com/office/powerpoint/2012/main" xmlns:mc="http://schemas.openxmlformats.org/markup-compatibility/2006">
-  <p:cSld>
-    <p:spTree>
-      <p:nvGrpSpPr>
-        <p:cNvPr id="1" name=""/>
-        <p:cNvGrpSpPr/>
-        <p:nvPr/>
-      </p:nvGrpSpPr>
-      <p:grpSpPr>
-        <a:xfrm>
-          <a:off x="0" y="0"/>
-          <a:ext cx="0" cy="0"/>
-          <a:chOff x="0" y="0"/>
-          <a:chExt cx="0" cy="0"/>
-        </a:xfrm>
-      </p:grpSpPr>
-      <p:sp>
-        <p:nvSpPr>
-          <p:cNvPr id="35" name="PlaceHolder 1"/>
-          <p:cNvSpPr>
-            <a:spLocks noGrp="1"/>
-          </p:cNvSpPr>
-          <p:nvPr>
-            <p:ph type="title"/>
-          </p:nvPr>
-        </p:nvSpPr>
-        <p:spPr>
-          <a:xfrm>
-            <a:off x="828720" y="360000"/>
-            <a:ext cx="7499880" cy="560520"/>
-          </a:xfrm>
-          <a:prstGeom prst="rect">
-            <a:avLst/>
-          </a:prstGeom>
-          <a:noFill/>
-          <a:ln w="0">
-            <a:noFill/>
-          </a:ln>
-        </p:spPr>
-        <p:txBody>
-          <a:bodyPr lIns="0" rIns="0" tIns="0" bIns="0" anchor="b">
-            <a:noAutofit/>
-          </a:bodyPr>
-          <a:p>
-            <a:pPr indent="0" defTabSz="914400">
-              <a:lnSpc>
-                <a:spcPct val="100000"/>
-              </a:lnSpc>
-              <a:buNone/>
-              <a:tabLst>
-                <a:tab algn="l" pos="0"/>
-              </a:tabLst>
-            </a:pPr>
-            <a:r>
-              <a:rPr b="1" lang="en-GB" sz="2800" strike="noStrike" u="none">
-                <a:solidFill>
-                  <a:schemeClr val="dk1"/>
-                </a:solidFill>
-                <a:uFillTx/>
-                <a:latin typeface="Calibri"/>
-              </a:rPr>
-              <a:t>Motivation</a:t>
-            </a:r>
-            <a:endParaRPr b="0" lang="en-US" sz="2800" strike="noStrike" u="none">
-              <a:solidFill>
-                <a:srgbClr val="000000"/>
-              </a:solidFill>
-              <a:uFillTx/>
-              <a:latin typeface="Arial"/>
-            </a:endParaRPr>
-          </a:p>
-        </p:txBody>
-      </p:sp>
-      <p:sp>
-        <p:nvSpPr>
-          <p:cNvPr id="36" name="PlaceHolder 2"/>
-          <p:cNvSpPr>
-            <a:spLocks noGrp="1"/>
-          </p:cNvSpPr>
-          <p:nvPr>
-            <p:ph/>
-          </p:nvPr>
-        </p:nvSpPr>
-        <p:spPr>
-          <a:xfrm>
-            <a:off x="828720" y="1881000"/>
-            <a:ext cx="7499880" cy="4039200"/>
-          </a:xfrm>
-          <a:prstGeom prst="rect">
-            <a:avLst/>
-          </a:prstGeom>
-          <a:noFill/>
-          <a:ln w="0">
-            <a:noFill/>
-          </a:ln>
-        </p:spPr>
-        <p:txBody>
-          <a:bodyPr lIns="0" rIns="0" tIns="0" bIns="0" anchor="t">
-            <a:noAutofit/>
-          </a:bodyPr>
-          <a:p>
-            <a:pPr marL="432000" indent="-324000">
-              <a:lnSpc>
-                <a:spcPct val="100000"/>
-              </a:lnSpc>
-              <a:spcBef>
-                <a:spcPts val="1417"/>
-              </a:spcBef>
-              <a:buClr>
-                <a:srgbClr val="000000"/>
-              </a:buClr>
-              <a:buSzPct val="45000"/>
-              <a:buFont typeface="Wingdings" charset="2"/>
-              <a:buChar char=""/>
-            </a:pPr>
-            <a:r>
-              <a:rPr b="0" lang="en-US" sz="2400" strike="noStrike" u="none">
-                <a:solidFill>
-                  <a:schemeClr val="dk1"/>
-                </a:solidFill>
-                <a:uFillTx/>
-                <a:latin typeface="Calibri"/>
-              </a:rPr>
-              <a:t>2024: 79% of Irish students entered college from secondary school</a:t>
-            </a:r>
-            <a:r>
-              <a:rPr b="0" lang="en-US" sz="2400" strike="noStrike" u="none" baseline="33000">
-                <a:solidFill>
-                  <a:schemeClr val="dk1"/>
-                </a:solidFill>
-                <a:uFillTx/>
-                <a:latin typeface="Calibri"/>
-              </a:rPr>
-              <a:t>[1]</a:t>
-            </a:r>
-            <a:endParaRPr b="0" lang="en-US" sz="2400" strike="noStrike" u="none">
-              <a:solidFill>
-                <a:srgbClr val="000000"/>
-              </a:solidFill>
-              <a:uFillTx/>
-              <a:latin typeface="Arial"/>
-            </a:endParaRPr>
-          </a:p>
-          <a:p>
-            <a:pPr marL="432000" indent="-324000">
-              <a:lnSpc>
-                <a:spcPct val="100000"/>
-              </a:lnSpc>
-              <a:spcBef>
-                <a:spcPts val="1417"/>
-              </a:spcBef>
-              <a:buClr>
-                <a:srgbClr val="000000"/>
-              </a:buClr>
-              <a:buSzPct val="45000"/>
-              <a:buFont typeface="Wingdings" charset="2"/>
-              <a:buChar char=""/>
-            </a:pPr>
-            <a:r>
-              <a:rPr b="0" i="1" lang="en-US" sz="2400" strike="noStrike" u="none">
-                <a:solidFill>
-                  <a:schemeClr val="dk1"/>
-                </a:solidFill>
-                <a:uFillTx/>
-                <a:latin typeface="Calibri"/>
-              </a:rPr>
-              <a:t>“</a:t>
-            </a:r>
-            <a:r>
-              <a:rPr b="0" i="1" lang="en-US" sz="2400" strike="noStrike" u="none">
-                <a:solidFill>
-                  <a:schemeClr val="dk1"/>
-                </a:solidFill>
-                <a:uFillTx/>
-                <a:latin typeface="Calibri"/>
-              </a:rPr>
-              <a:t>What college course should I study?”</a:t>
-            </a:r>
-            <a:endParaRPr b="0" lang="en-US" sz="2400" strike="noStrike" u="none">
-              <a:solidFill>
-                <a:srgbClr val="000000"/>
-              </a:solidFill>
-              <a:uFillTx/>
-              <a:latin typeface="Arial"/>
-            </a:endParaRPr>
-          </a:p>
-          <a:p>
-            <a:pPr lvl="1" marL="864000" indent="-324000">
-              <a:lnSpc>
-                <a:spcPct val="100000"/>
-              </a:lnSpc>
-              <a:spcBef>
-                <a:spcPts val="1134"/>
-              </a:spcBef>
-              <a:buClr>
-                <a:srgbClr val="000000"/>
-              </a:buClr>
-              <a:buSzPct val="75000"/>
-              <a:buFont typeface="Symbol" charset="2"/>
-              <a:buChar char=""/>
-            </a:pPr>
-            <a:r>
-              <a:rPr b="0" lang="en-US" sz="2000" strike="noStrike" u="none">
-                <a:solidFill>
-                  <a:schemeClr val="dk1"/>
-                </a:solidFill>
-                <a:uFillTx/>
-                <a:latin typeface="Calibri"/>
-              </a:rPr>
-              <a:t>Difficult to answer</a:t>
-            </a:r>
-            <a:endParaRPr b="0" lang="en-US" sz="2000" strike="noStrike" u="none">
-              <a:solidFill>
-                <a:srgbClr val="000000"/>
-              </a:solidFill>
-              <a:uFillTx/>
-              <a:latin typeface="Arial"/>
-            </a:endParaRPr>
-          </a:p>
-          <a:p>
-            <a:pPr lvl="1" marL="864000" indent="-324000">
-              <a:lnSpc>
-                <a:spcPct val="100000"/>
-              </a:lnSpc>
-              <a:spcBef>
-                <a:spcPts val="1134"/>
-              </a:spcBef>
-              <a:buClr>
-                <a:srgbClr val="000000"/>
-              </a:buClr>
-              <a:buSzPct val="75000"/>
-              <a:buFont typeface="Symbol" charset="2"/>
-              <a:buChar char=""/>
-            </a:pPr>
-            <a:r>
-              <a:rPr b="0" lang="en-US" sz="2000" strike="noStrike" u="none">
-                <a:solidFill>
-                  <a:schemeClr val="dk1"/>
-                </a:solidFill>
-                <a:uFillTx/>
-                <a:latin typeface="Calibri"/>
-              </a:rPr>
-              <a:t>2018: 31% Irish graduates: “not likely” to study their course again</a:t>
-            </a:r>
-            <a:r>
-              <a:rPr b="0" lang="en-US" sz="2000" strike="noStrike" u="none" baseline="33000">
-                <a:solidFill>
-                  <a:schemeClr val="dk1"/>
-                </a:solidFill>
-                <a:uFillTx/>
-                <a:latin typeface="Calibri"/>
-              </a:rPr>
-              <a:t>[2]</a:t>
-            </a:r>
-            <a:endParaRPr b="0" lang="en-US" sz="2000" strike="noStrike" u="none">
-              <a:solidFill>
-                <a:srgbClr val="000000"/>
-              </a:solidFill>
-              <a:uFillTx/>
-              <a:latin typeface="Arial"/>
-            </a:endParaRPr>
-          </a:p>
-          <a:p>
-            <a:pPr lvl="1" marL="864000" indent="-324000">
-              <a:lnSpc>
-                <a:spcPct val="100000"/>
-              </a:lnSpc>
-              <a:spcBef>
-                <a:spcPts val="1134"/>
-              </a:spcBef>
-              <a:buClr>
-                <a:srgbClr val="000000"/>
-              </a:buClr>
-              <a:buSzPct val="75000"/>
-              <a:buFont typeface="Symbol" charset="2"/>
-              <a:buChar char=""/>
-            </a:pPr>
-            <a:r>
-              <a:rPr b="0" lang="en-US" sz="2000" strike="noStrike" u="none">
-                <a:solidFill>
-                  <a:schemeClr val="dk1"/>
-                </a:solidFill>
-                <a:uFillTx/>
-                <a:latin typeface="Calibri"/>
-              </a:rPr>
-              <a:t>Many influences/reasons</a:t>
-            </a:r>
-            <a:endParaRPr b="0" lang="en-US" sz="2000" strike="noStrike" u="none">
-              <a:solidFill>
-                <a:srgbClr val="000000"/>
-              </a:solidFill>
-              <a:uFillTx/>
-              <a:latin typeface="Arial"/>
-            </a:endParaRPr>
-          </a:p>
-          <a:p>
-            <a:pPr marL="432000" indent="-324000">
-              <a:lnSpc>
-                <a:spcPct val="100000"/>
-              </a:lnSpc>
-              <a:spcBef>
-                <a:spcPts val="1417"/>
-              </a:spcBef>
-              <a:buClr>
-                <a:srgbClr val="000000"/>
-              </a:buClr>
-              <a:buSzPct val="45000"/>
-              <a:buFont typeface="Wingdings" charset="2"/>
-              <a:buChar char=""/>
-            </a:pPr>
-            <a:r>
-              <a:rPr b="0" lang="en-US" sz="2400" strike="noStrike" u="none">
-                <a:solidFill>
-                  <a:schemeClr val="dk1"/>
-                </a:solidFill>
-                <a:uFillTx/>
-                <a:latin typeface="Calibri"/>
-              </a:rPr>
-              <a:t>Research question: </a:t>
-            </a:r>
-            <a:r>
-              <a:rPr b="0" i="1" lang="en-US" sz="2400" strike="noStrike" u="none">
-                <a:solidFill>
-                  <a:schemeClr val="dk1"/>
-                </a:solidFill>
-                <a:uFillTx/>
-                <a:latin typeface="Calibri"/>
-              </a:rPr>
-              <a:t>“How can a Recommender System assist an Irish student in their college course decision-making process”?</a:t>
-            </a:r>
-            <a:endParaRPr b="0" lang="en-US" sz="2400" strike="noStrike" u="none">
-              <a:solidFill>
-                <a:srgbClr val="000000"/>
-              </a:solidFill>
-              <a:uFillTx/>
-              <a:latin typeface="Arial"/>
-            </a:endParaRPr>
-          </a:p>
-        </p:txBody>
-      </p:sp>
-      <p:sp>
-        <p:nvSpPr>
-          <p:cNvPr id="37" name="PlaceHolder 3"/>
-          <p:cNvSpPr>
-            <a:spLocks noGrp="1"/>
-          </p:cNvSpPr>
-          <p:nvPr>
-            <p:ph/>
-          </p:nvPr>
-        </p:nvSpPr>
-        <p:spPr>
-          <a:xfrm>
-            <a:off x="828720" y="914400"/>
-            <a:ext cx="7499880" cy="275040"/>
-          </a:xfrm>
-          <a:prstGeom prst="rect">
-            <a:avLst/>
-          </a:prstGeom>
-          <a:noFill/>
-          <a:ln w="0">
-            <a:noFill/>
-          </a:ln>
-        </p:spPr>
-        <p:txBody>
-          <a:bodyPr lIns="0" rIns="0" tIns="0" bIns="0" anchor="t">
-            <a:noAutofit/>
-          </a:bodyPr>
-          <a:p>
-            <a:pPr indent="0">
-              <a:spcBef>
-                <a:spcPts val="1417"/>
-              </a:spcBef>
-              <a:buNone/>
-            </a:pPr>
-            <a:endParaRPr b="0" lang="en-US" sz="1800" strike="noStrike" u="none">
-              <a:solidFill>
-                <a:srgbClr val="000000"/>
-              </a:solidFill>
-              <a:uFillTx/>
-              <a:latin typeface="Arial"/>
-            </a:endParaRPr>
-          </a:p>
-        </p:txBody>
-      </p:sp>
-      <p:sp>
-        <p:nvSpPr>
-          <p:cNvPr id="5" name="PlaceHolder 4"/>
-          <p:cNvSpPr>
-            <a:spLocks noGrp="1"/>
-          </p:cNvSpPr>
-          <p:nvPr>
-            <p:ph type="sldNum" idx="1"/>
-          </p:nvPr>
-        </p:nvSpPr>
-        <p:spPr/>
-        <p:txBody>
-          <a:bodyPr/>
-          <a:p>
-            <a:fld id="{1DEB3B70-FCD4-4819-AC77-CC2DB1EF34D7}" type="slidenum">
-              <a:t>2</a:t>
-            </a:fld>
-          </a:p>
-        </p:txBody>
-      </p:sp>
-    </p:spTree>
-  </p:cSld>
-  <mc:AlternateContent>
-    <mc:Choice Requires="p14">
-      <p:transition spd="slow" p14:dur="2000"/>
-    </mc:Choice>
-    <mc:Fallback>
-      <p:transition spd="slow"/>
-    </mc:Fallback>
-  </mc:AlternateContent>
-</p:sld>
-</file>
-
-<file path=ppt/slides/slide3.xml><?xml version="1.0" encoding="utf-8"?>
 <p:sld xmlns:a="http://schemas.openxmlformats.org/drawingml/2006/main" xmlns:p="http://schemas.openxmlformats.org/presentationml/2006/main" xmlns:r="http://schemas.openxmlformats.org/officeDocument/2006/relationships" xmlns:p14="http://schemas.microsoft.com/office/powerpoint/2010/main" xmlns:p15="http://schemas.microsoft.com/office/powerpoint/2012/main" xmlns:mc="http://schemas.openxmlformats.org/markup-compatibility/2006">
   <p:cSld>
     <p:spTree>
@@ -6220,7 +6261,7 @@
                 <a:uFillTx/>
                 <a:latin typeface="Calibri"/>
               </a:rPr>
-              <a:t>Background</a:t>
+              <a:t>Motivation</a:t>
             </a:r>
             <a:endParaRPr b="0" lang="en-US" sz="2800" strike="noStrike" u="none">
               <a:solidFill>
@@ -6244,7 +6285,7 @@
         </p:nvSpPr>
         <p:spPr>
           <a:xfrm>
-            <a:off x="457200" y="1881000"/>
+            <a:off x="828720" y="1881000"/>
             <a:ext cx="7499880" cy="4039200"/>
           </a:xfrm>
           <a:prstGeom prst="rect">
@@ -6260,7 +6301,7 @@
             <a:noAutofit/>
           </a:bodyPr>
           <a:p>
-            <a:pPr marL="343080" indent="-343080" defTabSz="914400">
+            <a:pPr marL="432000" indent="-324000">
               <a:lnSpc>
                 <a:spcPct val="100000"/>
               </a:lnSpc>
@@ -6270,48 +6311,29 @@
               <a:buClr>
                 <a:srgbClr val="000000"/>
               </a:buClr>
-              <a:buFont typeface="Arial"/>
-              <a:buChar char="•"/>
-            </a:pPr>
-            <a:r>
-              <a:rPr b="0" lang="en-GB" sz="2400" strike="noStrike" u="none">
-                <a:solidFill>
-                  <a:schemeClr val="dk1"/>
-                </a:solidFill>
-                <a:uFillTx/>
-                <a:latin typeface="Calibri"/>
-              </a:rPr>
-              <a:t>Holland’s </a:t>
-            </a:r>
-            <a:r>
-              <a:rPr b="0" i="1" lang="en-GB" sz="2400" strike="noStrike" u="none">
-                <a:solidFill>
-                  <a:schemeClr val="dk1"/>
-                </a:solidFill>
-                <a:uFillTx/>
-                <a:latin typeface="Calibri"/>
-              </a:rPr>
-              <a:t>RIASEC </a:t>
-            </a:r>
-            <a:r>
-              <a:rPr b="0" lang="en-GB" sz="2400" strike="noStrike" u="none">
-                <a:solidFill>
-                  <a:schemeClr val="dk1"/>
-                </a:solidFill>
-                <a:uFillTx/>
-                <a:latin typeface="Calibri"/>
-              </a:rPr>
-              <a:t>Model</a:t>
-            </a:r>
-            <a:r>
-              <a:rPr b="0" lang="en-GB" sz="2400" strike="noStrike" u="none" baseline="33000">
-                <a:solidFill>
-                  <a:schemeClr val="dk1"/>
-                </a:solidFill>
-                <a:uFillTx/>
-                <a:latin typeface="Calibri"/>
-              </a:rPr>
-              <a:t>[3]</a:t>
+              <a:buSzPct val="45000"/>
+              <a:buFont typeface="Wingdings" charset="2"/>
+              <a:buChar char=""/>
+            </a:pPr>
+            <a:r>
+              <a:rPr b="0" lang="en-US" sz="2400" strike="noStrike" u="none">
+                <a:solidFill>
+                  <a:schemeClr val="dk1"/>
+                </a:solidFill>
+                <a:uFillTx/>
+                <a:latin typeface="Calibri"/>
+              </a:rPr>
+              <a:t>2024: 79% of Irish students entered college from secondary school</a:t>
+            </a:r>
+            <a:r>
+              <a:rPr b="0" lang="en-US" sz="2400" strike="noStrike" u="none" baseline="33000">
+                <a:solidFill>
+                  <a:schemeClr val="dk1"/>
+                </a:solidFill>
+                <a:uFillTx/>
+                <a:latin typeface="Calibri"/>
+              </a:rPr>
+              <a:t>[1]</a:t>
             </a:r>
             <a:endParaRPr b="0" lang="en-US" sz="2400" strike="noStrike" u="none">
               <a:solidFill>
@@ -6322,7 +6344,50 @@
             </a:endParaRPr>
           </a:p>
           <a:p>
-            <a:pPr lvl="1" marL="864000" indent="-324000" defTabSz="914400">
+            <a:pPr marL="432000" indent="-324000">
+              <a:lnSpc>
+                <a:spcPct val="100000"/>
+              </a:lnSpc>
+              <a:spcBef>
+                <a:spcPts val="1417"/>
+              </a:spcBef>
+              <a:buClr>
+                <a:srgbClr val="000000"/>
+              </a:buClr>
+              <a:buSzPct val="45000"/>
+              <a:buFont typeface="Wingdings" charset="2"/>
+              <a:buChar char=""/>
+            </a:pPr>
+            <a:r>
+              <a:rPr b="0" i="1" lang="en-US" sz="2400" strike="noStrike" u="none">
+                <a:solidFill>
+                  <a:schemeClr val="dk1"/>
+                </a:solidFill>
+                <a:uFillTx/>
+                <a:latin typeface="Calibri"/>
+              </a:rPr>
+              <a:t>“</a:t>
+            </a:r>
+            <a:r>
+              <a:rPr b="0" i="1" lang="en-US" sz="2400" strike="noStrike" u="none">
+                <a:solidFill>
+                  <a:schemeClr val="dk1"/>
+                </a:solidFill>
+                <a:uFillTx/>
+                <a:latin typeface="Calibri"/>
+              </a:rPr>
+              <a:t>What college course should I study?”</a:t>
+            </a:r>
+            <a:endParaRPr b="0" lang="en-US" sz="2400" strike="noStrike" u="none">
+              <a:solidFill>
+                <a:srgbClr val="000000"/>
+              </a:solidFill>
+              <a:uFillTx/>
+              <a:latin typeface="Arial"/>
+            </a:endParaRPr>
+          </a:p>
+          <a:p>
+            <a:pPr lvl="1" marL="864000" indent="-324000">
               <a:lnSpc>
                 <a:spcPct val="100000"/>
               </a:lnSpc>
@@ -6337,25 +6402,25 @@
               <a:buChar char=""/>
             </a:pPr>
             <a:r>
-              <a:rPr b="0" lang="en-GB" sz="2400" strike="noStrike" u="none">
-                <a:solidFill>
-                  <a:schemeClr val="dk1"/>
-                </a:solidFill>
-                <a:uFillTx/>
-                <a:latin typeface="Calibri"/>
-              </a:rPr>
-              <a:t>6 vocational personality traits</a:t>
-            </a:r>
-            <a:endParaRPr b="0" lang="en-US" sz="2400" strike="noStrike" u="none">
-              <a:solidFill>
-                <a:srgbClr val="000000"/>
-              </a:solidFill>
-              <a:uFillTx/>
-              <a:latin typeface="Arial"/>
-            </a:endParaRPr>
-          </a:p>
-          <a:p>
-            <a:pPr lvl="1" marL="864000" indent="-324000" defTabSz="914400">
+              <a:rPr b="0" lang="en-US" sz="2000" strike="noStrike" u="none">
+                <a:solidFill>
+                  <a:schemeClr val="dk1"/>
+                </a:solidFill>
+                <a:uFillTx/>
+                <a:latin typeface="Calibri"/>
+              </a:rPr>
+              <a:t>Difficult to answer</a:t>
+            </a:r>
+            <a:endParaRPr b="0" lang="en-US" sz="2000" strike="noStrike" u="none">
+              <a:solidFill>
+                <a:srgbClr val="000000"/>
+              </a:solidFill>
+              <a:uFillTx/>
+              <a:latin typeface="Arial"/>
+            </a:endParaRPr>
+          </a:p>
+          <a:p>
+            <a:pPr lvl="1" marL="864000" indent="-324000">
               <a:lnSpc>
                 <a:spcPct val="100000"/>
               </a:lnSpc>
@@ -6370,108 +6435,35 @@
               <a:buChar char=""/>
             </a:pPr>
             <a:r>
-              <a:rPr b="0" lang="en-GB" sz="2400" strike="noStrike" u="none">
-                <a:solidFill>
-                  <a:schemeClr val="dk1"/>
-                </a:solidFill>
-                <a:uFillTx/>
-                <a:latin typeface="Calibri"/>
-              </a:rPr>
-              <a:t>Most studied career theory</a:t>
-            </a:r>
-            <a:r>
-              <a:rPr b="0" lang="en-GB" sz="2400" strike="noStrike" u="none" baseline="33000">
-                <a:solidFill>
-                  <a:schemeClr val="dk1"/>
-                </a:solidFill>
-                <a:uFillTx/>
-                <a:latin typeface="Calibri"/>
-              </a:rPr>
-              <a:t>[4]</a:t>
-            </a:r>
-            <a:endParaRPr b="0" lang="en-US" sz="2400" strike="noStrike" u="none">
-              <a:solidFill>
-                <a:srgbClr val="000000"/>
-              </a:solidFill>
-              <a:uFillTx/>
-              <a:latin typeface="Arial"/>
-            </a:endParaRPr>
-          </a:p>
-          <a:p>
-            <a:pPr marL="343080" indent="-343080" defTabSz="914400">
-              <a:lnSpc>
-                <a:spcPct val="100000"/>
-              </a:lnSpc>
-              <a:spcBef>
-                <a:spcPts val="1417"/>
-              </a:spcBef>
-              <a:buClr>
-                <a:srgbClr val="000000"/>
-              </a:buClr>
-              <a:buFont typeface="Arial"/>
-              <a:buChar char="•"/>
-            </a:pPr>
-            <a:r>
-              <a:rPr b="0" lang="en-GB" sz="2400" strike="noStrike" u="none">
-                <a:solidFill>
-                  <a:schemeClr val="dk1"/>
-                </a:solidFill>
-                <a:uFillTx/>
-                <a:latin typeface="Calibri"/>
-              </a:rPr>
-              <a:t>“</a:t>
-            </a:r>
-            <a:r>
-              <a:rPr b="0" lang="en-GB" sz="2400" strike="noStrike" u="none">
-                <a:solidFill>
-                  <a:schemeClr val="dk1"/>
-                </a:solidFill>
-                <a:uFillTx/>
-                <a:latin typeface="Calibri"/>
-              </a:rPr>
-              <a:t>What college course should people</a:t>
-            </a:r>
-            <a:endParaRPr b="0" lang="en-US" sz="2400" strike="noStrike" u="none">
-              <a:solidFill>
-                <a:srgbClr val="000000"/>
-              </a:solidFill>
-              <a:uFillTx/>
-              <a:latin typeface="Arial"/>
-            </a:endParaRPr>
-          </a:p>
-          <a:p>
-            <a:pPr marL="343080" indent="0" defTabSz="914400">
-              <a:lnSpc>
-                <a:spcPct val="100000"/>
-              </a:lnSpc>
-              <a:spcBef>
-                <a:spcPts val="1417"/>
-              </a:spcBef>
-              <a:buNone/>
-              <a:tabLst>
-                <a:tab algn="l" pos="0"/>
-              </a:tabLst>
-            </a:pPr>
-            <a:r>
-              <a:rPr b="0" lang="en-GB" sz="2400" strike="noStrike" u="none">
-                <a:solidFill>
-                  <a:schemeClr val="dk1"/>
-                </a:solidFill>
-                <a:uFillTx/>
-                <a:latin typeface="Calibri"/>
-              </a:rPr>
-              <a:t>study?”</a:t>
-            </a:r>
-            <a:endParaRPr b="0" lang="en-US" sz="2400" strike="noStrike" u="none">
-              <a:solidFill>
-                <a:srgbClr val="000000"/>
-              </a:solidFill>
-              <a:uFillTx/>
-              <a:latin typeface="Arial"/>
-            </a:endParaRPr>
-          </a:p>
-          <a:p>
-            <a:pPr lvl="1" marL="864000" indent="-324000" defTabSz="914400">
+              <a:rPr b="0" lang="en-US" sz="2000" strike="noStrike" u="none">
+                <a:solidFill>
+                  <a:schemeClr val="dk1"/>
+                </a:solidFill>
+                <a:uFillTx/>
+                <a:latin typeface="Calibri"/>
+              </a:rPr>
+              <a:t>2018: 31% Irish graduates: “not likely” to study their course again</a:t>
+            </a:r>
+            <a:r>
+              <a:rPr b="0" lang="en-US" sz="2000" strike="noStrike" u="none" baseline="33000">
+                <a:solidFill>
+                  <a:schemeClr val="dk1"/>
+                </a:solidFill>
+                <a:uFillTx/>
+                <a:latin typeface="Calibri"/>
+              </a:rPr>
+              <a:t>[2]</a:t>
+            </a:r>
+            <a:endParaRPr b="0" lang="en-US" sz="2000" strike="noStrike" u="none">
+              <a:solidFill>
+                <a:srgbClr val="000000"/>
+              </a:solidFill>
+              <a:uFillTx/>
+              <a:latin typeface="Arial"/>
+            </a:endParaRPr>
+          </a:p>
+          <a:p>
+            <a:pPr lvl="1" marL="864000" indent="-324000">
               <a:lnSpc>
                 <a:spcPct val="100000"/>
               </a:lnSpc>
@@ -6484,143 +6476,60 @@
               <a:buSzPct val="75000"/>
               <a:buFont typeface="Symbol" charset="2"/>
               <a:buChar char=""/>
-              <a:tabLst>
-                <a:tab algn="l" pos="0"/>
-              </a:tabLst>
-            </a:pPr>
-            <a:r>
-              <a:rPr b="0" lang="en-GB" sz="2400" strike="noStrike" u="none">
-                <a:solidFill>
-                  <a:schemeClr val="dk1"/>
-                </a:solidFill>
-                <a:uFillTx/>
-                <a:latin typeface="Calibri"/>
-              </a:rPr>
-              <a:t>Academic Interests</a:t>
-            </a:r>
-            <a:r>
-              <a:rPr b="0" lang="en-GB" sz="2400" strike="noStrike" u="none" baseline="33000">
-                <a:solidFill>
-                  <a:schemeClr val="dk1"/>
-                </a:solidFill>
-                <a:uFillTx/>
-                <a:latin typeface="Calibri"/>
-              </a:rPr>
-              <a:t>[5][6]</a:t>
-            </a:r>
-            <a:endParaRPr b="0" lang="en-US" sz="2400" strike="noStrike" u="none">
-              <a:solidFill>
-                <a:srgbClr val="000000"/>
-              </a:solidFill>
-              <a:uFillTx/>
-              <a:latin typeface="Arial"/>
-            </a:endParaRPr>
-          </a:p>
-          <a:p>
-            <a:pPr lvl="1" marL="864000" indent="-324000" defTabSz="914400">
+            </a:pPr>
+            <a:r>
+              <a:rPr b="0" lang="en-US" sz="2000" strike="noStrike" u="none">
+                <a:solidFill>
+                  <a:schemeClr val="dk1"/>
+                </a:solidFill>
+                <a:uFillTx/>
+                <a:latin typeface="Calibri"/>
+              </a:rPr>
+              <a:t>Many influences/reasons</a:t>
+            </a:r>
+            <a:endParaRPr b="0" lang="en-US" sz="2000" strike="noStrike" u="none">
+              <a:solidFill>
+                <a:srgbClr val="000000"/>
+              </a:solidFill>
+              <a:uFillTx/>
+              <a:latin typeface="Arial"/>
+            </a:endParaRPr>
+          </a:p>
+          <a:p>
+            <a:pPr marL="432000" indent="-324000">
               <a:lnSpc>
                 <a:spcPct val="100000"/>
               </a:lnSpc>
               <a:spcBef>
-                <a:spcPts val="1134"/>
+                <a:spcPts val="1417"/>
               </a:spcBef>
               <a:buClr>
                 <a:srgbClr val="000000"/>
               </a:buClr>
-              <a:buSzPct val="75000"/>
-              <a:buFont typeface="Symbol" charset="2"/>
-              <a:buChar char=""/>
-              <a:tabLst>
-                <a:tab algn="l" pos="0"/>
-              </a:tabLst>
-            </a:pPr>
-            <a:r>
-              <a:rPr b="0" lang="en-GB" sz="2400" strike="noStrike" u="none">
-                <a:solidFill>
-                  <a:schemeClr val="dk1"/>
-                </a:solidFill>
-                <a:uFillTx/>
-                <a:latin typeface="Calibri"/>
-              </a:rPr>
-              <a:t>Salary</a:t>
-            </a:r>
-            <a:r>
-              <a:rPr b="0" lang="en-GB" sz="2400" strike="noStrike" u="none" baseline="33000">
-                <a:solidFill>
-                  <a:schemeClr val="dk1"/>
-                </a:solidFill>
-                <a:uFillTx/>
-                <a:latin typeface="Calibri"/>
-              </a:rPr>
-              <a:t>[5][7]</a:t>
-            </a:r>
-            <a:endParaRPr b="0" lang="en-US" sz="2400" strike="noStrike" u="none">
-              <a:solidFill>
-                <a:srgbClr val="000000"/>
-              </a:solidFill>
-              <a:uFillTx/>
-              <a:latin typeface="Arial"/>
-            </a:endParaRPr>
-          </a:p>
-          <a:p>
-            <a:pPr lvl="1" marL="864000" indent="-324000" defTabSz="914400">
-              <a:lnSpc>
-                <a:spcPct val="100000"/>
-              </a:lnSpc>
-              <a:spcBef>
-                <a:spcPts val="1134"/>
-              </a:spcBef>
-              <a:buClr>
-                <a:srgbClr val="000000"/>
-              </a:buClr>
-              <a:buSzPct val="75000"/>
-              <a:buFont typeface="Symbol" charset="2"/>
-              <a:buChar char=""/>
-              <a:tabLst>
-                <a:tab algn="l" pos="0"/>
-              </a:tabLst>
-            </a:pPr>
-            <a:r>
-              <a:rPr b="0" lang="en-GB" sz="2400" strike="noStrike" u="none">
-                <a:solidFill>
-                  <a:schemeClr val="dk1"/>
-                </a:solidFill>
-                <a:uFillTx/>
-                <a:latin typeface="Calibri"/>
-              </a:rPr>
-              <a:t>Meaning</a:t>
-            </a:r>
-            <a:r>
-              <a:rPr b="0" lang="en-GB" sz="2400" strike="noStrike" u="none" baseline="33000">
-                <a:solidFill>
-                  <a:schemeClr val="dk1"/>
-                </a:solidFill>
-                <a:uFillTx/>
-                <a:latin typeface="Calibri"/>
-              </a:rPr>
-              <a:t>[5]</a:t>
-            </a:r>
-            <a:endParaRPr b="0" lang="en-US" sz="2400" strike="noStrike" u="none">
-              <a:solidFill>
-                <a:srgbClr val="000000"/>
-              </a:solidFill>
-              <a:uFillTx/>
-              <a:latin typeface="Arial"/>
-            </a:endParaRPr>
-          </a:p>
-          <a:p>
-            <a:pPr marL="343080" indent="0" defTabSz="914400">
-              <a:lnSpc>
-                <a:spcPct val="100000"/>
-              </a:lnSpc>
-              <a:spcBef>
-                <a:spcPts val="1417"/>
-              </a:spcBef>
-              <a:buNone/>
-              <a:tabLst>
-                <a:tab algn="l" pos="0"/>
-              </a:tabLst>
-            </a:pPr>
+              <a:buSzPct val="45000"/>
+              <a:buFont typeface="Wingdings" charset="2"/>
+              <a:buChar char=""/>
+            </a:pPr>
+            <a:r>
+              <a:rPr b="0" lang="en-US" sz="2400" strike="noStrike" u="none">
+                <a:solidFill>
+                  <a:schemeClr val="dk1"/>
+                </a:solidFill>
+                <a:uFillTx/>
+                <a:latin typeface="Calibri"/>
+              </a:rPr>
+              <a:t>Research question: </a:t>
+            </a:r>
+            <a:r>
+              <a:rPr b="0" i="1" lang="en-US" sz="2400" strike="noStrike" u="none">
+                <a:solidFill>
+                  <a:schemeClr val="dk1"/>
+                </a:solidFill>
+                <a:uFillTx/>
+                <a:latin typeface="Calibri"/>
+              </a:rPr>
+              <a:t>“How can a Recommender System assist an Irish student in their college course decision-making process”?</a:t>
+            </a:r>
             <a:endParaRPr b="0" lang="en-US" sz="2400" strike="noStrike" u="none">
               <a:solidFill>
                 <a:srgbClr val="000000"/>
@@ -6631,20 +6540,20 @@
           </a:p>
         </p:txBody>
       </p:sp>
-      <p:pic>
-        <p:nvPicPr>
-          <p:cNvPr id="40" name="" descr=""/>
-          <p:cNvPicPr/>
-          <p:nvPr/>
-        </p:nvPicPr>
-        <p:blipFill>
-          <a:blip r:embed="rId1"/>
-          <a:stretch/>
-        </p:blipFill>
+      <p:sp>
+        <p:nvSpPr>
+          <p:cNvPr id="40" name="PlaceHolder 3"/>
+          <p:cNvSpPr>
+            <a:spLocks noGrp="1"/>
+          </p:cNvSpPr>
+          <p:nvPr>
+            <p:ph/>
+          </p:nvPr>
+        </p:nvSpPr>
         <p:spPr>
           <a:xfrm>
-            <a:off x="5029200" y="2537280"/>
-            <a:ext cx="3634200" cy="3634200"/>
+            <a:off x="828720" y="914400"/>
+            <a:ext cx="7499880" cy="275040"/>
           </a:xfrm>
           <a:prstGeom prst="rect">
             <a:avLst/>
@@ -6654,23 +6563,43 @@
             <a:noFill/>
           </a:ln>
         </p:spPr>
-      </p:pic>
+        <p:txBody>
+          <a:bodyPr lIns="0" rIns="0" tIns="0" bIns="0" anchor="t">
+            <a:noAutofit/>
+          </a:bodyPr>
+          <a:p>
+            <a:pPr indent="0">
+              <a:spcBef>
+                <a:spcPts val="1417"/>
+              </a:spcBef>
+              <a:buNone/>
+            </a:pPr>
+            <a:endParaRPr b="0" lang="en-US" sz="1800" strike="noStrike" u="none">
+              <a:solidFill>
+                <a:srgbClr val="000000"/>
+              </a:solidFill>
+              <a:uFillTx/>
+              <a:latin typeface="Arial"/>
+            </a:endParaRPr>
+          </a:p>
+        </p:txBody>
+      </p:sp>
       <p:sp>
         <p:nvSpPr>
-          <p:cNvPr id="4" name="PlaceHolder 3"/>
+          <p:cNvPr id="5" name="PlaceHolder 4"/>
           <p:cNvSpPr>
             <a:spLocks noGrp="1"/>
           </p:cNvSpPr>
           <p:nvPr>
-            <p:ph type="sldNum" idx="2"/>
+            <p:ph type="sldNum" idx="1"/>
           </p:nvPr>
         </p:nvSpPr>
         <p:spPr/>
         <p:txBody>
           <a:bodyPr/>
           <a:p>
-            <a:fld id="{3DBAD988-3D81-4182-8568-4A226AB2315F}" type="slidenum">
-              <a:t>3</a:t>
+            <a:fld id="{EBBFDD57-7925-426A-83D5-C5F97F715AF9}" type="slidenum">
+              <a:t>2</a:t>
             </a:fld>
           </a:p>
         </p:txBody>
@@ -6688,7 +6617,7 @@
 </p:sld>
 </file>
 
-<file path=ppt/slides/slide4.xml><?xml version="1.0" encoding="utf-8"?>
+<file path=ppt/slides/slide3.xml><?xml version="1.0" encoding="utf-8"?>
 <p:sld xmlns:a="http://schemas.openxmlformats.org/drawingml/2006/main" xmlns:p="http://schemas.openxmlformats.org/presentationml/2006/main" xmlns:r="http://schemas.openxmlformats.org/officeDocument/2006/relationships" xmlns:p14="http://schemas.microsoft.com/office/powerpoint/2010/main" xmlns:p15="http://schemas.microsoft.com/office/powerpoint/2012/main" xmlns:mc="http://schemas.openxmlformats.org/markup-compatibility/2006">
   <p:cSld>
     <p:spTree>
@@ -6750,7 +6679,7 @@
                 <a:uFillTx/>
                 <a:latin typeface="Calibri"/>
               </a:rPr>
-              <a:t>Related Work</a:t>
+              <a:t>Background</a:t>
             </a:r>
             <a:endParaRPr b="0" lang="en-US" sz="2800" strike="noStrike" u="none">
               <a:solidFill>
@@ -6774,7 +6703,7 @@
         </p:nvSpPr>
         <p:spPr>
           <a:xfrm>
-            <a:off x="685800" y="4875480"/>
+            <a:off x="457200" y="1881000"/>
             <a:ext cx="7499880" cy="4039200"/>
           </a:xfrm>
           <a:prstGeom prst="rect">
@@ -6811,17 +6740,17 @@
                 <a:uFillTx/>
                 <a:latin typeface="Calibri"/>
               </a:rPr>
-              <a:t>What information do we profile from the user to make </a:t>
-            </a:r>
-            <a:r>
-              <a:rPr b="1" lang="en-GB" sz="2400" strike="noStrike" u="none">
-                <a:solidFill>
-                  <a:schemeClr val="dk1"/>
-                </a:solidFill>
-                <a:uFillTx/>
-                <a:latin typeface="Calibri"/>
-              </a:rPr>
-              <a:t>personalised </a:t>
+              <a:t>Holland’s </a:t>
+            </a:r>
+            <a:r>
+              <a:rPr b="0" i="1" lang="en-GB" sz="2400" strike="noStrike" u="none">
+                <a:solidFill>
+                  <a:schemeClr val="dk1"/>
+                </a:solidFill>
+                <a:uFillTx/>
+                <a:latin typeface="Calibri"/>
+              </a:rPr>
+              <a:t>RIASEC </a:t>
             </a:r>
             <a:r>
               <a:rPr b="0" lang="en-GB" sz="2400" strike="noStrike" u="none">
@@ -6831,7 +6760,93 @@
                 <a:uFillTx/>
                 <a:latin typeface="Calibri"/>
               </a:rPr>
-              <a:t>college course recommendations?</a:t>
+              <a:t>Model</a:t>
+            </a:r>
+            <a:r>
+              <a:rPr b="0" lang="en-GB" sz="2400" strike="noStrike" u="none" baseline="33000">
+                <a:solidFill>
+                  <a:schemeClr val="dk1"/>
+                </a:solidFill>
+                <a:uFillTx/>
+                <a:latin typeface="Calibri"/>
+              </a:rPr>
+              <a:t>[3]</a:t>
+            </a:r>
+            <a:endParaRPr b="0" lang="en-US" sz="2400" strike="noStrike" u="none">
+              <a:solidFill>
+                <a:srgbClr val="000000"/>
+              </a:solidFill>
+              <a:uFillTx/>
+              <a:latin typeface="Arial"/>
+            </a:endParaRPr>
+          </a:p>
+          <a:p>
+            <a:pPr lvl="1" marL="864000" indent="-324000" defTabSz="914400">
+              <a:lnSpc>
+                <a:spcPct val="100000"/>
+              </a:lnSpc>
+              <a:spcBef>
+                <a:spcPts val="1134"/>
+              </a:spcBef>
+              <a:buClr>
+                <a:srgbClr val="000000"/>
+              </a:buClr>
+              <a:buSzPct val="75000"/>
+              <a:buFont typeface="Symbol" charset="2"/>
+              <a:buChar char=""/>
+            </a:pPr>
+            <a:r>
+              <a:rPr b="0" lang="en-GB" sz="2400" strike="noStrike" u="none">
+                <a:solidFill>
+                  <a:schemeClr val="dk1"/>
+                </a:solidFill>
+                <a:uFillTx/>
+                <a:latin typeface="Calibri"/>
+              </a:rPr>
+              <a:t>6 vocational personality traits</a:t>
+            </a:r>
+            <a:endParaRPr b="0" lang="en-US" sz="2400" strike="noStrike" u="none">
+              <a:solidFill>
+                <a:srgbClr val="000000"/>
+              </a:solidFill>
+              <a:uFillTx/>
+              <a:latin typeface="Arial"/>
+            </a:endParaRPr>
+          </a:p>
+          <a:p>
+            <a:pPr lvl="1" marL="864000" indent="-324000" defTabSz="914400">
+              <a:lnSpc>
+                <a:spcPct val="100000"/>
+              </a:lnSpc>
+              <a:spcBef>
+                <a:spcPts val="1134"/>
+              </a:spcBef>
+              <a:buClr>
+                <a:srgbClr val="000000"/>
+              </a:buClr>
+              <a:buSzPct val="75000"/>
+              <a:buFont typeface="Symbol" charset="2"/>
+              <a:buChar char=""/>
+            </a:pPr>
+            <a:r>
+              <a:rPr b="0" lang="en-GB" sz="2400" strike="noStrike" u="none">
+                <a:solidFill>
+                  <a:schemeClr val="dk1"/>
+                </a:solidFill>
+                <a:uFillTx/>
+                <a:latin typeface="Calibri"/>
+              </a:rPr>
+              <a:t>Most studied career theory</a:t>
+            </a:r>
+            <a:r>
+              <a:rPr b="0" lang="en-GB" sz="2400" strike="noStrike" u="none" baseline="33000">
+                <a:solidFill>
+                  <a:schemeClr val="dk1"/>
+                </a:solidFill>
+                <a:uFillTx/>
+                <a:latin typeface="Calibri"/>
+              </a:rPr>
+              <a:t>[4]</a:t>
             </a:r>
             <a:endParaRPr b="0" lang="en-US" sz="2400" strike="noStrike" u="none">
               <a:solidFill>
@@ -6856,16 +6871,6 @@
               <a:buChar char="•"/>
             </a:pPr>
             <a:r>
-              <a:rPr b="1" lang="en-GB" sz="2400" strike="noStrike" u="none">
-                <a:solidFill>
-                  <a:schemeClr val="dk1"/>
-                </a:solidFill>
-                <a:uFillTx/>
-                <a:latin typeface="Calibri"/>
-              </a:rPr>
-              <a:t>Research Gap: </a:t>
-            </a:r>
-            <a:r>
               <a:rPr b="0" lang="en-GB" sz="2400" strike="noStrike" u="none">
                 <a:solidFill>
                   <a:schemeClr val="dk1"/>
@@ -6873,8 +6878,208 @@
                 <a:uFillTx/>
                 <a:latin typeface="Calibri"/>
               </a:rPr>
-              <a:t>RIASEC + Academic Interests</a:t>
-            </a:r>
+              <a:t>“</a:t>
+            </a:r>
+            <a:r>
+              <a:rPr b="0" lang="en-GB" sz="2400" strike="noStrike" u="none">
+                <a:solidFill>
+                  <a:schemeClr val="dk1"/>
+                </a:solidFill>
+                <a:uFillTx/>
+                <a:latin typeface="Calibri"/>
+              </a:rPr>
+              <a:t>What college course should people</a:t>
+            </a:r>
+            <a:endParaRPr b="0" lang="en-US" sz="2400" strike="noStrike" u="none">
+              <a:solidFill>
+                <a:srgbClr val="000000"/>
+              </a:solidFill>
+              <a:uFillTx/>
+              <a:latin typeface="Arial"/>
+            </a:endParaRPr>
+          </a:p>
+          <a:p>
+            <a:pPr marL="343080" indent="0" defTabSz="914400">
+              <a:lnSpc>
+                <a:spcPct val="100000"/>
+              </a:lnSpc>
+              <a:spcBef>
+                <a:spcPts val="1417"/>
+              </a:spcBef>
+              <a:buNone/>
+              <a:tabLst>
+                <a:tab algn="l" pos="0"/>
+              </a:tabLst>
+            </a:pPr>
+            <a:r>
+              <a:rPr b="0" lang="en-GB" sz="2400" strike="noStrike" u="none">
+                <a:solidFill>
+                  <a:schemeClr val="dk1"/>
+                </a:solidFill>
+                <a:uFillTx/>
+                <a:latin typeface="Calibri"/>
+              </a:rPr>
+              <a:t>study?”</a:t>
+            </a:r>
+            <a:endParaRPr b="0" lang="en-US" sz="2400" strike="noStrike" u="none">
+              <a:solidFill>
+                <a:srgbClr val="000000"/>
+              </a:solidFill>
+              <a:uFillTx/>
+              <a:latin typeface="Arial"/>
+            </a:endParaRPr>
+          </a:p>
+          <a:p>
+            <a:pPr lvl="1" marL="864000" indent="-324000" defTabSz="914400">
+              <a:lnSpc>
+                <a:spcPct val="100000"/>
+              </a:lnSpc>
+              <a:spcBef>
+                <a:spcPts val="1134"/>
+              </a:spcBef>
+              <a:buClr>
+                <a:srgbClr val="000000"/>
+              </a:buClr>
+              <a:buSzPct val="75000"/>
+              <a:buFont typeface="Symbol" charset="2"/>
+              <a:buChar char=""/>
+              <a:tabLst>
+                <a:tab algn="l" pos="0"/>
+              </a:tabLst>
+            </a:pPr>
+            <a:r>
+              <a:rPr b="0" lang="en-GB" sz="2400" strike="noStrike" u="none">
+                <a:solidFill>
+                  <a:schemeClr val="dk1"/>
+                </a:solidFill>
+                <a:uFillTx/>
+                <a:latin typeface="Calibri"/>
+              </a:rPr>
+              <a:t>Academic Interests</a:t>
+            </a:r>
+            <a:r>
+              <a:rPr b="0" lang="en-GB" sz="2400" strike="noStrike" u="none" baseline="33000">
+                <a:solidFill>
+                  <a:schemeClr val="dk1"/>
+                </a:solidFill>
+                <a:uFillTx/>
+                <a:latin typeface="Calibri"/>
+              </a:rPr>
+              <a:t>[5][6]</a:t>
+            </a:r>
+            <a:endParaRPr b="0" lang="en-US" sz="2400" strike="noStrike" u="none">
+              <a:solidFill>
+                <a:srgbClr val="000000"/>
+              </a:solidFill>
+              <a:uFillTx/>
+              <a:latin typeface="Arial"/>
+            </a:endParaRPr>
+          </a:p>
+          <a:p>
+            <a:pPr lvl="1" marL="864000" indent="-324000" defTabSz="914400">
+              <a:lnSpc>
+                <a:spcPct val="100000"/>
+              </a:lnSpc>
+              <a:spcBef>
+                <a:spcPts val="1134"/>
+              </a:spcBef>
+              <a:buClr>
+                <a:srgbClr val="000000"/>
+              </a:buClr>
+              <a:buSzPct val="75000"/>
+              <a:buFont typeface="Symbol" charset="2"/>
+              <a:buChar char=""/>
+              <a:tabLst>
+                <a:tab algn="l" pos="0"/>
+              </a:tabLst>
+            </a:pPr>
+            <a:r>
+              <a:rPr b="0" lang="en-GB" sz="2400" strike="noStrike" u="none">
+                <a:solidFill>
+                  <a:schemeClr val="dk1"/>
+                </a:solidFill>
+                <a:uFillTx/>
+                <a:latin typeface="Calibri"/>
+              </a:rPr>
+              <a:t>Salary</a:t>
+            </a:r>
+            <a:r>
+              <a:rPr b="0" lang="en-GB" sz="2400" strike="noStrike" u="none" baseline="33000">
+                <a:solidFill>
+                  <a:schemeClr val="dk1"/>
+                </a:solidFill>
+                <a:uFillTx/>
+                <a:latin typeface="Calibri"/>
+              </a:rPr>
+              <a:t>[5][7]</a:t>
+            </a:r>
+            <a:endParaRPr b="0" lang="en-US" sz="2400" strike="noStrike" u="none">
+              <a:solidFill>
+                <a:srgbClr val="000000"/>
+              </a:solidFill>
+              <a:uFillTx/>
+              <a:latin typeface="Arial"/>
+            </a:endParaRPr>
+          </a:p>
+          <a:p>
+            <a:pPr lvl="1" marL="864000" indent="-324000" defTabSz="914400">
+              <a:lnSpc>
+                <a:spcPct val="100000"/>
+              </a:lnSpc>
+              <a:spcBef>
+                <a:spcPts val="1134"/>
+              </a:spcBef>
+              <a:buClr>
+                <a:srgbClr val="000000"/>
+              </a:buClr>
+              <a:buSzPct val="75000"/>
+              <a:buFont typeface="Symbol" charset="2"/>
+              <a:buChar char=""/>
+              <a:tabLst>
+                <a:tab algn="l" pos="0"/>
+              </a:tabLst>
+            </a:pPr>
+            <a:r>
+              <a:rPr b="0" lang="en-GB" sz="2400" strike="noStrike" u="none">
+                <a:solidFill>
+                  <a:schemeClr val="dk1"/>
+                </a:solidFill>
+                <a:uFillTx/>
+                <a:latin typeface="Calibri"/>
+              </a:rPr>
+              <a:t>Meaning</a:t>
+            </a:r>
+            <a:r>
+              <a:rPr b="0" lang="en-GB" sz="2400" strike="noStrike" u="none" baseline="33000">
+                <a:solidFill>
+                  <a:schemeClr val="dk1"/>
+                </a:solidFill>
+                <a:uFillTx/>
+                <a:latin typeface="Calibri"/>
+              </a:rPr>
+              <a:t>[5]</a:t>
+            </a:r>
+            <a:endParaRPr b="0" lang="en-US" sz="2400" strike="noStrike" u="none">
+              <a:solidFill>
+                <a:srgbClr val="000000"/>
+              </a:solidFill>
+              <a:uFillTx/>
+              <a:latin typeface="Arial"/>
+            </a:endParaRPr>
+          </a:p>
+          <a:p>
+            <a:pPr marL="343080" indent="0" defTabSz="914400">
+              <a:lnSpc>
+                <a:spcPct val="100000"/>
+              </a:lnSpc>
+              <a:spcBef>
+                <a:spcPts val="1417"/>
+              </a:spcBef>
+              <a:buNone/>
+              <a:tabLst>
+                <a:tab algn="l" pos="0"/>
+              </a:tabLst>
+            </a:pPr>
             <a:endParaRPr b="0" lang="en-US" sz="2400" strike="noStrike" u="none">
               <a:solidFill>
                 <a:srgbClr val="000000"/>
@@ -6897,8 +7102,8 @@
         </p:blipFill>
         <p:spPr>
           <a:xfrm>
-            <a:off x="1600200" y="1208880"/>
-            <a:ext cx="6152040" cy="3489120"/>
+            <a:off x="5029200" y="2537280"/>
+            <a:ext cx="3634200" cy="3634200"/>
           </a:xfrm>
           <a:prstGeom prst="rect">
             <a:avLst/>
@@ -6923,8 +7128,8 @@
         <p:txBody>
           <a:bodyPr/>
           <a:p>
-            <a:fld id="{E04CB2CB-8B9F-4D0B-B95F-98BFD9B19654}" type="slidenum">
-              <a:t>4</a:t>
+            <a:fld id="{9A7E4EDD-CA46-4AF7-9D65-2E9A70E2985C}" type="slidenum">
+              <a:t>3</a:t>
             </a:fld>
           </a:p>
         </p:txBody>
@@ -6942,7 +7147,7 @@
 </p:sld>
 </file>
 
-<file path=ppt/slides/slide5.xml><?xml version="1.0" encoding="utf-8"?>
+<file path=ppt/slides/slide4.xml><?xml version="1.0" encoding="utf-8"?>
 <p:sld xmlns:a="http://schemas.openxmlformats.org/drawingml/2006/main" xmlns:p="http://schemas.openxmlformats.org/presentationml/2006/main" xmlns:r="http://schemas.openxmlformats.org/officeDocument/2006/relationships" xmlns:p14="http://schemas.microsoft.com/office/powerpoint/2010/main" xmlns:p15="http://schemas.microsoft.com/office/powerpoint/2012/main" xmlns:mc="http://schemas.openxmlformats.org/markup-compatibility/2006">
   <p:cSld>
     <p:spTree>
@@ -7004,7 +7209,7 @@
                 <a:uFillTx/>
                 <a:latin typeface="Calibri"/>
               </a:rPr>
-              <a:t>Design</a:t>
+              <a:t>Related Work</a:t>
             </a:r>
             <a:endParaRPr b="0" lang="en-US" sz="2800" strike="noStrike" u="none">
               <a:solidFill>
@@ -7019,6 +7224,260 @@
       <p:sp>
         <p:nvSpPr>
           <p:cNvPr id="45" name="PlaceHolder 2"/>
+          <p:cNvSpPr>
+            <a:spLocks noGrp="1"/>
+          </p:cNvSpPr>
+          <p:nvPr>
+            <p:ph/>
+          </p:nvPr>
+        </p:nvSpPr>
+        <p:spPr>
+          <a:xfrm>
+            <a:off x="685800" y="4875480"/>
+            <a:ext cx="7499880" cy="4039200"/>
+          </a:xfrm>
+          <a:prstGeom prst="rect">
+            <a:avLst/>
+          </a:prstGeom>
+          <a:noFill/>
+          <a:ln w="0">
+            <a:noFill/>
+          </a:ln>
+        </p:spPr>
+        <p:txBody>
+          <a:bodyPr lIns="0" rIns="0" tIns="0" bIns="0" anchor="t">
+            <a:noAutofit/>
+          </a:bodyPr>
+          <a:p>
+            <a:pPr marL="343080" indent="-343080" defTabSz="914400">
+              <a:lnSpc>
+                <a:spcPct val="100000"/>
+              </a:lnSpc>
+              <a:spcBef>
+                <a:spcPts val="1417"/>
+              </a:spcBef>
+              <a:buClr>
+                <a:srgbClr val="000000"/>
+              </a:buClr>
+              <a:buFont typeface="Arial"/>
+              <a:buChar char="•"/>
+            </a:pPr>
+            <a:r>
+              <a:rPr b="0" lang="en-GB" sz="2400" strike="noStrike" u="none">
+                <a:solidFill>
+                  <a:schemeClr val="dk1"/>
+                </a:solidFill>
+                <a:uFillTx/>
+                <a:latin typeface="Calibri"/>
+              </a:rPr>
+              <a:t>What information do we profile from the user to make </a:t>
+            </a:r>
+            <a:r>
+              <a:rPr b="1" lang="en-GB" sz="2400" strike="noStrike" u="none">
+                <a:solidFill>
+                  <a:schemeClr val="dk1"/>
+                </a:solidFill>
+                <a:uFillTx/>
+                <a:latin typeface="Calibri"/>
+              </a:rPr>
+              <a:t>personalised </a:t>
+            </a:r>
+            <a:r>
+              <a:rPr b="0" lang="en-GB" sz="2400" strike="noStrike" u="none">
+                <a:solidFill>
+                  <a:schemeClr val="dk1"/>
+                </a:solidFill>
+                <a:uFillTx/>
+                <a:latin typeface="Calibri"/>
+              </a:rPr>
+              <a:t>college course recommendations?</a:t>
+            </a:r>
+            <a:endParaRPr b="0" lang="en-US" sz="2400" strike="noStrike" u="none">
+              <a:solidFill>
+                <a:srgbClr val="000000"/>
+              </a:solidFill>
+              <a:uFillTx/>
+              <a:latin typeface="Arial"/>
+            </a:endParaRPr>
+          </a:p>
+          <a:p>
+            <a:pPr marL="343080" indent="-343080" defTabSz="914400">
+              <a:lnSpc>
+                <a:spcPct val="100000"/>
+              </a:lnSpc>
+              <a:spcBef>
+                <a:spcPts val="1417"/>
+              </a:spcBef>
+              <a:buClr>
+                <a:srgbClr val="000000"/>
+              </a:buClr>
+              <a:buFont typeface="Arial"/>
+              <a:buChar char="•"/>
+            </a:pPr>
+            <a:r>
+              <a:rPr b="1" lang="en-GB" sz="2400" strike="noStrike" u="none">
+                <a:solidFill>
+                  <a:schemeClr val="dk1"/>
+                </a:solidFill>
+                <a:uFillTx/>
+                <a:latin typeface="Calibri"/>
+              </a:rPr>
+              <a:t>Research Gap: </a:t>
+            </a:r>
+            <a:r>
+              <a:rPr b="0" lang="en-GB" sz="2400" strike="noStrike" u="none">
+                <a:solidFill>
+                  <a:schemeClr val="dk1"/>
+                </a:solidFill>
+                <a:uFillTx/>
+                <a:latin typeface="Calibri"/>
+              </a:rPr>
+              <a:t>RIASEC + Academic Interests</a:t>
+            </a:r>
+            <a:endParaRPr b="0" lang="en-US" sz="2400" strike="noStrike" u="none">
+              <a:solidFill>
+                <a:srgbClr val="000000"/>
+              </a:solidFill>
+              <a:uFillTx/>
+              <a:latin typeface="Arial"/>
+            </a:endParaRPr>
+          </a:p>
+        </p:txBody>
+      </p:sp>
+      <p:pic>
+        <p:nvPicPr>
+          <p:cNvPr id="46" name="" descr=""/>
+          <p:cNvPicPr/>
+          <p:nvPr/>
+        </p:nvPicPr>
+        <p:blipFill>
+          <a:blip r:embed="rId1"/>
+          <a:stretch/>
+        </p:blipFill>
+        <p:spPr>
+          <a:xfrm>
+            <a:off x="1600200" y="1208880"/>
+            <a:ext cx="6152040" cy="3489120"/>
+          </a:xfrm>
+          <a:prstGeom prst="rect">
+            <a:avLst/>
+          </a:prstGeom>
+          <a:noFill/>
+          <a:ln w="0">
+            <a:noFill/>
+          </a:ln>
+        </p:spPr>
+      </p:pic>
+      <p:sp>
+        <p:nvSpPr>
+          <p:cNvPr id="4" name="PlaceHolder 3"/>
+          <p:cNvSpPr>
+            <a:spLocks noGrp="1"/>
+          </p:cNvSpPr>
+          <p:nvPr>
+            <p:ph type="sldNum" idx="2"/>
+          </p:nvPr>
+        </p:nvSpPr>
+        <p:spPr/>
+        <p:txBody>
+          <a:bodyPr/>
+          <a:p>
+            <a:fld id="{556D85E1-EB56-4992-A4EF-251B479BF0C3}" type="slidenum">
+              <a:t>4</a:t>
+            </a:fld>
+          </a:p>
+        </p:txBody>
+      </p:sp>
+    </p:spTree>
+  </p:cSld>
+  <mc:AlternateContent>
+    <mc:Choice Requires="p14">
+      <p:transition spd="slow" p14:dur="2000"/>
+    </mc:Choice>
+    <mc:Fallback>
+      <p:transition spd="slow"/>
+    </mc:Fallback>
+  </mc:AlternateContent>
+</p:sld>
+</file>
+
+<file path=ppt/slides/slide5.xml><?xml version="1.0" encoding="utf-8"?>
+<p:sld xmlns:a="http://schemas.openxmlformats.org/drawingml/2006/main" xmlns:p="http://schemas.openxmlformats.org/presentationml/2006/main" xmlns:r="http://schemas.openxmlformats.org/officeDocument/2006/relationships" xmlns:p14="http://schemas.microsoft.com/office/powerpoint/2010/main" xmlns:p15="http://schemas.microsoft.com/office/powerpoint/2012/main" xmlns:mc="http://schemas.openxmlformats.org/markup-compatibility/2006">
+  <p:cSld>
+    <p:spTree>
+      <p:nvGrpSpPr>
+        <p:cNvPr id="1" name=""/>
+        <p:cNvGrpSpPr/>
+        <p:nvPr/>
+      </p:nvGrpSpPr>
+      <p:grpSpPr>
+        <a:xfrm>
+          <a:off x="0" y="0"/>
+          <a:ext cx="0" cy="0"/>
+          <a:chOff x="0" y="0"/>
+          <a:chExt cx="0" cy="0"/>
+        </a:xfrm>
+      </p:grpSpPr>
+      <p:sp>
+        <p:nvSpPr>
+          <p:cNvPr id="47" name="PlaceHolder 1"/>
+          <p:cNvSpPr>
+            <a:spLocks noGrp="1"/>
+          </p:cNvSpPr>
+          <p:nvPr>
+            <p:ph type="title"/>
+          </p:nvPr>
+        </p:nvSpPr>
+        <p:spPr>
+          <a:xfrm>
+            <a:off x="828720" y="360000"/>
+            <a:ext cx="7499880" cy="560520"/>
+          </a:xfrm>
+          <a:prstGeom prst="rect">
+            <a:avLst/>
+          </a:prstGeom>
+          <a:noFill/>
+          <a:ln w="0">
+            <a:noFill/>
+          </a:ln>
+        </p:spPr>
+        <p:txBody>
+          <a:bodyPr lIns="0" rIns="0" tIns="0" bIns="0" anchor="b">
+            <a:noAutofit/>
+          </a:bodyPr>
+          <a:p>
+            <a:pPr indent="0" defTabSz="914400">
+              <a:lnSpc>
+                <a:spcPct val="100000"/>
+              </a:lnSpc>
+              <a:buNone/>
+              <a:tabLst>
+                <a:tab algn="l" pos="0"/>
+              </a:tabLst>
+            </a:pPr>
+            <a:r>
+              <a:rPr b="1" lang="en-GB" sz="2800" strike="noStrike" u="none">
+                <a:solidFill>
+                  <a:schemeClr val="dk1"/>
+                </a:solidFill>
+                <a:uFillTx/>
+                <a:latin typeface="Calibri"/>
+              </a:rPr>
+              <a:t>Design</a:t>
+            </a:r>
+            <a:endParaRPr b="0" lang="en-US" sz="2800" strike="noStrike" u="none">
+              <a:solidFill>
+                <a:srgbClr val="000000"/>
+              </a:solidFill>
+              <a:uFillTx/>
+              <a:latin typeface="Arial"/>
+            </a:endParaRPr>
+          </a:p>
+        </p:txBody>
+      </p:sp>
+      <p:sp>
+        <p:nvSpPr>
+          <p:cNvPr id="48" name="PlaceHolder 2"/>
           <p:cNvSpPr>
             <a:spLocks noGrp="1"/>
           </p:cNvSpPr>
@@ -7123,7 +7582,7 @@
       </p:sp>
       <p:pic>
         <p:nvPicPr>
-          <p:cNvPr id="46" name="" descr=""/>
+          <p:cNvPr id="49" name="" descr=""/>
           <p:cNvPicPr/>
           <p:nvPr/>
         </p:nvPicPr>
@@ -7147,7 +7606,7 @@
       </p:pic>
       <p:pic>
         <p:nvPicPr>
-          <p:cNvPr id="47" name="" descr=""/>
+          <p:cNvPr id="50" name="" descr=""/>
           <p:cNvPicPr/>
           <p:nvPr/>
         </p:nvPicPr>
@@ -7183,7 +7642,7 @@
         <p:txBody>
           <a:bodyPr/>
           <a:p>
-            <a:fld id="{82490D63-A9AD-48EB-8CE7-0C469D50CF93}" type="slidenum">
+            <a:fld id="{8CEAA901-C8AB-44E9-9C96-FBBCCE757995}" type="slidenum">
               <a:t>5</a:t>
             </a:fld>
           </a:p>
@@ -7221,7 +7680,7 @@
       </p:grpSpPr>
       <p:sp>
         <p:nvSpPr>
-          <p:cNvPr id="48" name="PlaceHolder 1"/>
+          <p:cNvPr id="51" name="PlaceHolder 1"/>
           <p:cNvSpPr>
             <a:spLocks noGrp="1"/>
           </p:cNvSpPr>
@@ -7278,7 +7737,7 @@
       </p:sp>
       <p:sp>
         <p:nvSpPr>
-          <p:cNvPr id="49" name="PlaceHolder 2"/>
+          <p:cNvPr id="52" name="PlaceHolder 2"/>
           <p:cNvSpPr>
             <a:spLocks noGrp="1"/>
           </p:cNvSpPr>
@@ -7457,13 +7916,13 @@
       </p:sp>
       <p:graphicFrame>
         <p:nvGraphicFramePr>
-          <p:cNvPr id="50" name=""/>
+          <p:cNvPr id="53" name=""/>
           <p:cNvGraphicFramePr/>
           <p:nvPr/>
         </p:nvGraphicFramePr>
         <p:xfrm>
           <a:off x="6399720" y="1627560"/>
-          <a:ext cx="2371320" cy="2552760"/>
+          <a:ext cx="2371320" cy="2552400"/>
         </p:xfrm>
         <a:graphic>
           <a:graphicData uri="http://schemas.openxmlformats.org/drawingml/2006/table">
@@ -7919,7 +8378,7 @@
       </p:graphicFrame>
       <p:pic>
         <p:nvPicPr>
-          <p:cNvPr id="51" name="" descr=""/>
+          <p:cNvPr id="54" name="" descr=""/>
           <p:cNvPicPr/>
           <p:nvPr/>
         </p:nvPicPr>
@@ -7943,7 +8402,7 @@
       </p:pic>
       <p:sp>
         <p:nvSpPr>
-          <p:cNvPr id="52" name="Text Placeholder 1"/>
+          <p:cNvPr id="55" name="Text Placeholder 1"/>
           <p:cNvSpPr/>
           <p:nvPr/>
         </p:nvSpPr>
@@ -8096,7 +8555,7 @@
         <p:txBody>
           <a:bodyPr/>
           <a:p>
-            <a:fld id="{225C01BF-38C5-420D-9A1C-DC2A531DDACB}" type="slidenum">
+            <a:fld id="{0CEB7CC7-88D3-4492-8FA2-1261BBDBDDFA}" type="slidenum">
               <a:t>6</a:t>
             </a:fld>
           </a:p>
@@ -8134,7 +8593,7 @@
       </p:grpSpPr>
       <p:sp>
         <p:nvSpPr>
-          <p:cNvPr id="53" name="PlaceHolder 1"/>
+          <p:cNvPr id="56" name="PlaceHolder 1"/>
           <p:cNvSpPr>
             <a:spLocks noGrp="1"/>
           </p:cNvSpPr>
@@ -8191,7 +8650,7 @@
       </p:sp>
       <p:sp>
         <p:nvSpPr>
-          <p:cNvPr id="54" name="PlaceHolder 2"/>
+          <p:cNvPr id="57" name="PlaceHolder 2"/>
           <p:cNvSpPr>
             <a:spLocks noGrp="1"/>
           </p:cNvSpPr>
@@ -8235,7 +8694,7 @@
       </p:sp>
       <p:sp>
         <p:nvSpPr>
-          <p:cNvPr id="55" name="Text Placeholder 9"/>
+          <p:cNvPr id="58" name="Text Placeholder 9"/>
           <p:cNvSpPr/>
           <p:nvPr/>
         </p:nvSpPr>
@@ -8365,7 +8824,7 @@
       </p:sp>
       <p:pic>
         <p:nvPicPr>
-          <p:cNvPr id="56" name="" descr=""/>
+          <p:cNvPr id="59" name="" descr=""/>
           <p:cNvPicPr/>
           <p:nvPr/>
         </p:nvPicPr>
@@ -8401,7 +8860,7 @@
         <p:txBody>
           <a:bodyPr/>
           <a:p>
-            <a:fld id="{9781CAB0-89B0-4B4C-852F-A7E1D54C0F55}" type="slidenum">
+            <a:fld id="{A34C4FE7-3512-484D-ACEF-890BF692F753}" type="slidenum">
               <a:t>7</a:t>
             </a:fld>
           </a:p>
@@ -8439,7 +8898,7 @@
       </p:grpSpPr>
       <p:sp>
         <p:nvSpPr>
-          <p:cNvPr id="57" name="PlaceHolder 1"/>
+          <p:cNvPr id="60" name="PlaceHolder 1"/>
           <p:cNvSpPr>
             <a:spLocks noGrp="1"/>
           </p:cNvSpPr>
@@ -8496,7 +8955,7 @@
       </p:sp>
       <p:sp>
         <p:nvSpPr>
-          <p:cNvPr id="58" name="PlaceHolder 2"/>
+          <p:cNvPr id="61" name="PlaceHolder 2"/>
           <p:cNvSpPr>
             <a:spLocks noGrp="1"/>
           </p:cNvSpPr>
@@ -8591,7 +9050,7 @@
       </p:sp>
       <p:pic>
         <p:nvPicPr>
-          <p:cNvPr id="59" name="" descr=""/>
+          <p:cNvPr id="62" name="" descr=""/>
           <p:cNvPicPr/>
           <p:nvPr/>
         </p:nvPicPr>
@@ -8615,7 +9074,7 @@
       </p:pic>
       <p:pic>
         <p:nvPicPr>
-          <p:cNvPr id="60" name="" descr=""/>
+          <p:cNvPr id="63" name="" descr=""/>
           <p:cNvPicPr/>
           <p:nvPr/>
         </p:nvPicPr>
@@ -8651,7 +9110,7 @@
         <p:txBody>
           <a:bodyPr/>
           <a:p>
-            <a:fld id="{18DE978C-28D1-438F-9B66-6F225D9FE75B}" type="slidenum">
+            <a:fld id="{2C578433-AD0E-4CA9-8E49-1B9A92EF472C}" type="slidenum">
               <a:t>8</a:t>
             </a:fld>
           </a:p>
@@ -8689,7 +9148,7 @@
       </p:grpSpPr>
       <p:sp>
         <p:nvSpPr>
-          <p:cNvPr id="61" name="PlaceHolder 1"/>
+          <p:cNvPr id="64" name="PlaceHolder 1"/>
           <p:cNvSpPr>
             <a:spLocks noGrp="1"/>
           </p:cNvSpPr>
@@ -8746,7 +9205,7 @@
       </p:sp>
       <p:pic>
         <p:nvPicPr>
-          <p:cNvPr id="62" name="" descr=""/>
+          <p:cNvPr id="65" name="" descr=""/>
           <p:cNvPicPr/>
           <p:nvPr/>
         </p:nvPicPr>
@@ -8771,7 +9230,7 @@
       </p:pic>
       <p:sp>
         <p:nvSpPr>
-          <p:cNvPr id="63" name="PlaceHolder 2"/>
+          <p:cNvPr id="66" name="PlaceHolder 2"/>
           <p:cNvSpPr>
             <a:spLocks noGrp="1"/>
           </p:cNvSpPr>
@@ -8815,7 +9274,7 @@
       </p:sp>
       <p:sp>
         <p:nvSpPr>
-          <p:cNvPr id="64" name="Text Placeholder 8"/>
+          <p:cNvPr id="67" name="Text Placeholder 8"/>
           <p:cNvSpPr/>
           <p:nvPr/>
         </p:nvSpPr>
@@ -8879,7 +9338,7 @@
       </p:sp>
       <p:pic>
         <p:nvPicPr>
-          <p:cNvPr id="65" name="" descr=""/>
+          <p:cNvPr id="68" name="" descr=""/>
           <p:cNvPicPr/>
           <p:nvPr/>
         </p:nvPicPr>
@@ -8903,7 +9362,7 @@
       </p:pic>
       <p:pic>
         <p:nvPicPr>
-          <p:cNvPr id="66" name="" descr=""/>
+          <p:cNvPr id="69" name="" descr=""/>
           <p:cNvPicPr/>
           <p:nvPr/>
         </p:nvPicPr>
@@ -8927,7 +9386,7 @@
       </p:pic>
       <p:sp>
         <p:nvSpPr>
-          <p:cNvPr id="67" name="Text Placeholder 11"/>
+          <p:cNvPr id="70" name="Text Placeholder 11"/>
           <p:cNvSpPr/>
           <p:nvPr/>
         </p:nvSpPr>
@@ -8968,6 +9427,59 @@
               <a:buFont typeface="Arial"/>
               <a:buChar char="•"/>
             </a:pPr>
+            <a:endParaRPr b="0" lang="en-US" sz="1800" strike="noStrike" u="none">
+              <a:solidFill>
+                <a:srgbClr val="000000"/>
+              </a:solidFill>
+              <a:uFillTx/>
+              <a:latin typeface="Arial"/>
+            </a:endParaRPr>
+          </a:p>
+        </p:txBody>
+      </p:sp>
+      <p:sp>
+        <p:nvSpPr>
+          <p:cNvPr id="71" name="Text Placeholder 6"/>
+          <p:cNvSpPr/>
+          <p:nvPr/>
+        </p:nvSpPr>
+        <p:spPr>
+          <a:xfrm>
+            <a:off x="685800" y="5790600"/>
+            <a:ext cx="7499880" cy="4039200"/>
+          </a:xfrm>
+          <a:prstGeom prst="rect">
+            <a:avLst/>
+          </a:prstGeom>
+          <a:noFill/>
+          <a:ln w="0">
+            <a:noFill/>
+          </a:ln>
+        </p:spPr>
+        <p:style>
+          <a:lnRef idx="0"/>
+          <a:fillRef idx="0"/>
+          <a:effectRef idx="0"/>
+          <a:fontRef idx="minor"/>
+        </p:style>
+        <p:txBody>
+          <a:bodyPr lIns="0" rIns="0" tIns="0" bIns="0" anchor="t">
+            <a:noAutofit/>
+          </a:bodyPr>
+          <a:p>
+            <a:pPr marL="343080" indent="-343080" defTabSz="914400">
+              <a:lnSpc>
+                <a:spcPct val="100000"/>
+              </a:lnSpc>
+              <a:spcBef>
+                <a:spcPts val="1417"/>
+              </a:spcBef>
+              <a:buClr>
+                <a:srgbClr val="000000"/>
+              </a:buClr>
+              <a:buFont typeface="Arial"/>
+              <a:buChar char="•"/>
+            </a:pPr>
             <a:r>
               <a:rPr b="0" lang="en-US" sz="2400" strike="noStrike" u="none">
                 <a:solidFill>
@@ -8988,7 +9500,7 @@
                 <a:latin typeface="Calibri"/>
                 <a:ea typeface="DejaVu Sans"/>
               </a:rPr>
-              <a:t>Top 20 </a:t>
+              <a:t>20 </a:t>
             </a:r>
             <a:r>
               <a:rPr b="0" lang="en-US" sz="2400" strike="noStrike" u="none">
@@ -8999,7 +9511,7 @@
                 <a:latin typeface="Calibri"/>
                 <a:ea typeface="DejaVu Sans"/>
               </a:rPr>
-              <a:t>matches</a:t>
+              <a:t>college courses</a:t>
             </a:r>
             <a:endParaRPr b="0" lang="en-US" sz="2400" strike="noStrike" u="none">
               <a:solidFill>
@@ -9025,7 +9537,7 @@
         <p:txBody>
           <a:bodyPr/>
           <a:p>
-            <a:fld id="{C9EE5FB4-1FAC-4ACE-A5AC-658A934D4F48}" type="slidenum">
+            <a:fld id="{74654B4D-36C1-4F73-8B21-8B229F627624}" type="slidenum">
               <a:t>9</a:t>
             </a:fld>
           </a:p>
@@ -9469,6 +9981,112 @@
 </file>
 
 <file path=ppt/theme/theme5.xml><?xml version="1.0" encoding="utf-8"?>
+<a:theme xmlns:a="http://schemas.openxmlformats.org/drawingml/2006/main" xmlns:r="http://schemas.openxmlformats.org/officeDocument/2006/relationships" name="Trinity_PPT_Calibri_Option1">
+  <a:themeElements>
+    <a:clrScheme name="Trinity College">
+      <a:dk1>
+        <a:srgbClr val="000000"/>
+      </a:dk1>
+      <a:lt1>
+        <a:srgbClr val="ffffff"/>
+      </a:lt1>
+      <a:dk2>
+        <a:srgbClr val="3e6db2"/>
+      </a:dk2>
+      <a:lt2>
+        <a:srgbClr val="ffffff"/>
+      </a:lt2>
+      <a:accent1>
+        <a:srgbClr val="4f81bd"/>
+      </a:accent1>
+      <a:accent2>
+        <a:srgbClr val="0e73b9"/>
+      </a:accent2>
+      <a:accent3>
+        <a:srgbClr val="7c7c7c"/>
+      </a:accent3>
+      <a:accent4>
+        <a:srgbClr val="a6a6a6"/>
+      </a:accent4>
+      <a:accent5>
+        <a:srgbClr val="4f81bd"/>
+      </a:accent5>
+      <a:accent6>
+        <a:srgbClr val="3e6db2"/>
+      </a:accent6>
+      <a:hlink>
+        <a:srgbClr val="000000"/>
+      </a:hlink>
+      <a:folHlink>
+        <a:srgbClr val="000000"/>
+      </a:folHlink>
+    </a:clrScheme>
+    <a:fontScheme name="Office">
+      <a:majorFont>
+        <a:latin typeface="Arial" pitchFamily="0" charset="1"/>
+        <a:ea typeface="DejaVu Sans" pitchFamily="0" charset="1"/>
+        <a:cs typeface="DejaVu Sans" pitchFamily="0" charset="1"/>
+      </a:majorFont>
+      <a:minorFont>
+        <a:latin typeface="Arial" pitchFamily="0" charset="1"/>
+        <a:ea typeface="DejaVu Sans" pitchFamily="0" charset="1"/>
+        <a:cs typeface="DejaVu Sans" pitchFamily="0" charset="1"/>
+      </a:minorFont>
+    </a:fontScheme>
+    <a:fmtScheme>
+      <a:fillStyleLst>
+        <a:solidFill>
+          <a:schemeClr val="phClr"/>
+        </a:solidFill>
+        <a:solidFill>
+          <a:schemeClr val="phClr"/>
+        </a:solidFill>
+        <a:solidFill>
+          <a:schemeClr val="phClr"/>
+        </a:solidFill>
+      </a:fillStyleLst>
+      <a:lnStyleLst>
+        <a:ln w="6350" cap="flat" cmpd="sng" algn="ctr">
+          <a:prstDash val="solid"/>
+          <a:miter/>
+        </a:ln>
+        <a:ln w="6350" cap="flat" cmpd="sng" algn="ctr">
+          <a:prstDash val="solid"/>
+          <a:miter/>
+        </a:ln>
+        <a:ln w="6350" cap="flat" cmpd="sng" algn="ctr">
+          <a:prstDash val="solid"/>
+          <a:miter/>
+        </a:ln>
+      </a:lnStyleLst>
+      <a:effectStyleLst>
+        <a:effectStyle>
+          <a:effectLst/>
+        </a:effectStyle>
+        <a:effectStyle>
+          <a:effectLst/>
+        </a:effectStyle>
+        <a:effectStyle>
+          <a:effectLst/>
+        </a:effectStyle>
+      </a:effectStyleLst>
+      <a:bgFillStyleLst>
+        <a:solidFill>
+          <a:schemeClr val="phClr"/>
+        </a:solidFill>
+        <a:solidFill>
+          <a:schemeClr val="phClr"/>
+        </a:solidFill>
+        <a:solidFill>
+          <a:schemeClr val="phClr"/>
+        </a:solidFill>
+      </a:bgFillStyleLst>
+    </a:fmtScheme>
+  </a:themeElements>
+</a:theme>
+</file>
+
+<file path=ppt/theme/theme6.xml><?xml version="1.0" encoding="utf-8"?>
 <a:theme xmlns:a="http://schemas.openxmlformats.org/drawingml/2006/main" xmlns:r="http://schemas.openxmlformats.org/officeDocument/2006/relationships" name="Office Theme">
   <a:themeElements>
     <a:clrScheme name="LibreOffice">
